--- a/presentacion/defensa_oral.pptx
+++ b/presentacion/defensa_oral.pptx
@@ -8836,8 +8836,8 @@
         </p:blipFill>
         <p:spPr>
           <a:xfrm>
-            <a:off x="365760" y="2123578"/>
-            <a:ext cx="7680960" cy="3525242"/>
+            <a:off x="365760" y="2124356"/>
+            <a:ext cx="7680960" cy="3523686"/>
           </a:xfrm>
           <a:prstGeom prst="rect">
             <a:avLst/>
@@ -8963,6 +8963,44 @@
                 </a:solidFill>
                 <a:latin typeface="Calibri"/>
               </a:rPr>
+              <a:t>—  En pesos reales quedó casi estancado</a:t>
+            </a:r>
+          </a:p>
+          <a:p>
+            <a:pPr algn="l">
+              <a:spcBef>
+                <a:spcPts val="0"/>
+              </a:spcBef>
+              <a:spcAft>
+                <a:spcPts val="900"/>
+              </a:spcAft>
+            </a:pPr>
+            <a:r>
+              <a:rPr sz="1200" b="0" i="0">
+                <a:solidFill>
+                  <a:srgbClr val="FFFFFF"/>
+                </a:solidFill>
+                <a:latin typeface="Calibri"/>
+              </a:rPr>
+              <a:t>—  En USD del momento casi se triplicó (el dólar se atrasó)</a:t>
+            </a:r>
+          </a:p>
+          <a:p>
+            <a:pPr algn="l">
+              <a:spcBef>
+                <a:spcPts val="0"/>
+              </a:spcBef>
+              <a:spcAft>
+                <a:spcPts val="900"/>
+              </a:spcAft>
+            </a:pPr>
+            <a:r>
+              <a:rPr sz="1200" b="0" i="0">
+                <a:solidFill>
+                  <a:srgbClr val="FFFFFF"/>
+                </a:solidFill>
+                <a:latin typeface="Calibri"/>
+              </a:rPr>
               <a:t>—  Pico en 2024.1 tras la devaluación</a:t>
             </a:r>
           </a:p>
@@ -8982,45 +9020,7 @@
                 </a:solidFill>
                 <a:latin typeface="Calibri"/>
               </a:rPr>
-              <a:t>—  vs RIPTE saltó a 169: se despegó del salario formal</a:t>
-            </a:r>
-          </a:p>
-          <a:p>
-            <a:pPr algn="l">
-              <a:spcBef>
-                <a:spcPts val="0"/>
-              </a:spcBef>
-              <a:spcAft>
-                <a:spcPts val="900"/>
-              </a:spcAft>
-            </a:pPr>
-            <a:r>
-              <a:rPr sz="1200" b="0" i="0">
-                <a:solidFill>
-                  <a:srgbClr val="FFFFFF"/>
-                </a:solidFill>
-                <a:latin typeface="Calibri"/>
-              </a:rPr>
-              <a:t>—  Recuperación hacia 2025.2</a:t>
-            </a:r>
-          </a:p>
-          <a:p>
-            <a:pPr algn="l">
-              <a:spcBef>
-                <a:spcPts val="0"/>
-              </a:spcBef>
-              <a:spcAft>
-                <a:spcPts val="900"/>
-              </a:spcAft>
-            </a:pPr>
-            <a:r>
-              <a:rPr sz="1200" b="0" i="0">
-                <a:solidFill>
-                  <a:srgbClr val="FFFFFF"/>
-                </a:solidFill>
-                <a:latin typeface="Calibri"/>
-              </a:rPr>
-              <a:t>—  En canastas, poder de compra más apretado</a:t>
+              <a:t>—  vs RIPTE: los devs se despegaron del salario formal</a:t>
             </a:r>
           </a:p>
         </p:txBody>

--- a/presentacion/defensa_oral.pptx
+++ b/presentacion/defensa_oral.pptx
@@ -6573,7 +6573,7 @@
                 </a:solidFill>
                 <a:latin typeface="Calibri"/>
               </a:rPr>
-              <a:t>—  Exportador joven (21%) — USD, remoto</a:t>
+              <a:t>—  Junior remoto (49%) — $2,75M</a:t>
             </a:r>
           </a:p>
           <a:p>
@@ -6592,7 +6592,7 @@
                 </a:solidFill>
                 <a:latin typeface="Calibri"/>
               </a:rPr>
-              <a:t>—  Senior/Líder (21%) — el mejor pago</a:t>
+              <a:t>—  Semi-senior dolarizado (21%) — $2,81M</a:t>
             </a:r>
           </a:p>
           <a:p>
@@ -6611,7 +6611,7 @@
                 </a:solidFill>
                 <a:latin typeface="Calibri"/>
               </a:rPr>
-              <a:t>—  Dev local junior (49%) — en pesos</a:t>
+              <a:t>—  Senior remoto (21%) — $4,43M · el mejor pago</a:t>
             </a:r>
           </a:p>
           <a:p>
@@ -6630,7 +6630,7 @@
                 </a:solidFill>
                 <a:latin typeface="Calibri"/>
               </a:rPr>
-              <a:t>—  Corporativo senior (9%) — grandes empresas</a:t>
+              <a:t>—  Senior +15 corporativo estable (9%) — $4,01M</a:t>
             </a:r>
           </a:p>
           <a:p>

--- a/presentacion/defensa_oral.pptx
+++ b/presentacion/defensa_oral.pptx
@@ -5181,7 +5181,7 @@
                 </a:solidFill>
                 <a:latin typeface="Arial"/>
               </a:rPr>
-              <a:t>Cinco técnicas, una ganadora</a:t>
+              <a:t>Cinco técnicas comparadas</a:t>
             </a:r>
           </a:p>
         </p:txBody>
@@ -5348,7 +5348,7 @@
                 </a:solidFill>
                 <a:latin typeface="Calibri"/>
               </a:rPr>
-              <a:t>—  Lineal múltiple: 0.24</a:t>
+              <a:t>—  Lineal múltiple: 0.22</a:t>
             </a:r>
           </a:p>
           <a:p>
@@ -5367,7 +5367,7 @@
                 </a:solidFill>
                 <a:latin typeface="Calibri"/>
               </a:rPr>
-              <a:t>—  Polinómica: 0.29</a:t>
+              <a:t>—  Árbol: 0.20</a:t>
             </a:r>
           </a:p>
           <a:p>
@@ -5386,7 +5386,7 @@
                 </a:solidFill>
                 <a:latin typeface="Calibri"/>
               </a:rPr>
-              <a:t>—  Árbol: 0.22</a:t>
+              <a:t>—  Polinómica: 0.28</a:t>
             </a:r>
           </a:p>
           <a:p>
@@ -5405,7 +5405,7 @@
                 </a:solidFill>
                 <a:latin typeface="Calibri"/>
               </a:rPr>
-              <a:t>—  Random Forest: 0.30</a:t>
+              <a:t>—  Random Forest: 0.27 (elegido)</a:t>
             </a:r>
           </a:p>
         </p:txBody>
@@ -5685,7 +5685,7 @@
                 </a:solidFill>
                 <a:latin typeface="Arial"/>
               </a:rPr>
-              <a:t>Mejor desempeño</a:t>
+              <a:t>A la par del mejor R²</a:t>
             </a:r>
           </a:p>
           <a:p>
@@ -5704,7 +5704,7 @@
                 </a:solidFill>
                 <a:latin typeface="Calibri"/>
               </a:rPr>
-              <a:t>mayor R² en test (0.30) y menor error (MAE $1,42M).</a:t>
+              <a:t>empata con la polinómica en test (R²≈0.27); se elige por lo demás.</a:t>
             </a:r>
           </a:p>
         </p:txBody>
@@ -7559,7 +7559,7 @@
                 </a:solidFill>
                 <a:latin typeface="Arial"/>
               </a:rPr>
-              <a:t>Alta cardinalidad de roles/techs</a:t>
+              <a:t>Ruido de las tecnologías</a:t>
             </a:r>
           </a:p>
           <a:p>
@@ -7578,7 +7578,7 @@
                 </a:solidFill>
                 <a:latin typeface="Calibri"/>
               </a:rPr>
-              <a:t>agrupación + multi-hot para señal estable.</a:t>
+              <a:t>sacadas del modelo (su premium era proxy del contexto); roles agrupados en top-15.</a:t>
             </a:r>
           </a:p>
         </p:txBody>
@@ -14533,7 +14533,7 @@
                 </a:solidFill>
                 <a:latin typeface="Arial"/>
               </a:rPr>
-              <a:t>Multi-hot de tecnologías (top 20)</a:t>
+              <a:t>Tecnologías: FUERA del modelo</a:t>
             </a:r>
           </a:p>
           <a:p>
@@ -14552,7 +14552,7 @@
                 </a:solidFill>
                 <a:latin typeface="Calibri"/>
               </a:rPr>
-              <a:t>texto libre «python, sql» → 20 binarias → captura el premium por stack específico.</a:t>
+              <a:t>su premium era proxy del contexto (backend/dólar) y como feature generaban ruido; se analizan en el EDA.</a:t>
             </a:r>
           </a:p>
         </p:txBody>

--- a/presentacion/defensa_oral.pptx
+++ b/presentacion/defensa_oral.pptx
@@ -26,7 +26,6 @@
     <p:sldId id="274" r:id="rId25"/>
     <p:sldId id="275" r:id="rId26"/>
     <p:sldId id="276" r:id="rId27"/>
-    <p:sldId id="277" r:id="rId28"/>
   </p:sldIdLst>
   <p:sldSz cx="12191695" cy="6858000" type="screen4x3"/>
   <p:notesSz cx="6858000" cy="9144000"/>
@@ -7730,14 +7729,14 @@
                 </a:solidFill>
                 <a:latin typeface="Arial"/>
               </a:rPr>
-              <a:t>Brechas, inflación y región</a:t>
+              <a:t>Brechas salariales y región</a:t>
             </a:r>
           </a:p>
         </p:txBody>
       </p:sp>
       <p:pic>
         <p:nvPicPr>
-          <p:cNvPr id="5" name="Picture 4" descr="eda_06_poder_adquisitivo.png"/>
+          <p:cNvPr id="5" name="Picture 4" descr="eda_05_geografia.png"/>
           <p:cNvPicPr>
             <a:picLocks noChangeAspect="1"/>
           </p:cNvPicPr>
@@ -7751,8 +7750,8 @@
         </p:blipFill>
         <p:spPr>
           <a:xfrm>
-            <a:off x="457200" y="2237966"/>
-            <a:ext cx="6766560" cy="3022147"/>
+            <a:off x="1057444" y="1737360"/>
+            <a:ext cx="5566071" cy="4023360"/>
           </a:xfrm>
           <a:prstGeom prst="rect">
             <a:avLst/>
@@ -7840,7 +7839,7 @@
                 </a:solidFill>
                 <a:latin typeface="Arial"/>
               </a:rPr>
-              <a:t>−62%</a:t>
+              <a:t>3×</a:t>
             </a:r>
           </a:p>
           <a:p>
@@ -7859,7 +7858,7 @@
                 </a:solidFill>
                 <a:latin typeface="Calibri"/>
               </a:rPr>
-              <a:t>brecha promedio entre el sueldo nominal y el real</a:t>
+              <a:t>brecha junior → senior: la experiencia manda</a:t>
             </a:r>
           </a:p>
           <a:p>
@@ -7897,7 +7896,7 @@
                 </a:solidFill>
                 <a:latin typeface="Calibri"/>
               </a:rPr>
-              <a:t>jr→sr casi 3×  ·  liderazgo +0,19 (la mayor)</a:t>
+              <a:t>liderazgo +0,19 (la mayor)  ·  remoto +43% en USD</a:t>
             </a:r>
           </a:p>
           <a:p>
@@ -7954,7 +7953,7 @@
                 </a:solidFill>
                 <a:latin typeface="Calibri"/>
               </a:rPr>
-              <a:t>Dolarización (H6): no dio más estabilidad.</a:t>
+              <a:t>Dolarización (H5): no dio más estabilidad.</a:t>
             </a:r>
           </a:p>
         </p:txBody>
@@ -8773,7 +8772,7 @@
                 </a:solidFill>
                 <a:latin typeface="Arial"/>
               </a:rPr>
-              <a:t>RESULTADOS · IMPACTO DE LA INFLACIÓN</a:t>
+              <a:t>RESULTADOS · COMPARATIVA INTERNACIONAL</a:t>
             </a:r>
           </a:p>
         </p:txBody>
@@ -8815,14 +8814,14 @@
                 </a:solidFill>
                 <a:latin typeface="Arial"/>
               </a:rPr>
-              <a:t>Evolución del poder de compra en el tiempo</a:t>
+              <a:t>Argentina vs el mundo</a:t>
             </a:r>
           </a:p>
         </p:txBody>
       </p:sp>
       <p:pic>
         <p:nvPicPr>
-          <p:cNvPr id="5" name="Picture 4" descr="evolucion_indices.png"/>
+          <p:cNvPr id="5" name="Picture 4" descr="comparacion_mundo.png"/>
           <p:cNvPicPr>
             <a:picLocks noChangeAspect="1"/>
           </p:cNvPicPr>
@@ -8836,8 +8835,8 @@
         </p:blipFill>
         <p:spPr>
           <a:xfrm>
-            <a:off x="365760" y="2124356"/>
-            <a:ext cx="7680960" cy="3523686"/>
+            <a:off x="365760" y="2007196"/>
+            <a:ext cx="7955279" cy="3849447"/>
           </a:xfrm>
           <a:prstGeom prst="rect">
             <a:avLst/>
@@ -8852,8 +8851,8 @@
         </p:nvSpPr>
         <p:spPr>
           <a:xfrm>
-            <a:off x="8229600" y="1828800"/>
-            <a:ext cx="3474720" cy="4114800"/>
+            <a:off x="8412480" y="1828800"/>
+            <a:ext cx="3291840" cy="4114800"/>
           </a:xfrm>
           <a:prstGeom prst="roundRect">
             <a:avLst/>
@@ -8896,8 +8895,8 @@
         </p:nvSpPr>
         <p:spPr>
           <a:xfrm>
-            <a:off x="8458200" y="2057400"/>
-            <a:ext cx="3063240" cy="3749039"/>
+            <a:off x="8641080" y="2057400"/>
+            <a:ext cx="2880360" cy="3749039"/>
           </a:xfrm>
           <a:prstGeom prst="rect">
             <a:avLst/>
@@ -8925,16 +8924,16 @@
                 </a:solidFill>
                 <a:latin typeface="Arial"/>
               </a:rPr>
-              <a:t>QUÉ MUESTRA</a:t>
-            </a:r>
-          </a:p>
-          <a:p>
-            <a:pPr algn="l">
-              <a:spcBef>
-                <a:spcPts val="0"/>
-              </a:spcBef>
-              <a:spcAft>
-                <a:spcPts val="1000"/>
+              <a:t>STACK OVERFLOW</a:t>
+            </a:r>
+          </a:p>
+          <a:p>
+            <a:pPr algn="l">
+              <a:spcBef>
+                <a:spcPts val="0"/>
+              </a:spcBef>
+              <a:spcAft>
+                <a:spcPts val="900"/>
               </a:spcAft>
             </a:pPr>
             <a:r>
@@ -8944,7 +8943,7 @@
                 </a:solidFill>
                 <a:latin typeface="Calibri"/>
               </a:rPr>
-              <a:t>El salario en distintas «varas», base 2022.2 = 100:</a:t>
+              <a:t>—  Argentina USD 3.333/mes</a:t>
             </a:r>
           </a:p>
           <a:p>
@@ -8957,13 +8956,13 @@
               </a:spcAft>
             </a:pPr>
             <a:r>
-              <a:rPr sz="1200" b="0" i="0">
+              <a:rPr sz="1250" b="0" i="0">
                 <a:solidFill>
                   <a:srgbClr val="FFFFFF"/>
                 </a:solidFill>
                 <a:latin typeface="Calibri"/>
               </a:rPr>
-              <a:t>—  En pesos reales quedó casi estancado</a:t>
+              <a:t>—  Arriba de Brasil, Ucrania e India</a:t>
             </a:r>
           </a:p>
           <a:p>
@@ -8976,51 +8975,32 @@
               </a:spcAft>
             </a:pPr>
             <a:r>
-              <a:rPr sz="1200" b="0" i="0">
+              <a:rPr sz="1250" b="0" i="0">
                 <a:solidFill>
                   <a:srgbClr val="FFFFFF"/>
                 </a:solidFill>
                 <a:latin typeface="Calibri"/>
               </a:rPr>
-              <a:t>—  En USD del momento casi se triplicó (el dólar se atrasó)</a:t>
-            </a:r>
-          </a:p>
-          <a:p>
-            <a:pPr algn="l">
-              <a:spcBef>
-                <a:spcPts val="0"/>
-              </a:spcBef>
-              <a:spcAft>
-                <a:spcPts val="900"/>
-              </a:spcAft>
-            </a:pPr>
-            <a:r>
-              <a:rPr sz="1200" b="0" i="0">
-                <a:solidFill>
-                  <a:srgbClr val="FFFFFF"/>
+              <a:t>—  Abajo de Europa y EE.UU. (12.500)</a:t>
+            </a:r>
+          </a:p>
+          <a:p>
+            <a:pPr algn="l">
+              <a:spcBef>
+                <a:spcPts val="0"/>
+              </a:spcBef>
+              <a:spcAft>
+                <a:spcPts val="600"/>
+              </a:spcAft>
+            </a:pPr>
+            <a:r>
+              <a:rPr sz="1200" b="0" i="1">
+                <a:solidFill>
+                  <a:srgbClr val="E6FF00"/>
                 </a:solidFill>
                 <a:latin typeface="Calibri"/>
               </a:rPr>
-              <a:t>—  Pico en 2024.1 tras la devaluación</a:t>
-            </a:r>
-          </a:p>
-          <a:p>
-            <a:pPr algn="l">
-              <a:spcBef>
-                <a:spcPts val="0"/>
-              </a:spcBef>
-              <a:spcAft>
-                <a:spcPts val="900"/>
-              </a:spcAft>
-            </a:pPr>
-            <a:r>
-              <a:rPr sz="1200" b="0" i="0">
-                <a:solidFill>
-                  <a:srgbClr val="FFFFFF"/>
-                </a:solidFill>
-                <a:latin typeface="Calibri"/>
-              </a:rPr>
-              <a:t>—  vs RIPTE: los devs se despegaron del salario formal</a:t>
+              <a:t>Sysarmy mide USD 2.264: más conservador. Stack Overflow capta perfiles más internacionales / senior.</a:t>
             </a:r>
           </a:p>
         </p:txBody>
@@ -9058,164 +9038,6 @@
             <a:avLst/>
           </a:prstGeom>
           <a:solidFill>
-            <a:srgbClr val="FFFFFF"/>
-          </a:solidFill>
-          <a:ln>
-            <a:noFill/>
-          </a:ln>
-          <a:effectLst/>
-        </p:spPr>
-        <p:style>
-          <a:lnRef idx="1">
-            <a:schemeClr val="accent1"/>
-          </a:lnRef>
-          <a:fillRef idx="3">
-            <a:schemeClr val="accent1"/>
-          </a:fillRef>
-          <a:effectRef idx="2">
-            <a:schemeClr val="accent1"/>
-          </a:effectRef>
-          <a:fontRef idx="minor">
-            <a:schemeClr val="lt1"/>
-          </a:fontRef>
-        </p:style>
-        <p:txBody>
-          <a:bodyPr rtlCol="0" anchor="ctr"/>
-          <a:lstStyle/>
-          <a:p>
-            <a:pPr algn="ctr"/>
-          </a:p>
-        </p:txBody>
-      </p:sp>
-      <p:sp>
-        <p:nvSpPr>
-          <p:cNvPr id="3" name="TextBox 2"/>
-          <p:cNvSpPr txBox="1"/>
-          <p:nvPr/>
-        </p:nvSpPr>
-        <p:spPr>
-          <a:xfrm>
-            <a:off x="548640" y="384048"/>
-            <a:ext cx="10058400" cy="457200"/>
-          </a:xfrm>
-          <a:prstGeom prst="rect">
-            <a:avLst/>
-          </a:prstGeom>
-          <a:noFill/>
-        </p:spPr>
-        <p:txBody>
-          <a:bodyPr wrap="square" lIns="45720" rIns="45720" tIns="18288" bIns="18288">
-            <a:spAutoFit/>
-          </a:bodyPr>
-          <a:lstStyle/>
-          <a:p>
-            <a:pPr>
-              <a:spcAft>
-                <a:spcPts val="0"/>
-              </a:spcAft>
-            </a:pPr>
-            <a:r>
-              <a:rPr sz="1300" b="1">
-                <a:solidFill>
-                  <a:srgbClr val="0A0A0A"/>
-                </a:solidFill>
-                <a:latin typeface="Arial"/>
-              </a:rPr>
-              <a:t>06  ·  </a:t>
-            </a:r>
-            <a:r>
-              <a:rPr sz="1300" b="1">
-                <a:solidFill>
-                  <a:srgbClr val="8C8C8C"/>
-                </a:solidFill>
-                <a:latin typeface="Arial"/>
-              </a:rPr>
-              <a:t>RESULTADOS · COMPARATIVA INTERNACIONAL</a:t>
-            </a:r>
-          </a:p>
-        </p:txBody>
-      </p:sp>
-      <p:sp>
-        <p:nvSpPr>
-          <p:cNvPr id="4" name="TextBox 3"/>
-          <p:cNvSpPr txBox="1"/>
-          <p:nvPr/>
-        </p:nvSpPr>
-        <p:spPr>
-          <a:xfrm>
-            <a:off x="548640" y="868680"/>
-            <a:ext cx="11064240" cy="914400"/>
-          </a:xfrm>
-          <a:prstGeom prst="rect">
-            <a:avLst/>
-          </a:prstGeom>
-          <a:noFill/>
-        </p:spPr>
-        <p:txBody>
-          <a:bodyPr wrap="square" lIns="45720" rIns="45720" tIns="18288" bIns="18288">
-            <a:spAutoFit/>
-          </a:bodyPr>
-          <a:lstStyle/>
-          <a:p>
-            <a:pPr algn="l">
-              <a:spcBef>
-                <a:spcPts val="0"/>
-              </a:spcBef>
-              <a:spcAft>
-                <a:spcPts val="0"/>
-              </a:spcAft>
-            </a:pPr>
-            <a:r>
-              <a:rPr sz="3400" b="1" i="0">
-                <a:solidFill>
-                  <a:srgbClr val="0A0A0A"/>
-                </a:solidFill>
-                <a:latin typeface="Arial"/>
-              </a:rPr>
-              <a:t>Argentina vs el mundo</a:t>
-            </a:r>
-          </a:p>
-        </p:txBody>
-      </p:sp>
-      <p:pic>
-        <p:nvPicPr>
-          <p:cNvPr id="5" name="Picture 4" descr="comparacion_mundo.png"/>
-          <p:cNvPicPr>
-            <a:picLocks noChangeAspect="1"/>
-          </p:cNvPicPr>
-          <p:nvPr/>
-        </p:nvPicPr>
-        <p:blipFill>
-          <a:blip r:embed="rId2"/>
-          <a:stretch>
-            <a:fillRect/>
-          </a:stretch>
-        </p:blipFill>
-        <p:spPr>
-          <a:xfrm>
-            <a:off x="365760" y="2007196"/>
-            <a:ext cx="7955279" cy="3849447"/>
-          </a:xfrm>
-          <a:prstGeom prst="rect">
-            <a:avLst/>
-          </a:prstGeom>
-        </p:spPr>
-      </p:pic>
-      <p:sp>
-        <p:nvSpPr>
-          <p:cNvPr id="6" name="Rounded Rectangle 5"/>
-          <p:cNvSpPr/>
-          <p:nvPr/>
-        </p:nvSpPr>
-        <p:spPr>
-          <a:xfrm>
-            <a:off x="8412480" y="1828800"/>
-            <a:ext cx="3291840" cy="4114800"/>
-          </a:xfrm>
-          <a:prstGeom prst="roundRect">
-            <a:avLst/>
-          </a:prstGeom>
-          <a:solidFill>
             <a:srgbClr val="0A0A0A"/>
           </a:solidFill>
           <a:ln>
@@ -9247,14 +9069,14 @@
       </p:sp>
       <p:sp>
         <p:nvSpPr>
-          <p:cNvPr id="7" name="TextBox 6"/>
+          <p:cNvPr id="3" name="TextBox 2"/>
           <p:cNvSpPr txBox="1"/>
           <p:nvPr/>
         </p:nvSpPr>
         <p:spPr>
           <a:xfrm>
-            <a:off x="8641080" y="2057400"/>
-            <a:ext cx="2880360" cy="3749039"/>
+            <a:off x="548640" y="384048"/>
+            <a:ext cx="10058400" cy="457200"/>
           </a:xfrm>
           <a:prstGeom prst="rect">
             <a:avLst/>
@@ -9267,174 +9089,42 @@
           </a:bodyPr>
           <a:lstStyle/>
           <a:p>
-            <a:pPr algn="l">
-              <a:spcBef>
-                <a:spcPts val="0"/>
-              </a:spcBef>
-              <a:spcAft>
-                <a:spcPts val="800"/>
-              </a:spcAft>
-            </a:pPr>
-            <a:r>
-              <a:rPr sz="1300" b="1" i="0">
+            <a:pPr>
+              <a:spcAft>
+                <a:spcPts val="0"/>
+              </a:spcAft>
+            </a:pPr>
+            <a:r>
+              <a:rPr sz="1300" b="1">
                 <a:solidFill>
                   <a:srgbClr val="E6FF00"/>
                 </a:solidFill>
                 <a:latin typeface="Arial"/>
               </a:rPr>
-              <a:t>STACK OVERFLOW</a:t>
-            </a:r>
-          </a:p>
-          <a:p>
-            <a:pPr algn="l">
-              <a:spcBef>
-                <a:spcPts val="0"/>
-              </a:spcBef>
-              <a:spcAft>
-                <a:spcPts val="900"/>
-              </a:spcAft>
-            </a:pPr>
-            <a:r>
-              <a:rPr sz="1250" b="0" i="0">
-                <a:solidFill>
-                  <a:srgbClr val="FFFFFF"/>
-                </a:solidFill>
-                <a:latin typeface="Calibri"/>
-              </a:rPr>
-              <a:t>—  Argentina USD 3.333/mes</a:t>
-            </a:r>
-          </a:p>
-          <a:p>
-            <a:pPr algn="l">
-              <a:spcBef>
-                <a:spcPts val="0"/>
-              </a:spcBef>
-              <a:spcAft>
-                <a:spcPts val="900"/>
-              </a:spcAft>
-            </a:pPr>
-            <a:r>
-              <a:rPr sz="1250" b="0" i="0">
-                <a:solidFill>
-                  <a:srgbClr val="FFFFFF"/>
-                </a:solidFill>
-                <a:latin typeface="Calibri"/>
-              </a:rPr>
-              <a:t>—  Arriba de Brasil, Ucrania e India</a:t>
-            </a:r>
-          </a:p>
-          <a:p>
-            <a:pPr algn="l">
-              <a:spcBef>
-                <a:spcPts val="0"/>
-              </a:spcBef>
-              <a:spcAft>
-                <a:spcPts val="900"/>
-              </a:spcAft>
-            </a:pPr>
-            <a:r>
-              <a:rPr sz="1250" b="0" i="0">
-                <a:solidFill>
-                  <a:srgbClr val="FFFFFF"/>
-                </a:solidFill>
-                <a:latin typeface="Calibri"/>
-              </a:rPr>
-              <a:t>—  Abajo de Europa y EE.UU. (12.500)</a:t>
-            </a:r>
-          </a:p>
-          <a:p>
-            <a:pPr algn="l">
-              <a:spcBef>
-                <a:spcPts val="0"/>
-              </a:spcBef>
-              <a:spcAft>
-                <a:spcPts val="600"/>
-              </a:spcAft>
-            </a:pPr>
-            <a:r>
-              <a:rPr sz="1200" b="0" i="1">
-                <a:solidFill>
-                  <a:srgbClr val="E6FF00"/>
-                </a:solidFill>
-                <a:latin typeface="Calibri"/>
-              </a:rPr>
-              <a:t>Sysarmy mide USD 2.264: más conservador. Stack Overflow capta perfiles más internacionales / senior.</a:t>
-            </a:r>
-          </a:p>
-        </p:txBody>
-      </p:sp>
-    </p:spTree>
-  </p:cSld>
-  <p:clrMapOvr>
-    <a:masterClrMapping/>
-  </p:clrMapOvr>
-</p:sld>
-</file>
-
-<file path=ppt/slides/slide22.xml><?xml version="1.0" encoding="utf-8"?>
-<p:sld xmlns:a="http://schemas.openxmlformats.org/drawingml/2006/main" xmlns:p="http://schemas.openxmlformats.org/presentationml/2006/main" xmlns:r="http://schemas.openxmlformats.org/officeDocument/2006/relationships">
-  <p:cSld>
-    <p:spTree>
-      <p:nvGrpSpPr>
-        <p:cNvPr id="1" name=""/>
-        <p:cNvGrpSpPr/>
-        <p:nvPr/>
-      </p:nvGrpSpPr>
-      <p:grpSpPr/>
-      <p:sp>
-        <p:nvSpPr>
-          <p:cNvPr id="2" name="Rectangle 1"/>
-          <p:cNvSpPr/>
-          <p:nvPr/>
-        </p:nvSpPr>
-        <p:spPr>
-          <a:xfrm>
-            <a:off x="0" y="0"/>
-            <a:ext cx="12191695" cy="6858000"/>
-          </a:xfrm>
-          <a:prstGeom prst="rect">
-            <a:avLst/>
-          </a:prstGeom>
-          <a:solidFill>
-            <a:srgbClr val="0A0A0A"/>
-          </a:solidFill>
-          <a:ln>
-            <a:noFill/>
-          </a:ln>
-          <a:effectLst/>
-        </p:spPr>
-        <p:style>
-          <a:lnRef idx="1">
-            <a:schemeClr val="accent1"/>
-          </a:lnRef>
-          <a:fillRef idx="3">
-            <a:schemeClr val="accent1"/>
-          </a:fillRef>
-          <a:effectRef idx="2">
-            <a:schemeClr val="accent1"/>
-          </a:effectRef>
-          <a:fontRef idx="minor">
-            <a:schemeClr val="lt1"/>
-          </a:fontRef>
-        </p:style>
-        <p:txBody>
-          <a:bodyPr rtlCol="0" anchor="ctr"/>
-          <a:lstStyle/>
-          <a:p>
-            <a:pPr algn="ctr"/>
-          </a:p>
-        </p:txBody>
-      </p:sp>
-      <p:sp>
-        <p:nvSpPr>
-          <p:cNvPr id="3" name="TextBox 2"/>
+              <a:t>07  ·  </a:t>
+            </a:r>
+            <a:r>
+              <a:rPr sz="1300" b="1">
+                <a:solidFill>
+                  <a:srgbClr val="8C8C8C"/>
+                </a:solidFill>
+                <a:latin typeface="Arial"/>
+              </a:rPr>
+              <a:t>CONCLUSIONES</a:t>
+            </a:r>
+          </a:p>
+        </p:txBody>
+      </p:sp>
+      <p:sp>
+        <p:nvSpPr>
+          <p:cNvPr id="4" name="TextBox 3"/>
           <p:cNvSpPr txBox="1"/>
           <p:nvPr/>
         </p:nvSpPr>
         <p:spPr>
           <a:xfrm>
-            <a:off x="548640" y="384048"/>
-            <a:ext cx="10058400" cy="457200"/>
+            <a:off x="548640" y="868680"/>
+            <a:ext cx="11064240" cy="914400"/>
           </a:xfrm>
           <a:prstGeom prst="rect">
             <a:avLst/>
@@ -9447,42 +9137,36 @@
           </a:bodyPr>
           <a:lstStyle/>
           <a:p>
-            <a:pPr>
-              <a:spcAft>
-                <a:spcPts val="0"/>
-              </a:spcAft>
-            </a:pPr>
-            <a:r>
-              <a:rPr sz="1300" b="1">
-                <a:solidFill>
-                  <a:srgbClr val="E6FF00"/>
+            <a:pPr algn="l">
+              <a:spcBef>
+                <a:spcPts val="0"/>
+              </a:spcBef>
+              <a:spcAft>
+                <a:spcPts val="0"/>
+              </a:spcAft>
+            </a:pPr>
+            <a:r>
+              <a:rPr sz="3400" b="1" i="0">
+                <a:solidFill>
+                  <a:srgbClr val="FFFFFF"/>
                 </a:solidFill>
                 <a:latin typeface="Arial"/>
               </a:rPr>
-              <a:t>07  ·  </a:t>
-            </a:r>
-            <a:r>
-              <a:rPr sz="1300" b="1">
-                <a:solidFill>
-                  <a:srgbClr val="8C8C8C"/>
-                </a:solidFill>
-                <a:latin typeface="Arial"/>
-              </a:rPr>
-              <a:t>CONCLUSIONES</a:t>
-            </a:r>
-          </a:p>
-        </p:txBody>
-      </p:sp>
-      <p:sp>
-        <p:nvSpPr>
-          <p:cNvPr id="4" name="TextBox 3"/>
+              <a:t>Hallazgos y valor estratégico</a:t>
+            </a:r>
+          </a:p>
+        </p:txBody>
+      </p:sp>
+      <p:sp>
+        <p:nvSpPr>
+          <p:cNvPr id="5" name="TextBox 4"/>
           <p:cNvSpPr txBox="1"/>
           <p:nvPr/>
         </p:nvSpPr>
         <p:spPr>
           <a:xfrm>
-            <a:off x="548640" y="868680"/>
-            <a:ext cx="11064240" cy="914400"/>
+            <a:off x="548640" y="1783080"/>
+            <a:ext cx="5943600" cy="4480560"/>
           </a:xfrm>
           <a:prstGeom prst="rect">
             <a:avLst/>
@@ -9500,59 +9184,36 @@
                 <a:spcPts val="0"/>
               </a:spcBef>
               <a:spcAft>
-                <a:spcPts val="0"/>
-              </a:spcAft>
-            </a:pPr>
-            <a:r>
-              <a:rPr sz="3400" b="1" i="0">
+                <a:spcPts val="800"/>
+              </a:spcAft>
+            </a:pPr>
+            <a:r>
+              <a:rPr sz="1500" b="1" i="0">
+                <a:solidFill>
+                  <a:srgbClr val="E6FF00"/>
+                </a:solidFill>
+                <a:latin typeface="Arial"/>
+              </a:rPr>
+              <a:t>Principales hallazgos</a:t>
+            </a:r>
+          </a:p>
+          <a:p>
+            <a:pPr algn="l">
+              <a:spcBef>
+                <a:spcPts val="0"/>
+              </a:spcBef>
+              <a:spcAft>
+                <a:spcPts val="1000"/>
+              </a:spcAft>
+            </a:pPr>
+            <a:r>
+              <a:rPr sz="1350" b="0" i="0">
                 <a:solidFill>
                   <a:srgbClr val="FFFFFF"/>
                 </a:solidFill>
-                <a:latin typeface="Arial"/>
-              </a:rPr>
-              <a:t>Hallazgos y valor estratégico</a:t>
-            </a:r>
-          </a:p>
-        </p:txBody>
-      </p:sp>
-      <p:sp>
-        <p:nvSpPr>
-          <p:cNvPr id="5" name="TextBox 4"/>
-          <p:cNvSpPr txBox="1"/>
-          <p:nvPr/>
-        </p:nvSpPr>
-        <p:spPr>
-          <a:xfrm>
-            <a:off x="548640" y="1783080"/>
-            <a:ext cx="5943600" cy="4480560"/>
-          </a:xfrm>
-          <a:prstGeom prst="rect">
-            <a:avLst/>
-          </a:prstGeom>
-          <a:noFill/>
-        </p:spPr>
-        <p:txBody>
-          <a:bodyPr wrap="square" lIns="45720" rIns="45720" tIns="18288" bIns="18288">
-            <a:spAutoFit/>
-          </a:bodyPr>
-          <a:lstStyle/>
-          <a:p>
-            <a:pPr algn="l">
-              <a:spcBef>
-                <a:spcPts val="0"/>
-              </a:spcBef>
-              <a:spcAft>
-                <a:spcPts val="800"/>
-              </a:spcAft>
-            </a:pPr>
-            <a:r>
-              <a:rPr sz="1500" b="1" i="0">
-                <a:solidFill>
-                  <a:srgbClr val="E6FF00"/>
-                </a:solidFill>
-                <a:latin typeface="Arial"/>
-              </a:rPr>
-              <a:t>Principales hallazgos</a:t>
+                <a:latin typeface="Calibri"/>
+              </a:rPr>
+              <a:t>—  El perfil explica ~27% del sueldo: experiencia y liderazgo mandan.</a:t>
             </a:r>
           </a:p>
           <a:p>
@@ -9571,7 +9232,7 @@
                 </a:solidFill>
                 <a:latin typeface="Calibri"/>
               </a:rPr>
-              <a:t>—  El perfil explica ~30% del sueldo: experiencia y liderazgo mandan.</a:t>
+              <a:t>—  Dolarizarse no dio más premium ni estabilidad.</a:t>
             </a:r>
           </a:p>
           <a:p>
@@ -9590,7 +9251,7 @@
                 </a:solidFill>
                 <a:latin typeface="Calibri"/>
               </a:rPr>
-              <a:t>—  Poder de compra real estancado pese a nominales 10× mayores.</a:t>
+              <a:t>—  CABA, grandes empresas y backend (Go/Rust) concentran lo mejor.</a:t>
             </a:r>
           </a:p>
           <a:p>
@@ -9609,26 +9270,7 @@
                 </a:solidFill>
                 <a:latin typeface="Calibri"/>
               </a:rPr>
-              <a:t>—  Dolarizarse no dio más premium ni estabilidad.</a:t>
-            </a:r>
-          </a:p>
-          <a:p>
-            <a:pPr algn="l">
-              <a:spcBef>
-                <a:spcPts val="0"/>
-              </a:spcBef>
-              <a:spcAft>
-                <a:spcPts val="1000"/>
-              </a:spcAft>
-            </a:pPr>
-            <a:r>
-              <a:rPr sz="1350" b="0" i="0">
-                <a:solidFill>
-                  <a:srgbClr val="FFFFFF"/>
-                </a:solidFill>
-                <a:latin typeface="Calibri"/>
-              </a:rPr>
-              <a:t>—  CABA, grandes empresas y backend (Go/Rust) concentran lo mejor.</a:t>
+              <a:t>—  Pipeline 100% reproducible: fuentes crudas versionadas en parquet.</a:t>
             </a:r>
           </a:p>
         </p:txBody>
@@ -10146,7 +9788,7 @@
                 </a:solidFill>
                 <a:latin typeface="Calibri"/>
               </a:rPr>
-              <a:t>El sueldo real de un profesional tech está determinado por su perfil (rol, experiencia, tecnologías) y su contexto (provincia, modalidad), una vez ajustado por el contexto macroeconómico (inflación, tipo de cambio real, competitividad).</a:t>
+              <a:t>El sueldo real de un profesional tech está determinado por su perfil (rol, experiencia) y su contexto (provincia, modalidad, tamaño de empresa), una vez expresado en moneda constante para que las ediciones sean comparables entre sí.</a:t>
             </a:r>
           </a:p>
         </p:txBody>
@@ -10298,7 +9940,7 @@
                 </a:solidFill>
                 <a:latin typeface="Arial"/>
               </a:rPr>
-              <a:t>Siete hipótesis desagregadas</a:t>
+              <a:t>Seis hipótesis desagregadas</a:t>
             </a:r>
           </a:p>
         </p:txBody>
@@ -10311,7 +9953,7 @@
         </p:nvSpPr>
         <p:spPr>
           <a:xfrm>
-            <a:off x="548640" y="1828800"/>
+            <a:off x="548640" y="1965960"/>
             <a:ext cx="868680" cy="841248"/>
           </a:xfrm>
           <a:prstGeom prst="rect">
@@ -10355,7 +9997,7 @@
         </p:nvSpPr>
         <p:spPr>
           <a:xfrm>
-            <a:off x="548640" y="1993392"/>
+            <a:off x="548640" y="2130552"/>
             <a:ext cx="868680" cy="640080"/>
           </a:xfrm>
           <a:prstGeom prst="rect">
@@ -10397,7 +10039,7 @@
         </p:nvSpPr>
         <p:spPr>
           <a:xfrm>
-            <a:off x="1600200" y="2029968"/>
+            <a:off x="1600200" y="2167128"/>
             <a:ext cx="4206240" cy="640080"/>
           </a:xfrm>
           <a:prstGeom prst="rect">
@@ -10439,7 +10081,7 @@
         </p:nvSpPr>
         <p:spPr>
           <a:xfrm>
-            <a:off x="548640" y="2880360"/>
+            <a:off x="548640" y="3337560"/>
             <a:ext cx="868680" cy="841248"/>
           </a:xfrm>
           <a:prstGeom prst="rect">
@@ -10483,7 +10125,7 @@
         </p:nvSpPr>
         <p:spPr>
           <a:xfrm>
-            <a:off x="548640" y="3044952"/>
+            <a:off x="548640" y="3502152"/>
             <a:ext cx="868680" cy="640080"/>
           </a:xfrm>
           <a:prstGeom prst="rect">
@@ -10525,7 +10167,7 @@
         </p:nvSpPr>
         <p:spPr>
           <a:xfrm>
-            <a:off x="1600200" y="3081528"/>
+            <a:off x="1600200" y="3538728"/>
             <a:ext cx="4206240" cy="640080"/>
           </a:xfrm>
           <a:prstGeom prst="rect">
@@ -10567,7 +10209,7 @@
         </p:nvSpPr>
         <p:spPr>
           <a:xfrm>
-            <a:off x="548640" y="3931920"/>
+            <a:off x="548640" y="4709160"/>
             <a:ext cx="868680" cy="841248"/>
           </a:xfrm>
           <a:prstGeom prst="rect">
@@ -10611,7 +10253,7 @@
         </p:nvSpPr>
         <p:spPr>
           <a:xfrm>
-            <a:off x="548640" y="4096511"/>
+            <a:off x="548640" y="4873752"/>
             <a:ext cx="868680" cy="640080"/>
           </a:xfrm>
           <a:prstGeom prst="rect">
@@ -10653,7 +10295,7 @@
         </p:nvSpPr>
         <p:spPr>
           <a:xfrm>
-            <a:off x="1600200" y="4133087"/>
+            <a:off x="1600200" y="4910328"/>
             <a:ext cx="4206240" cy="640080"/>
           </a:xfrm>
           <a:prstGeom prst="rect">
@@ -10695,7 +10337,7 @@
         </p:nvSpPr>
         <p:spPr>
           <a:xfrm>
-            <a:off x="548640" y="4983479"/>
+            <a:off x="6309360" y="1965960"/>
             <a:ext cx="868680" cy="841248"/>
           </a:xfrm>
           <a:prstGeom prst="rect">
@@ -10739,7 +10381,7 @@
         </p:nvSpPr>
         <p:spPr>
           <a:xfrm>
-            <a:off x="548640" y="5148071"/>
+            <a:off x="6309360" y="2130552"/>
             <a:ext cx="868680" cy="640080"/>
           </a:xfrm>
           <a:prstGeom prst="rect">
@@ -10781,7 +10423,7 @@
         </p:nvSpPr>
         <p:spPr>
           <a:xfrm>
-            <a:off x="1600200" y="5184647"/>
+            <a:off x="7360920" y="2167128"/>
             <a:ext cx="4206240" cy="640080"/>
           </a:xfrm>
           <a:prstGeom prst="rect">
@@ -10823,7 +10465,7 @@
         </p:nvSpPr>
         <p:spPr>
           <a:xfrm>
-            <a:off x="6309360" y="1828800"/>
+            <a:off x="6309360" y="3337560"/>
             <a:ext cx="868680" cy="841248"/>
           </a:xfrm>
           <a:prstGeom prst="rect">
@@ -10867,7 +10509,7 @@
         </p:nvSpPr>
         <p:spPr>
           <a:xfrm>
-            <a:off x="6309360" y="1993392"/>
+            <a:off x="6309360" y="3502152"/>
             <a:ext cx="868680" cy="640080"/>
           </a:xfrm>
           <a:prstGeom prst="rect">
@@ -10909,7 +10551,7 @@
         </p:nvSpPr>
         <p:spPr>
           <a:xfrm>
-            <a:off x="7360920" y="2029968"/>
+            <a:off x="7360920" y="3538728"/>
             <a:ext cx="4206240" cy="640080"/>
           </a:xfrm>
           <a:prstGeom prst="rect">
@@ -10938,7 +10580,7 @@
                 </a:solidFill>
                 <a:latin typeface="Calibri"/>
               </a:rPr>
-              <a:t>Nominal ≠ poder adquisitivo real</a:t>
+              <a:t>Cobrar en dólares da más estabilidad</a:t>
             </a:r>
           </a:p>
         </p:txBody>
@@ -10951,7 +10593,7 @@
         </p:nvSpPr>
         <p:spPr>
           <a:xfrm>
-            <a:off x="6309360" y="2880360"/>
+            <a:off x="6309360" y="4709160"/>
             <a:ext cx="868680" cy="841248"/>
           </a:xfrm>
           <a:prstGeom prst="rect">
@@ -10995,7 +10637,7 @@
         </p:nvSpPr>
         <p:spPr>
           <a:xfrm>
-            <a:off x="6309360" y="3044952"/>
+            <a:off x="6309360" y="4873752"/>
             <a:ext cx="868680" cy="640080"/>
           </a:xfrm>
           <a:prstGeom prst="rect">
@@ -11037,135 +10679,7 @@
         </p:nvSpPr>
         <p:spPr>
           <a:xfrm>
-            <a:off x="7360920" y="3081528"/>
-            <a:ext cx="4206240" cy="640080"/>
-          </a:xfrm>
-          <a:prstGeom prst="rect">
-            <a:avLst/>
-          </a:prstGeom>
-          <a:noFill/>
-        </p:spPr>
-        <p:txBody>
-          <a:bodyPr wrap="square" lIns="45720" rIns="45720" tIns="18288" bIns="18288">
-            <a:spAutoFit/>
-          </a:bodyPr>
-          <a:lstStyle/>
-          <a:p>
-            <a:pPr algn="l">
-              <a:spcBef>
-                <a:spcPts val="0"/>
-              </a:spcBef>
-              <a:spcAft>
-                <a:spcPts val="0"/>
-              </a:spcAft>
-            </a:pPr>
-            <a:r>
-              <a:rPr sz="1400" b="0" i="0">
-                <a:solidFill>
-                  <a:srgbClr val="FFFFFF"/>
-                </a:solidFill>
-                <a:latin typeface="Calibri"/>
-              </a:rPr>
-              <a:t>Cobrar en dólares da más estabilidad</a:t>
-            </a:r>
-          </a:p>
-        </p:txBody>
-      </p:sp>
-      <p:sp>
-        <p:nvSpPr>
-          <p:cNvPr id="23" name="Rectangle 22"/>
-          <p:cNvSpPr/>
-          <p:nvPr/>
-        </p:nvSpPr>
-        <p:spPr>
-          <a:xfrm>
-            <a:off x="6309360" y="3931920"/>
-            <a:ext cx="868680" cy="841248"/>
-          </a:xfrm>
-          <a:prstGeom prst="rect">
-            <a:avLst/>
-          </a:prstGeom>
-          <a:solidFill>
-            <a:srgbClr val="E6FF00"/>
-          </a:solidFill>
-          <a:ln>
-            <a:noFill/>
-          </a:ln>
-          <a:effectLst/>
-        </p:spPr>
-        <p:style>
-          <a:lnRef idx="1">
-            <a:schemeClr val="accent1"/>
-          </a:lnRef>
-          <a:fillRef idx="3">
-            <a:schemeClr val="accent1"/>
-          </a:fillRef>
-          <a:effectRef idx="2">
-            <a:schemeClr val="accent1"/>
-          </a:effectRef>
-          <a:fontRef idx="minor">
-            <a:schemeClr val="lt1"/>
-          </a:fontRef>
-        </p:style>
-        <p:txBody>
-          <a:bodyPr rtlCol="0" anchor="ctr"/>
-          <a:lstStyle/>
-          <a:p>
-            <a:pPr algn="ctr"/>
-          </a:p>
-        </p:txBody>
-      </p:sp>
-      <p:sp>
-        <p:nvSpPr>
-          <p:cNvPr id="24" name="TextBox 23"/>
-          <p:cNvSpPr txBox="1"/>
-          <p:nvPr/>
-        </p:nvSpPr>
-        <p:spPr>
-          <a:xfrm>
-            <a:off x="6309360" y="4096511"/>
-            <a:ext cx="868680" cy="640080"/>
-          </a:xfrm>
-          <a:prstGeom prst="rect">
-            <a:avLst/>
-          </a:prstGeom>
-          <a:noFill/>
-        </p:spPr>
-        <p:txBody>
-          <a:bodyPr wrap="square" lIns="45720" rIns="45720" tIns="18288" bIns="18288">
-            <a:spAutoFit/>
-          </a:bodyPr>
-          <a:lstStyle/>
-          <a:p>
-            <a:pPr algn="ctr">
-              <a:spcBef>
-                <a:spcPts val="0"/>
-              </a:spcBef>
-              <a:spcAft>
-                <a:spcPts val="0"/>
-              </a:spcAft>
-            </a:pPr>
-            <a:r>
-              <a:rPr sz="2200" b="1" i="0">
-                <a:solidFill>
-                  <a:srgbClr val="0A0A0A"/>
-                </a:solidFill>
-                <a:latin typeface="Arial"/>
-              </a:rPr>
-              <a:t>H7</a:t>
-            </a:r>
-          </a:p>
-        </p:txBody>
-      </p:sp>
-      <p:sp>
-        <p:nvSpPr>
-          <p:cNvPr id="25" name="TextBox 24"/>
-          <p:cNvSpPr txBox="1"/>
-          <p:nvPr/>
-        </p:nvSpPr>
-        <p:spPr>
-          <a:xfrm>
-            <a:off x="7360920" y="4133087"/>
+            <a:off x="7360920" y="4910328"/>
             <a:ext cx="4206240" cy="640080"/>
           </a:xfrm>
           <a:prstGeom prst="rect">

--- a/presentacion/defensa_oral.pptx
+++ b/presentacion/defensa_oral.pptx
@@ -26,6 +26,9 @@
     <p:sldId id="274" r:id="rId25"/>
     <p:sldId id="275" r:id="rId26"/>
     <p:sldId id="276" r:id="rId27"/>
+    <p:sldId id="277" r:id="rId28"/>
+    <p:sldId id="278" r:id="rId29"/>
+    <p:sldId id="279" r:id="rId30"/>
   </p:sldIdLst>
   <p:sldSz cx="12191695" cy="6858000" type="screen4x3"/>
   <p:notesSz cx="6858000" cy="9144000"/>
@@ -3357,7 +3360,7 @@
             <a:avLst/>
           </a:prstGeom>
           <a:solidFill>
-            <a:srgbClr val="FFFFFF"/>
+            <a:srgbClr val="0A0A0A"/>
           </a:solidFill>
           <a:ln>
             <a:noFill/>
@@ -3416,11 +3419,11 @@
             <a:r>
               <a:rPr sz="1300" b="1">
                 <a:solidFill>
-                  <a:srgbClr val="0A0A0A"/>
+                  <a:srgbClr val="E6FF00"/>
                 </a:solidFill>
                 <a:latin typeface="Arial"/>
               </a:rPr>
-              <a:t>04  ·  </a:t>
+              <a:t>03  ·  </a:t>
             </a:r>
             <a:r>
               <a:rPr sz="1300" b="1">
@@ -3429,7 +3432,7 @@
                 </a:solidFill>
                 <a:latin typeface="Arial"/>
               </a:rPr>
-              <a:t>EDA</a:t>
+              <a:t>FOCO: FEATURE ENGINEERING</a:t>
             </a:r>
           </a:p>
         </p:txBody>
@@ -3467,39 +3470,59 @@
             <a:r>
               <a:rPr sz="3400" b="1" i="0">
                 <a:solidFill>
-                  <a:srgbClr val="0A0A0A"/>
+                  <a:srgbClr val="FFFFFF"/>
                 </a:solidFill>
                 <a:latin typeface="Arial"/>
               </a:rPr>
-              <a:t>Distribución de salarios</a:t>
-            </a:r>
-          </a:p>
-        </p:txBody>
-      </p:sp>
-      <p:pic>
-        <p:nvPicPr>
-          <p:cNvPr id="5" name="Picture 4" descr="distribucion_bn.png"/>
-          <p:cNvPicPr>
-            <a:picLocks noChangeAspect="1"/>
-          </p:cNvPicPr>
-          <p:nvPr/>
-        </p:nvPicPr>
-        <p:blipFill>
-          <a:blip r:embed="rId2"/>
-          <a:stretch>
-            <a:fillRect/>
-          </a:stretch>
-        </p:blipFill>
-        <p:spPr>
-          <a:xfrm>
-            <a:off x="457200" y="2316158"/>
-            <a:ext cx="8503920" cy="3048642"/>
-          </a:xfrm>
-          <a:prstGeom prst="rect">
-            <a:avLst/>
-          </a:prstGeom>
-        </p:spPr>
-      </p:pic>
+              <a:t>Construcción de variables — y su justificación</a:t>
+            </a:r>
+          </a:p>
+        </p:txBody>
+      </p:sp>
+      <p:sp>
+        <p:nvSpPr>
+          <p:cNvPr id="5" name="Rounded Rectangle 4"/>
+          <p:cNvSpPr/>
+          <p:nvPr/>
+        </p:nvSpPr>
+        <p:spPr>
+          <a:xfrm>
+            <a:off x="548640" y="1828800"/>
+            <a:ext cx="5486400" cy="1280160"/>
+          </a:xfrm>
+          <a:prstGeom prst="roundRect">
+            <a:avLst/>
+          </a:prstGeom>
+          <a:solidFill>
+            <a:srgbClr val="1A1A1A"/>
+          </a:solidFill>
+          <a:ln>
+            <a:noFill/>
+          </a:ln>
+          <a:effectLst/>
+        </p:spPr>
+        <p:style>
+          <a:lnRef idx="1">
+            <a:schemeClr val="accent1"/>
+          </a:lnRef>
+          <a:fillRef idx="3">
+            <a:schemeClr val="accent1"/>
+          </a:fillRef>
+          <a:effectRef idx="2">
+            <a:schemeClr val="accent1"/>
+          </a:effectRef>
+          <a:fontRef idx="minor">
+            <a:schemeClr val="lt1"/>
+          </a:fontRef>
+        </p:style>
+        <p:txBody>
+          <a:bodyPr rtlCol="0" anchor="ctr"/>
+          <a:lstStyle/>
+          <a:p>
+            <a:pPr algn="ctr"/>
+          </a:p>
+        </p:txBody>
+      </p:sp>
       <p:sp>
         <p:nvSpPr>
           <p:cNvPr id="6" name="TextBox 5"/>
@@ -3508,8 +3531,8 @@
         </p:nvSpPr>
         <p:spPr>
           <a:xfrm>
-            <a:off x="9052560" y="1920240"/>
-            <a:ext cx="2743200" cy="1371600"/>
+            <a:off x="731520" y="1975104"/>
+            <a:ext cx="5166360" cy="1051560"/>
           </a:xfrm>
           <a:prstGeom prst="rect">
             <a:avLst/>
@@ -3522,26 +3545,26 @@
           </a:bodyPr>
           <a:lstStyle/>
           <a:p>
-            <a:pPr algn="ctr">
-              <a:spcBef>
-                <a:spcPts val="0"/>
-              </a:spcBef>
-              <a:spcAft>
-                <a:spcPts val="0"/>
-              </a:spcAft>
-            </a:pPr>
-            <a:r>
-              <a:rPr sz="4600" b="1" i="0">
-                <a:solidFill>
-                  <a:srgbClr val="0A0A0A"/>
+            <a:pPr algn="l">
+              <a:spcBef>
+                <a:spcPts val="0"/>
+              </a:spcBef>
+              <a:spcAft>
+                <a:spcPts val="300"/>
+              </a:spcAft>
+            </a:pPr>
+            <a:r>
+              <a:rPr sz="1350" b="1" i="0">
+                <a:solidFill>
+                  <a:srgbClr val="E6FF00"/>
                 </a:solidFill>
                 <a:latin typeface="Arial"/>
               </a:rPr>
-              <a:t>$3,19M</a:t>
-            </a:r>
-          </a:p>
-          <a:p>
-            <a:pPr algn="ctr">
+              <a:t>Tecnologías: FUERA del modelo</a:t>
+            </a:r>
+          </a:p>
+          <a:p>
+            <a:pPr algn="l">
               <a:spcBef>
                 <a:spcPts val="0"/>
               </a:spcBef>
@@ -3552,25 +3575,69 @@
             <a:r>
               <a:rPr sz="1200" b="0" i="0">
                 <a:solidFill>
-                  <a:srgbClr val="8C8C8C"/>
+                  <a:srgbClr val="FFFFFF"/>
                 </a:solidFill>
                 <a:latin typeface="Calibri"/>
               </a:rPr>
-              <a:t>mediana (ARS)</a:t>
-            </a:r>
-          </a:p>
-        </p:txBody>
-      </p:sp>
-      <p:sp>
-        <p:nvSpPr>
-          <p:cNvPr id="7" name="TextBox 6"/>
+              <a:t>su premium era proxy del contexto (backend/dólar) y como feature generaban ruido; se analizan en el EDA.</a:t>
+            </a:r>
+          </a:p>
+        </p:txBody>
+      </p:sp>
+      <p:sp>
+        <p:nvSpPr>
+          <p:cNvPr id="7" name="Rounded Rectangle 6"/>
+          <p:cNvSpPr/>
+          <p:nvPr/>
+        </p:nvSpPr>
+        <p:spPr>
+          <a:xfrm>
+            <a:off x="548640" y="3246120"/>
+            <a:ext cx="5486400" cy="1280160"/>
+          </a:xfrm>
+          <a:prstGeom prst="roundRect">
+            <a:avLst/>
+          </a:prstGeom>
+          <a:solidFill>
+            <a:srgbClr val="1A1A1A"/>
+          </a:solidFill>
+          <a:ln>
+            <a:noFill/>
+          </a:ln>
+          <a:effectLst/>
+        </p:spPr>
+        <p:style>
+          <a:lnRef idx="1">
+            <a:schemeClr val="accent1"/>
+          </a:lnRef>
+          <a:fillRef idx="3">
+            <a:schemeClr val="accent1"/>
+          </a:fillRef>
+          <a:effectRef idx="2">
+            <a:schemeClr val="accent1"/>
+          </a:effectRef>
+          <a:fontRef idx="minor">
+            <a:schemeClr val="lt1"/>
+          </a:fontRef>
+        </p:style>
+        <p:txBody>
+          <a:bodyPr rtlCol="0" anchor="ctr"/>
+          <a:lstStyle/>
+          <a:p>
+            <a:pPr algn="ctr"/>
+          </a:p>
+        </p:txBody>
+      </p:sp>
+      <p:sp>
+        <p:nvSpPr>
+          <p:cNvPr id="8" name="TextBox 7"/>
           <p:cNvSpPr txBox="1"/>
           <p:nvPr/>
         </p:nvSpPr>
         <p:spPr>
           <a:xfrm>
-            <a:off x="9052560" y="3383280"/>
-            <a:ext cx="2743200" cy="1371600"/>
+            <a:off x="731520" y="3392424"/>
+            <a:ext cx="5166360" cy="1051560"/>
           </a:xfrm>
           <a:prstGeom prst="rect">
             <a:avLst/>
@@ -3583,26 +3650,26 @@
           </a:bodyPr>
           <a:lstStyle/>
           <a:p>
-            <a:pPr algn="ctr">
-              <a:spcBef>
-                <a:spcPts val="0"/>
-              </a:spcBef>
-              <a:spcAft>
-                <a:spcPts val="0"/>
-              </a:spcAft>
-            </a:pPr>
-            <a:r>
-              <a:rPr sz="4600" b="1" i="0">
-                <a:solidFill>
-                  <a:srgbClr val="0A0A0A"/>
+            <a:pPr algn="l">
+              <a:spcBef>
+                <a:spcPts val="0"/>
+              </a:spcBef>
+              <a:spcAft>
+                <a:spcPts val="300"/>
+              </a:spcAft>
+            </a:pPr>
+            <a:r>
+              <a:rPr sz="1350" b="1" i="0">
+                <a:solidFill>
+                  <a:srgbClr val="E6FF00"/>
                 </a:solidFill>
                 <a:latin typeface="Arial"/>
               </a:rPr>
-              <a:t>USD 2.264</a:t>
-            </a:r>
-          </a:p>
-          <a:p>
-            <a:pPr algn="ctr">
+              <a:t>Agrupar roles (698 → top 15 + «Otro»)</a:t>
+            </a:r>
+          </a:p>
+          <a:p>
+            <a:pPr algn="l">
               <a:spcBef>
                 <a:spcPts val="0"/>
               </a:spcBef>
@@ -3613,25 +3680,69 @@
             <a:r>
               <a:rPr sz="1200" b="0" i="0">
                 <a:solidFill>
-                  <a:srgbClr val="8C8C8C"/>
+                  <a:srgbClr val="FFFFFF"/>
                 </a:solidFill>
                 <a:latin typeface="Calibri"/>
               </a:rPr>
-              <a:t>mediana (USD)</a:t>
-            </a:r>
-          </a:p>
-        </p:txBody>
-      </p:sp>
-      <p:sp>
-        <p:nvSpPr>
-          <p:cNvPr id="8" name="TextBox 7"/>
+              <a:t>reduce cardinalidad y evita dummies ruidosas / overfitting.</a:t>
+            </a:r>
+          </a:p>
+        </p:txBody>
+      </p:sp>
+      <p:sp>
+        <p:nvSpPr>
+          <p:cNvPr id="9" name="Rounded Rectangle 8"/>
+          <p:cNvSpPr/>
+          <p:nvPr/>
+        </p:nvSpPr>
+        <p:spPr>
+          <a:xfrm>
+            <a:off x="548640" y="4663440"/>
+            <a:ext cx="5486400" cy="1280160"/>
+          </a:xfrm>
+          <a:prstGeom prst="roundRect">
+            <a:avLst/>
+          </a:prstGeom>
+          <a:solidFill>
+            <a:srgbClr val="1A1A1A"/>
+          </a:solidFill>
+          <a:ln>
+            <a:noFill/>
+          </a:ln>
+          <a:effectLst/>
+        </p:spPr>
+        <p:style>
+          <a:lnRef idx="1">
+            <a:schemeClr val="accent1"/>
+          </a:lnRef>
+          <a:fillRef idx="3">
+            <a:schemeClr val="accent1"/>
+          </a:fillRef>
+          <a:effectRef idx="2">
+            <a:schemeClr val="accent1"/>
+          </a:effectRef>
+          <a:fontRef idx="minor">
+            <a:schemeClr val="lt1"/>
+          </a:fontRef>
+        </p:style>
+        <p:txBody>
+          <a:bodyPr rtlCol="0" anchor="ctr"/>
+          <a:lstStyle/>
+          <a:p>
+            <a:pPr algn="ctr"/>
+          </a:p>
+        </p:txBody>
+      </p:sp>
+      <p:sp>
+        <p:nvSpPr>
+          <p:cNvPr id="10" name="TextBox 9"/>
           <p:cNvSpPr txBox="1"/>
           <p:nvPr/>
         </p:nvSpPr>
         <p:spPr>
           <a:xfrm>
-            <a:off x="9052560" y="4846320"/>
-            <a:ext cx="2743200" cy="1371600"/>
+            <a:off x="731520" y="4809744"/>
+            <a:ext cx="5166360" cy="1051560"/>
           </a:xfrm>
           <a:prstGeom prst="rect">
             <a:avLst/>
@@ -3644,26 +3755,26 @@
           </a:bodyPr>
           <a:lstStyle/>
           <a:p>
-            <a:pPr algn="ctr">
-              <a:spcBef>
-                <a:spcPts val="0"/>
-              </a:spcBef>
-              <a:spcAft>
-                <a:spcPts val="0"/>
-              </a:spcAft>
-            </a:pPr>
-            <a:r>
-              <a:rPr sz="4600" b="1" i="0">
-                <a:solidFill>
-                  <a:srgbClr val="0A0A0A"/>
+            <a:pPr algn="l">
+              <a:spcBef>
+                <a:spcPts val="0"/>
+              </a:spcBef>
+              <a:spcAft>
+                <a:spcPts val="300"/>
+              </a:spcAft>
+            </a:pPr>
+            <a:r>
+              <a:rPr sz="1350" b="1" i="0">
+                <a:solidFill>
+                  <a:srgbClr val="E6FF00"/>
                 </a:solidFill>
                 <a:latin typeface="Arial"/>
               </a:rPr>
-              <a:t>31.088</a:t>
-            </a:r>
-          </a:p>
-          <a:p>
-            <a:pPr algn="ctr">
+              <a:t>Agrupar provincias (&lt;100 → «Otra»)</a:t>
+            </a:r>
+          </a:p>
+          <a:p>
+            <a:pPr algn="l">
               <a:spcBef>
                 <a:spcPts val="0"/>
               </a:spcBef>
@@ -3674,11 +3785,326 @@
             <a:r>
               <a:rPr sz="1200" b="0" i="0">
                 <a:solidFill>
-                  <a:srgbClr val="8C8C8C"/>
+                  <a:srgbClr val="FFFFFF"/>
                 </a:solidFill>
                 <a:latin typeface="Calibri"/>
               </a:rPr>
-              <a:t>profesionales</a:t>
+              <a:t>misma lógica: categorías raras no aportan señal estable.</a:t>
+            </a:r>
+          </a:p>
+        </p:txBody>
+      </p:sp>
+      <p:sp>
+        <p:nvSpPr>
+          <p:cNvPr id="11" name="Rounded Rectangle 10"/>
+          <p:cNvSpPr/>
+          <p:nvPr/>
+        </p:nvSpPr>
+        <p:spPr>
+          <a:xfrm>
+            <a:off x="6263640" y="1828800"/>
+            <a:ext cx="5486400" cy="1280160"/>
+          </a:xfrm>
+          <a:prstGeom prst="roundRect">
+            <a:avLst/>
+          </a:prstGeom>
+          <a:solidFill>
+            <a:srgbClr val="1A1A1A"/>
+          </a:solidFill>
+          <a:ln>
+            <a:noFill/>
+          </a:ln>
+          <a:effectLst/>
+        </p:spPr>
+        <p:style>
+          <a:lnRef idx="1">
+            <a:schemeClr val="accent1"/>
+          </a:lnRef>
+          <a:fillRef idx="3">
+            <a:schemeClr val="accent1"/>
+          </a:fillRef>
+          <a:effectRef idx="2">
+            <a:schemeClr val="accent1"/>
+          </a:effectRef>
+          <a:fontRef idx="minor">
+            <a:schemeClr val="lt1"/>
+          </a:fontRef>
+        </p:style>
+        <p:txBody>
+          <a:bodyPr rtlCol="0" anchor="ctr"/>
+          <a:lstStyle/>
+          <a:p>
+            <a:pPr algn="ctr"/>
+          </a:p>
+        </p:txBody>
+      </p:sp>
+      <p:sp>
+        <p:nvSpPr>
+          <p:cNvPr id="12" name="TextBox 11"/>
+          <p:cNvSpPr txBox="1"/>
+          <p:nvPr/>
+        </p:nvSpPr>
+        <p:spPr>
+          <a:xfrm>
+            <a:off x="6446520" y="1975104"/>
+            <a:ext cx="5166360" cy="1051560"/>
+          </a:xfrm>
+          <a:prstGeom prst="rect">
+            <a:avLst/>
+          </a:prstGeom>
+          <a:noFill/>
+        </p:spPr>
+        <p:txBody>
+          <a:bodyPr wrap="square" lIns="45720" rIns="45720" tIns="18288" bIns="18288">
+            <a:spAutoFit/>
+          </a:bodyPr>
+          <a:lstStyle/>
+          <a:p>
+            <a:pPr algn="l">
+              <a:spcBef>
+                <a:spcPts val="0"/>
+              </a:spcBef>
+              <a:spcAft>
+                <a:spcPts val="300"/>
+              </a:spcAft>
+            </a:pPr>
+            <a:r>
+              <a:rPr sz="1350" b="1" i="0">
+                <a:solidFill>
+                  <a:srgbClr val="E6FF00"/>
+                </a:solidFill>
+                <a:latin typeface="Arial"/>
+              </a:rPr>
+              <a:t>Target real (deflación IPC / US CPI)</a:t>
+            </a:r>
+          </a:p>
+          <a:p>
+            <a:pPr algn="l">
+              <a:spcBef>
+                <a:spcPts val="0"/>
+              </a:spcBef>
+              <a:spcAft>
+                <a:spcPts val="600"/>
+              </a:spcAft>
+            </a:pPr>
+            <a:r>
+              <a:rPr sz="1200" b="0" i="0">
+                <a:solidFill>
+                  <a:srgbClr val="FFFFFF"/>
+                </a:solidFill>
+                <a:latin typeface="Calibri"/>
+              </a:rPr>
+              <a:t>ingeniería del objetivo: hace los salarios comparables en el tiempo.</a:t>
+            </a:r>
+          </a:p>
+        </p:txBody>
+      </p:sp>
+      <p:sp>
+        <p:nvSpPr>
+          <p:cNvPr id="13" name="Rounded Rectangle 12"/>
+          <p:cNvSpPr/>
+          <p:nvPr/>
+        </p:nvSpPr>
+        <p:spPr>
+          <a:xfrm>
+            <a:off x="6263640" y="3246120"/>
+            <a:ext cx="5486400" cy="1280160"/>
+          </a:xfrm>
+          <a:prstGeom prst="roundRect">
+            <a:avLst/>
+          </a:prstGeom>
+          <a:solidFill>
+            <a:srgbClr val="1A1A1A"/>
+          </a:solidFill>
+          <a:ln>
+            <a:noFill/>
+          </a:ln>
+          <a:effectLst/>
+        </p:spPr>
+        <p:style>
+          <a:lnRef idx="1">
+            <a:schemeClr val="accent1"/>
+          </a:lnRef>
+          <a:fillRef idx="3">
+            <a:schemeClr val="accent1"/>
+          </a:fillRef>
+          <a:effectRef idx="2">
+            <a:schemeClr val="accent1"/>
+          </a:effectRef>
+          <a:fontRef idx="minor">
+            <a:schemeClr val="lt1"/>
+          </a:fontRef>
+        </p:style>
+        <p:txBody>
+          <a:bodyPr rtlCol="0" anchor="ctr"/>
+          <a:lstStyle/>
+          <a:p>
+            <a:pPr algn="ctr"/>
+          </a:p>
+        </p:txBody>
+      </p:sp>
+      <p:sp>
+        <p:nvSpPr>
+          <p:cNvPr id="14" name="TextBox 13"/>
+          <p:cNvSpPr txBox="1"/>
+          <p:nvPr/>
+        </p:nvSpPr>
+        <p:spPr>
+          <a:xfrm>
+            <a:off x="6446520" y="3392424"/>
+            <a:ext cx="5166360" cy="1051560"/>
+          </a:xfrm>
+          <a:prstGeom prst="rect">
+            <a:avLst/>
+          </a:prstGeom>
+          <a:noFill/>
+        </p:spPr>
+        <p:txBody>
+          <a:bodyPr wrap="square" lIns="45720" rIns="45720" tIns="18288" bIns="18288">
+            <a:spAutoFit/>
+          </a:bodyPr>
+          <a:lstStyle/>
+          <a:p>
+            <a:pPr algn="l">
+              <a:spcBef>
+                <a:spcPts val="0"/>
+              </a:spcBef>
+              <a:spcAft>
+                <a:spcPts val="300"/>
+              </a:spcAft>
+            </a:pPr>
+            <a:r>
+              <a:rPr sz="1350" b="1" i="0">
+                <a:solidFill>
+                  <a:srgbClr val="E6FF00"/>
+                </a:solidFill>
+                <a:latin typeface="Arial"/>
+              </a:rPr>
+              <a:t>Selección: se quita seniority</a:t>
+            </a:r>
+          </a:p>
+          <a:p>
+            <a:pPr algn="l">
+              <a:spcBef>
+                <a:spcPts val="0"/>
+              </a:spcBef>
+              <a:spcAft>
+                <a:spcPts val="600"/>
+              </a:spcAft>
+            </a:pPr>
+            <a:r>
+              <a:rPr sz="1200" b="0" i="0">
+                <a:solidFill>
+                  <a:srgbClr val="FFFFFF"/>
+                </a:solidFill>
+                <a:latin typeface="Calibri"/>
+              </a:rPr>
+              <a:t>redundante con experiencia (multicolinealidad) → mismo R² con menos ruido.</a:t>
+            </a:r>
+          </a:p>
+        </p:txBody>
+      </p:sp>
+      <p:sp>
+        <p:nvSpPr>
+          <p:cNvPr id="15" name="Rounded Rectangle 14"/>
+          <p:cNvSpPr/>
+          <p:nvPr/>
+        </p:nvSpPr>
+        <p:spPr>
+          <a:xfrm>
+            <a:off x="6263640" y="4663440"/>
+            <a:ext cx="5486400" cy="1280160"/>
+          </a:xfrm>
+          <a:prstGeom prst="roundRect">
+            <a:avLst/>
+          </a:prstGeom>
+          <a:solidFill>
+            <a:srgbClr val="1A1A1A"/>
+          </a:solidFill>
+          <a:ln>
+            <a:noFill/>
+          </a:ln>
+          <a:effectLst/>
+        </p:spPr>
+        <p:style>
+          <a:lnRef idx="1">
+            <a:schemeClr val="accent1"/>
+          </a:lnRef>
+          <a:fillRef idx="3">
+            <a:schemeClr val="accent1"/>
+          </a:fillRef>
+          <a:effectRef idx="2">
+            <a:schemeClr val="accent1"/>
+          </a:effectRef>
+          <a:fontRef idx="minor">
+            <a:schemeClr val="lt1"/>
+          </a:fontRef>
+        </p:style>
+        <p:txBody>
+          <a:bodyPr rtlCol="0" anchor="ctr"/>
+          <a:lstStyle/>
+          <a:p>
+            <a:pPr algn="ctr"/>
+          </a:p>
+        </p:txBody>
+      </p:sp>
+      <p:sp>
+        <p:nvSpPr>
+          <p:cNvPr id="16" name="TextBox 15"/>
+          <p:cNvSpPr txBox="1"/>
+          <p:nvPr/>
+        </p:nvSpPr>
+        <p:spPr>
+          <a:xfrm>
+            <a:off x="6446520" y="4809744"/>
+            <a:ext cx="5166360" cy="1051560"/>
+          </a:xfrm>
+          <a:prstGeom prst="rect">
+            <a:avLst/>
+          </a:prstGeom>
+          <a:noFill/>
+        </p:spPr>
+        <p:txBody>
+          <a:bodyPr wrap="square" lIns="45720" rIns="45720" tIns="18288" bIns="18288">
+            <a:spAutoFit/>
+          </a:bodyPr>
+          <a:lstStyle/>
+          <a:p>
+            <a:pPr algn="l">
+              <a:spcBef>
+                <a:spcPts val="0"/>
+              </a:spcBef>
+              <a:spcAft>
+                <a:spcPts val="300"/>
+              </a:spcAft>
+            </a:pPr>
+            <a:r>
+              <a:rPr sz="1350" b="1" i="0">
+                <a:solidFill>
+                  <a:srgbClr val="E6FF00"/>
+                </a:solidFill>
+                <a:latin typeface="Arial"/>
+              </a:rPr>
+              <a:t>Anti-leakage</a:t>
+            </a:r>
+          </a:p>
+          <a:p>
+            <a:pPr algn="l">
+              <a:spcBef>
+                <a:spcPts val="0"/>
+              </a:spcBef>
+              <a:spcAft>
+                <a:spcPts val="600"/>
+              </a:spcAft>
+            </a:pPr>
+            <a:r>
+              <a:rPr sz="1200" b="0" i="0">
+                <a:solidFill>
+                  <a:srgbClr val="FFFFFF"/>
+                </a:solidFill>
+                <a:latin typeface="Calibri"/>
+              </a:rPr>
+              <a:t>se excluyen variables derivadas del salario (USD, canastas).</a:t>
             </a:r>
           </a:p>
         </p:txBody>
@@ -3779,7 +4205,7 @@
                 </a:solidFill>
                 <a:latin typeface="Arial"/>
               </a:rPr>
-              <a:t>04  ·  </a:t>
+              <a:t>03  ·  </a:t>
             </a:r>
             <a:r>
               <a:rPr sz="1300" b="1">
@@ -3788,7 +4214,7 @@
                 </a:solidFill>
                 <a:latin typeface="Arial"/>
               </a:rPr>
-              <a:t>EDA</a:t>
+              <a:t>FOCO: FEATURE ENGINEERING</a:t>
             </a:r>
           </a:p>
         </p:txBody>
@@ -3830,14 +4256,14 @@
                 </a:solidFill>
                 <a:latin typeface="Arial"/>
               </a:rPr>
-              <a:t>Seniority, modalidad y provincias</a:t>
+              <a:t>El caso de los roles: 698 → 16 categorías</a:t>
             </a:r>
           </a:p>
         </p:txBody>
       </p:sp>
       <p:pic>
         <p:nvPicPr>
-          <p:cNvPr id="5" name="Picture 4" descr="eda_02_seniority.png"/>
+          <p:cNvPr id="5" name="Picture 4" descr="roles_pareto_bn.png"/>
           <p:cNvPicPr>
             <a:picLocks noChangeAspect="1"/>
           </p:cNvPicPr>
@@ -3851,38 +4277,58 @@
         </p:blipFill>
         <p:spPr>
           <a:xfrm>
-            <a:off x="457200" y="1702518"/>
-            <a:ext cx="5669280" cy="4093043"/>
+            <a:off x="365760" y="1862488"/>
+            <a:ext cx="7863840" cy="4138863"/>
           </a:xfrm>
           <a:prstGeom prst="rect">
             <a:avLst/>
           </a:prstGeom>
         </p:spPr>
       </p:pic>
-      <p:pic>
-        <p:nvPicPr>
-          <p:cNvPr id="6" name="Picture 5" descr="eda_05_geografia.png"/>
-          <p:cNvPicPr>
-            <a:picLocks noChangeAspect="1"/>
-          </p:cNvPicPr>
-          <p:nvPr/>
-        </p:nvPicPr>
-        <p:blipFill>
-          <a:blip r:embed="rId3"/>
-          <a:stretch>
-            <a:fillRect/>
-          </a:stretch>
-        </p:blipFill>
-        <p:spPr>
-          <a:xfrm>
-            <a:off x="6217920" y="1733106"/>
-            <a:ext cx="5577840" cy="4031866"/>
-          </a:xfrm>
-          <a:prstGeom prst="rect">
-            <a:avLst/>
-          </a:prstGeom>
-        </p:spPr>
-      </p:pic>
+      <p:sp>
+        <p:nvSpPr>
+          <p:cNvPr id="6" name="Rounded Rectangle 5"/>
+          <p:cNvSpPr/>
+          <p:nvPr/>
+        </p:nvSpPr>
+        <p:spPr>
+          <a:xfrm>
+            <a:off x="8412480" y="1783080"/>
+            <a:ext cx="3291840" cy="4206240"/>
+          </a:xfrm>
+          <a:prstGeom prst="roundRect">
+            <a:avLst/>
+          </a:prstGeom>
+          <a:solidFill>
+            <a:srgbClr val="0A0A0A"/>
+          </a:solidFill>
+          <a:ln>
+            <a:noFill/>
+          </a:ln>
+          <a:effectLst/>
+        </p:spPr>
+        <p:style>
+          <a:lnRef idx="1">
+            <a:schemeClr val="accent1"/>
+          </a:lnRef>
+          <a:fillRef idx="3">
+            <a:schemeClr val="accent1"/>
+          </a:fillRef>
+          <a:effectRef idx="2">
+            <a:schemeClr val="accent1"/>
+          </a:effectRef>
+          <a:fontRef idx="minor">
+            <a:schemeClr val="lt1"/>
+          </a:fontRef>
+        </p:style>
+        <p:txBody>
+          <a:bodyPr rtlCol="0" anchor="ctr"/>
+          <a:lstStyle/>
+          <a:p>
+            <a:pPr algn="ctr"/>
+          </a:p>
+        </p:txBody>
+      </p:sp>
       <p:sp>
         <p:nvSpPr>
           <p:cNvPr id="7" name="TextBox 6"/>
@@ -3891,8 +4337,8 @@
         </p:nvSpPr>
         <p:spPr>
           <a:xfrm>
-            <a:off x="548640" y="5897880"/>
-            <a:ext cx="11155680" cy="731520"/>
+            <a:off x="8641080" y="2011680"/>
+            <a:ext cx="2880360" cy="3840480"/>
           </a:xfrm>
           <a:prstGeom prst="rect">
             <a:avLst/>
@@ -3905,7 +4351,102 @@
           </a:bodyPr>
           <a:lstStyle/>
           <a:p>
-            <a:pPr algn="ctr">
+            <a:pPr algn="l">
+              <a:spcBef>
+                <a:spcPts val="0"/>
+              </a:spcBef>
+              <a:spcAft>
+                <a:spcPts val="800"/>
+              </a:spcAft>
+            </a:pPr>
+            <a:r>
+              <a:rPr sz="1300" b="1" i="0">
+                <a:solidFill>
+                  <a:srgbClr val="E6FF00"/>
+                </a:solidFill>
+                <a:latin typeface="Arial"/>
+              </a:rPr>
+              <a:t>POR QUÉ AGRUPAR</a:t>
+            </a:r>
+          </a:p>
+          <a:p>
+            <a:pPr algn="l">
+              <a:spcBef>
+                <a:spcPts val="0"/>
+              </a:spcBef>
+              <a:spcAft>
+                <a:spcPts val="900"/>
+              </a:spcAft>
+            </a:pPr>
+            <a:r>
+              <a:rPr sz="1200" b="0" i="0">
+                <a:solidFill>
+                  <a:srgbClr val="FFFFFF"/>
+                </a:solidFill>
+                <a:latin typeface="Calibri"/>
+              </a:rPr>
+              <a:t>—  698 puestos distintos escritos de mil maneras</a:t>
+            </a:r>
+          </a:p>
+          <a:p>
+            <a:pPr algn="l">
+              <a:spcBef>
+                <a:spcPts val="0"/>
+              </a:spcBef>
+              <a:spcAft>
+                <a:spcPts val="900"/>
+              </a:spcAft>
+            </a:pPr>
+            <a:r>
+              <a:rPr sz="1200" b="0" i="0">
+                <a:solidFill>
+                  <a:srgbClr val="FFFFFF"/>
+                </a:solidFill>
+                <a:latin typeface="Calibri"/>
+              </a:rPr>
+              <a:t>—  El top-15 cubre el 90% de los casos</a:t>
+            </a:r>
+          </a:p>
+          <a:p>
+            <a:pPr algn="l">
+              <a:spcBef>
+                <a:spcPts val="0"/>
+              </a:spcBef>
+              <a:spcAft>
+                <a:spcPts val="900"/>
+              </a:spcAft>
+            </a:pPr>
+            <a:r>
+              <a:rPr sz="1200" b="0" i="0">
+                <a:solidFill>
+                  <a:srgbClr val="FFFFFF"/>
+                </a:solidFill>
+                <a:latin typeface="Calibri"/>
+              </a:rPr>
+              <a:t>—  683 roles suman apenas el 10% restante</a:t>
+            </a:r>
+          </a:p>
+          <a:p>
+            <a:pPr algn="l">
+              <a:spcBef>
+                <a:spcPts val="0"/>
+              </a:spcBef>
+              <a:spcAft>
+                <a:spcPts val="900"/>
+              </a:spcAft>
+            </a:pPr>
+            <a:r>
+              <a:rPr sz="1200" b="0" i="0">
+                <a:solidFill>
+                  <a:srgbClr val="FFFFFF"/>
+                </a:solidFill>
+                <a:latin typeface="Calibri"/>
+              </a:rPr>
+              <a:t>—  Menos categorías raras → menos columnas dummy → menos overfitting</a:t>
+            </a:r>
+          </a:p>
+          <a:p>
+            <a:pPr algn="l">
               <a:spcBef>
                 <a:spcPts val="0"/>
               </a:spcBef>
@@ -3914,13 +4455,13 @@
               </a:spcAft>
             </a:pPr>
             <a:r>
-              <a:rPr sz="1350" b="0" i="1">
-                <a:solidFill>
-                  <a:srgbClr val="0A0A0A"/>
+              <a:rPr sz="1150" b="0" i="1">
+                <a:solidFill>
+                  <a:srgbClr val="E6FF00"/>
                 </a:solidFill>
                 <a:latin typeface="Calibri"/>
               </a:rPr>
-              <a:t>Seniority casi sin solapamiento (jr $1,8M → sr $4,3M)  ·  CABA +24% vs interior  ·  remoto +43% en USD.</a:t>
+              <a:t>La curva ámbar es la cobertura acumulada.</a:t>
             </a:r>
           </a:p>
         </p:txBody>
@@ -4021,7 +4562,7 @@
                 </a:solidFill>
                 <a:latin typeface="Arial"/>
               </a:rPr>
-              <a:t>04  ·  </a:t>
+              <a:t>03  ·  </a:t>
             </a:r>
             <a:r>
               <a:rPr sz="1300" b="1">
@@ -4030,7 +4571,7 @@
                 </a:solidFill>
                 <a:latin typeface="Arial"/>
               </a:rPr>
-              <a:t>EDA</a:t>
+              <a:t>FOCO: FEATURE ENGINEERING</a:t>
             </a:r>
           </a:p>
         </p:txBody>
@@ -4072,14 +4613,14 @@
                 </a:solidFill>
                 <a:latin typeface="Arial"/>
               </a:rPr>
-              <a:t>Tecnologías más usadas</a:t>
+              <a:t>La prueba: el modelo con y sin tecnologías</a:t>
             </a:r>
           </a:p>
         </p:txBody>
       </p:sp>
       <p:pic>
         <p:nvPicPr>
-          <p:cNvPr id="5" name="Picture 4" descr="eda_04_tecnologias.png"/>
+          <p:cNvPr id="5" name="Picture 4" descr="fe_impacto_bn.png"/>
           <p:cNvPicPr>
             <a:picLocks noChangeAspect="1"/>
           </p:cNvPicPr>
@@ -4093,8 +4634,8 @@
         </p:blipFill>
         <p:spPr>
           <a:xfrm>
-            <a:off x="1210082" y="1691640"/>
-            <a:ext cx="6083755" cy="4389120"/>
+            <a:off x="365760" y="2097024"/>
+            <a:ext cx="7863840" cy="3669792"/>
           </a:xfrm>
           <a:prstGeom prst="rect">
             <a:avLst/>
@@ -4109,8 +4650,8 @@
         </p:nvSpPr>
         <p:spPr>
           <a:xfrm>
-            <a:off x="8321040" y="1874519"/>
-            <a:ext cx="3383280" cy="4023360"/>
+            <a:off x="8412480" y="1783080"/>
+            <a:ext cx="3291840" cy="4206240"/>
           </a:xfrm>
           <a:prstGeom prst="roundRect">
             <a:avLst/>
@@ -4153,8 +4694,8 @@
         </p:nvSpPr>
         <p:spPr>
           <a:xfrm>
-            <a:off x="8549640" y="2103120"/>
-            <a:ext cx="2926080" cy="3657600"/>
+            <a:off x="8641080" y="2011680"/>
+            <a:ext cx="2880360" cy="3840480"/>
           </a:xfrm>
           <a:prstGeom prst="rect">
             <a:avLst/>
@@ -4176,32 +4717,32 @@
               </a:spcAft>
             </a:pPr>
             <a:r>
-              <a:rPr sz="1400" b="1" i="0">
+              <a:rPr sz="1300" b="1" i="0">
                 <a:solidFill>
                   <a:srgbClr val="E6FF00"/>
                 </a:solidFill>
                 <a:latin typeface="Arial"/>
               </a:rPr>
-              <a:t>EL PREMIUM</a:t>
-            </a:r>
-          </a:p>
-          <a:p>
-            <a:pPr algn="l">
-              <a:spcBef>
-                <a:spcPts val="0"/>
-              </a:spcBef>
-              <a:spcAft>
-                <a:spcPts val="1000"/>
-              </a:spcAft>
-            </a:pPr>
-            <a:r>
-              <a:rPr sz="1300" b="0" i="0">
+              <a:t>LA EVIDENCIA</a:t>
+            </a:r>
+          </a:p>
+          <a:p>
+            <a:pPr algn="l">
+              <a:spcBef>
+                <a:spcPts val="0"/>
+              </a:spcBef>
+              <a:spcAft>
+                <a:spcPts val="900"/>
+              </a:spcAft>
+            </a:pPr>
+            <a:r>
+              <a:rPr sz="1200" b="0" i="0">
                 <a:solidFill>
                   <a:srgbClr val="FFFFFF"/>
                 </a:solidFill>
                 <a:latin typeface="Calibri"/>
               </a:rPr>
-              <a:t>No lo da la cantidad de tecnologías, sino cuáles:</a:t>
+              <a:t>—  Entrenamos las dos versiones y comparamos</a:t>
             </a:r>
           </a:p>
           <a:p>
@@ -4214,13 +4755,13 @@
               </a:spcAft>
             </a:pPr>
             <a:r>
-              <a:rPr sz="1300" b="0" i="0">
+              <a:rPr sz="1200" b="0" i="0">
                 <a:solidFill>
                   <a:srgbClr val="FFFFFF"/>
                 </a:solidFill>
                 <a:latin typeface="Calibri"/>
               </a:rPr>
-              <a:t>—  Go +45%  ·  Rust +48%  ·  Scala +42%</a:t>
+              <a:t>—  R² casi igual: 0,297 → 0,272</a:t>
             </a:r>
           </a:p>
           <a:p>
@@ -4233,13 +4774,13 @@
               </a:spcAft>
             </a:pPr>
             <a:r>
-              <a:rPr sz="1300" b="0" i="0">
+              <a:rPr sz="1200" b="0" i="0">
                 <a:solidFill>
                   <a:srgbClr val="FFFFFF"/>
                 </a:solidFill>
                 <a:latin typeface="Calibri"/>
               </a:rPr>
-              <a:t>—  Python +13%</a:t>
+              <a:t>—  Menos sobreajuste (gap train−test más chico)</a:t>
             </a:r>
           </a:p>
           <a:p>
@@ -4252,13 +4793,32 @@
               </a:spcAft>
             </a:pPr>
             <a:r>
-              <a:rPr sz="1300" b="0" i="0">
+              <a:rPr sz="1200" b="0" i="0">
                 <a:solidFill>
                   <a:srgbClr val="FFFFFF"/>
                 </a:solidFill>
                 <a:latin typeface="Calibri"/>
               </a:rPr>
-              <a:t>—  Frontend web (CSS/HTML) bajo la media</a:t>
+              <a:t>—  Y sin disparates: «Go» en un helpdesk ya no infla la estimación</a:t>
+            </a:r>
+          </a:p>
+          <a:p>
+            <a:pPr algn="l">
+              <a:spcBef>
+                <a:spcPts val="0"/>
+              </a:spcBef>
+              <a:spcAft>
+                <a:spcPts val="600"/>
+              </a:spcAft>
+            </a:pPr>
+            <a:r>
+              <a:rPr sz="1150" b="0" i="1">
+                <a:solidFill>
+                  <a:srgbClr val="E6FF00"/>
+                </a:solidFill>
+                <a:latin typeface="Calibri"/>
+              </a:rPr>
+              <a:t>Decisión basada en evidencia, no en intuición.</a:t>
             </a:r>
           </a:p>
         </p:txBody>
@@ -4296,7 +4856,7 @@
             <a:avLst/>
           </a:prstGeom>
           <a:solidFill>
-            <a:srgbClr val="0A0A0A"/>
+            <a:srgbClr val="FFFFFF"/>
           </a:solidFill>
           <a:ln>
             <a:noFill/>
@@ -4355,7 +4915,7 @@
             <a:r>
               <a:rPr sz="1300" b="1">
                 <a:solidFill>
-                  <a:srgbClr val="E6FF00"/>
+                  <a:srgbClr val="0A0A0A"/>
                 </a:solidFill>
                 <a:latin typeface="Arial"/>
               </a:rPr>
@@ -4368,7 +4928,7 @@
                 </a:solidFill>
                 <a:latin typeface="Arial"/>
               </a:rPr>
-              <a:t>EDA · DISPERSIÓN Y VARIABLES</a:t>
+              <a:t>EDA</a:t>
             </a:r>
           </a:p>
         </p:txBody>
@@ -4406,18 +4966,18 @@
             <a:r>
               <a:rPr sz="3400" b="1" i="0">
                 <a:solidFill>
-                  <a:srgbClr val="FFFFFF"/>
+                  <a:srgbClr val="0A0A0A"/>
                 </a:solidFill>
                 <a:latin typeface="Arial"/>
               </a:rPr>
-              <a:t>Cómo se eligieron los ejes (PCA)</a:t>
+              <a:t>Distribución de salarios</a:t>
             </a:r>
           </a:p>
         </p:txBody>
       </p:sp>
       <p:pic>
         <p:nvPicPr>
-          <p:cNvPr id="5" name="Picture 4" descr="clusters_bn.png"/>
+          <p:cNvPr id="5" name="Picture 4" descr="distribucion_bn.png"/>
           <p:cNvPicPr>
             <a:picLocks noChangeAspect="1"/>
           </p:cNvPicPr>
@@ -4431,8 +4991,8 @@
         </p:blipFill>
         <p:spPr>
           <a:xfrm>
-            <a:off x="457200" y="2351472"/>
-            <a:ext cx="7680960" cy="2886574"/>
+            <a:off x="457200" y="2316158"/>
+            <a:ext cx="8503920" cy="3048642"/>
           </a:xfrm>
           <a:prstGeom prst="rect">
             <a:avLst/>
@@ -4441,58 +5001,14 @@
       </p:pic>
       <p:sp>
         <p:nvSpPr>
-          <p:cNvPr id="6" name="Rounded Rectangle 5"/>
-          <p:cNvSpPr/>
-          <p:nvPr/>
-        </p:nvSpPr>
-        <p:spPr>
-          <a:xfrm>
-            <a:off x="8366760" y="1828800"/>
-            <a:ext cx="3337560" cy="4114800"/>
-          </a:xfrm>
-          <a:prstGeom prst="roundRect">
-            <a:avLst/>
-          </a:prstGeom>
-          <a:solidFill>
-            <a:srgbClr val="1A1A1A"/>
-          </a:solidFill>
-          <a:ln>
-            <a:noFill/>
-          </a:ln>
-          <a:effectLst/>
-        </p:spPr>
-        <p:style>
-          <a:lnRef idx="1">
-            <a:schemeClr val="accent1"/>
-          </a:lnRef>
-          <a:fillRef idx="3">
-            <a:schemeClr val="accent1"/>
-          </a:fillRef>
-          <a:effectRef idx="2">
-            <a:schemeClr val="accent1"/>
-          </a:effectRef>
-          <a:fontRef idx="minor">
-            <a:schemeClr val="lt1"/>
-          </a:fontRef>
-        </p:style>
-        <p:txBody>
-          <a:bodyPr rtlCol="0" anchor="ctr"/>
-          <a:lstStyle/>
-          <a:p>
-            <a:pPr algn="ctr"/>
-          </a:p>
-        </p:txBody>
-      </p:sp>
-      <p:sp>
-        <p:nvSpPr>
-          <p:cNvPr id="7" name="TextBox 6"/>
+          <p:cNvPr id="6" name="TextBox 5"/>
           <p:cNvSpPr txBox="1"/>
           <p:nvPr/>
         </p:nvSpPr>
         <p:spPr>
           <a:xfrm>
-            <a:off x="8595360" y="2057400"/>
-            <a:ext cx="2880360" cy="3749039"/>
+            <a:off x="9052560" y="1920240"/>
+            <a:ext cx="2743200" cy="1371600"/>
           </a:xfrm>
           <a:prstGeom prst="rect">
             <a:avLst/>
@@ -4505,98 +5021,163 @@
           </a:bodyPr>
           <a:lstStyle/>
           <a:p>
-            <a:pPr algn="l">
-              <a:spcBef>
-                <a:spcPts val="0"/>
-              </a:spcBef>
-              <a:spcAft>
-                <a:spcPts val="800"/>
-              </a:spcAft>
-            </a:pPr>
-            <a:r>
-              <a:rPr sz="1300" b="1" i="0">
-                <a:solidFill>
-                  <a:srgbClr val="E6FF00"/>
+            <a:pPr algn="ctr">
+              <a:spcBef>
+                <a:spcPts val="0"/>
+              </a:spcBef>
+              <a:spcAft>
+                <a:spcPts val="0"/>
+              </a:spcAft>
+            </a:pPr>
+            <a:r>
+              <a:rPr sz="4600" b="1" i="0">
+                <a:solidFill>
+                  <a:srgbClr val="0A0A0A"/>
                 </a:solidFill>
                 <a:latin typeface="Arial"/>
               </a:rPr>
-              <a:t>PROYECCIÓN 2D</a:t>
-            </a:r>
-          </a:p>
-          <a:p>
-            <a:pPr algn="l">
-              <a:spcBef>
-                <a:spcPts val="0"/>
-              </a:spcBef>
-              <a:spcAft>
-                <a:spcPts val="800"/>
-              </a:spcAft>
-            </a:pPr>
-            <a:r>
-              <a:rPr sz="1250" b="0" i="0">
-                <a:solidFill>
-                  <a:srgbClr val="FFFFFF"/>
+              <a:t>$3,19M</a:t>
+            </a:r>
+          </a:p>
+          <a:p>
+            <a:pPr algn="ctr">
+              <a:spcBef>
+                <a:spcPts val="0"/>
+              </a:spcBef>
+              <a:spcAft>
+                <a:spcPts val="600"/>
+              </a:spcAft>
+            </a:pPr>
+            <a:r>
+              <a:rPr sz="1200" b="0" i="0">
+                <a:solidFill>
+                  <a:srgbClr val="8C8C8C"/>
                 </a:solidFill>
                 <a:latin typeface="Calibri"/>
               </a:rPr>
-              <a:t>El perfil tiene muchas dimensiones; PCA las comprime a 2 ejes:</a:t>
-            </a:r>
-          </a:p>
-          <a:p>
-            <a:pPr algn="l">
-              <a:spcBef>
-                <a:spcPts val="0"/>
-              </a:spcBef>
-              <a:spcAft>
-                <a:spcPts val="800"/>
-              </a:spcAft>
-            </a:pPr>
-            <a:r>
-              <a:rPr sz="1250" b="0" i="0">
-                <a:solidFill>
-                  <a:srgbClr val="FFFFFF"/>
+              <a:t>mediana (ARS)</a:t>
+            </a:r>
+          </a:p>
+        </p:txBody>
+      </p:sp>
+      <p:sp>
+        <p:nvSpPr>
+          <p:cNvPr id="7" name="TextBox 6"/>
+          <p:cNvSpPr txBox="1"/>
+          <p:nvPr/>
+        </p:nvSpPr>
+        <p:spPr>
+          <a:xfrm>
+            <a:off x="9052560" y="3383280"/>
+            <a:ext cx="2743200" cy="1371600"/>
+          </a:xfrm>
+          <a:prstGeom prst="rect">
+            <a:avLst/>
+          </a:prstGeom>
+          <a:noFill/>
+        </p:spPr>
+        <p:txBody>
+          <a:bodyPr wrap="square" lIns="45720" rIns="45720" tIns="18288" bIns="18288">
+            <a:spAutoFit/>
+          </a:bodyPr>
+          <a:lstStyle/>
+          <a:p>
+            <a:pPr algn="ctr">
+              <a:spcBef>
+                <a:spcPts val="0"/>
+              </a:spcBef>
+              <a:spcAft>
+                <a:spcPts val="0"/>
+              </a:spcAft>
+            </a:pPr>
+            <a:r>
+              <a:rPr sz="4600" b="1" i="0">
+                <a:solidFill>
+                  <a:srgbClr val="0A0A0A"/>
+                </a:solidFill>
+                <a:latin typeface="Arial"/>
+              </a:rPr>
+              <a:t>USD 2.264</a:t>
+            </a:r>
+          </a:p>
+          <a:p>
+            <a:pPr algn="ctr">
+              <a:spcBef>
+                <a:spcPts val="0"/>
+              </a:spcBef>
+              <a:spcAft>
+                <a:spcPts val="600"/>
+              </a:spcAft>
+            </a:pPr>
+            <a:r>
+              <a:rPr sz="1200" b="0" i="0">
+                <a:solidFill>
+                  <a:srgbClr val="8C8C8C"/>
                 </a:solidFill>
                 <a:latin typeface="Calibri"/>
               </a:rPr>
-              <a:t>—  Comp. 1 (48%) — años de carrera (junior → senior)</a:t>
-            </a:r>
-          </a:p>
-          <a:p>
-            <a:pPr algn="l">
-              <a:spcBef>
-                <a:spcPts val="0"/>
-              </a:spcBef>
-              <a:spcAft>
-                <a:spcPts val="1000"/>
-              </a:spcAft>
-            </a:pPr>
-            <a:r>
-              <a:rPr sz="1250" b="0" i="0">
-                <a:solidFill>
-                  <a:srgbClr val="FFFFFF"/>
+              <a:t>mediana (USD)</a:t>
+            </a:r>
+          </a:p>
+        </p:txBody>
+      </p:sp>
+      <p:sp>
+        <p:nvSpPr>
+          <p:cNvPr id="8" name="TextBox 7"/>
+          <p:cNvSpPr txBox="1"/>
+          <p:nvPr/>
+        </p:nvSpPr>
+        <p:spPr>
+          <a:xfrm>
+            <a:off x="9052560" y="4846320"/>
+            <a:ext cx="2743200" cy="1371600"/>
+          </a:xfrm>
+          <a:prstGeom prst="rect">
+            <a:avLst/>
+          </a:prstGeom>
+          <a:noFill/>
+        </p:spPr>
+        <p:txBody>
+          <a:bodyPr wrap="square" lIns="45720" rIns="45720" tIns="18288" bIns="18288">
+            <a:spAutoFit/>
+          </a:bodyPr>
+          <a:lstStyle/>
+          <a:p>
+            <a:pPr algn="ctr">
+              <a:spcBef>
+                <a:spcPts val="0"/>
+              </a:spcBef>
+              <a:spcAft>
+                <a:spcPts val="0"/>
+              </a:spcAft>
+            </a:pPr>
+            <a:r>
+              <a:rPr sz="4600" b="1" i="0">
+                <a:solidFill>
+                  <a:srgbClr val="0A0A0A"/>
+                </a:solidFill>
+                <a:latin typeface="Arial"/>
+              </a:rPr>
+              <a:t>31.088</a:t>
+            </a:r>
+          </a:p>
+          <a:p>
+            <a:pPr algn="ctr">
+              <a:spcBef>
+                <a:spcPts val="0"/>
+              </a:spcBef>
+              <a:spcAft>
+                <a:spcPts val="600"/>
+              </a:spcAft>
+            </a:pPr>
+            <a:r>
+              <a:rPr sz="1200" b="0" i="0">
+                <a:solidFill>
+                  <a:srgbClr val="8C8C8C"/>
                 </a:solidFill>
                 <a:latin typeface="Calibri"/>
               </a:rPr>
-              <a:t>—  Comp. 2 (15%) — rotación / antigüedad</a:t>
-            </a:r>
-          </a:p>
-          <a:p>
-            <a:pPr algn="l">
-              <a:spcBef>
-                <a:spcPts val="0"/>
-              </a:spcBef>
-              <a:spcAft>
-                <a:spcPts val="600"/>
-              </a:spcAft>
-            </a:pPr>
-            <a:r>
-              <a:rPr sz="1250" b="0" i="1">
-                <a:solidFill>
-                  <a:srgbClr val="E6FF00"/>
-                </a:solidFill>
-                <a:latin typeface="Calibri"/>
-              </a:rPr>
-              <a:t>Puntos cercanos = perfiles parecidos.</a:t>
+              <a:t>profesionales</a:t>
             </a:r>
           </a:p>
         </p:txBody>
@@ -4697,7 +5278,7 @@
                 </a:solidFill>
                 <a:latin typeface="Arial"/>
               </a:rPr>
-              <a:t>05  ·  </a:t>
+              <a:t>04  ·  </a:t>
             </a:r>
             <a:r>
               <a:rPr sz="1300" b="1">
@@ -4706,7 +5287,7 @@
                 </a:solidFill>
                 <a:latin typeface="Arial"/>
               </a:rPr>
-              <a:t>MODELOS DE MINERÍA DE DATOS</a:t>
+              <a:t>EDA</a:t>
             </a:r>
           </a:p>
         </p:txBody>
@@ -4748,21 +5329,69 @@
                 </a:solidFill>
                 <a:latin typeface="Arial"/>
               </a:rPr>
-              <a:t>Variable target</a:t>
-            </a:r>
-          </a:p>
-        </p:txBody>
-      </p:sp>
-      <p:sp>
-        <p:nvSpPr>
-          <p:cNvPr id="5" name="TextBox 4"/>
+              <a:t>Seniority, modalidad y provincias</a:t>
+            </a:r>
+          </a:p>
+        </p:txBody>
+      </p:sp>
+      <p:pic>
+        <p:nvPicPr>
+          <p:cNvPr id="5" name="Picture 4" descr="eda_02_seniority.png"/>
+          <p:cNvPicPr>
+            <a:picLocks noChangeAspect="1"/>
+          </p:cNvPicPr>
+          <p:nvPr/>
+        </p:nvPicPr>
+        <p:blipFill>
+          <a:blip r:embed="rId2"/>
+          <a:stretch>
+            <a:fillRect/>
+          </a:stretch>
+        </p:blipFill>
+        <p:spPr>
+          <a:xfrm>
+            <a:off x="457200" y="1702518"/>
+            <a:ext cx="5669280" cy="4093043"/>
+          </a:xfrm>
+          <a:prstGeom prst="rect">
+            <a:avLst/>
+          </a:prstGeom>
+        </p:spPr>
+      </p:pic>
+      <p:pic>
+        <p:nvPicPr>
+          <p:cNvPr id="6" name="Picture 5" descr="eda_05_geografia.png"/>
+          <p:cNvPicPr>
+            <a:picLocks noChangeAspect="1"/>
+          </p:cNvPicPr>
+          <p:nvPr/>
+        </p:nvPicPr>
+        <p:blipFill>
+          <a:blip r:embed="rId3"/>
+          <a:stretch>
+            <a:fillRect/>
+          </a:stretch>
+        </p:blipFill>
+        <p:spPr>
+          <a:xfrm>
+            <a:off x="6217920" y="1733106"/>
+            <a:ext cx="5577840" cy="4031866"/>
+          </a:xfrm>
+          <a:prstGeom prst="rect">
+            <a:avLst/>
+          </a:prstGeom>
+        </p:spPr>
+      </p:pic>
+      <p:sp>
+        <p:nvSpPr>
+          <p:cNvPr id="7" name="TextBox 6"/>
           <p:cNvSpPr txBox="1"/>
           <p:nvPr/>
         </p:nvSpPr>
         <p:spPr>
           <a:xfrm>
-            <a:off x="548640" y="1828800"/>
-            <a:ext cx="5852160" cy="4206240"/>
+            <a:off x="548640" y="5897880"/>
+            <a:ext cx="11155680" cy="731520"/>
           </a:xfrm>
           <a:prstGeom prst="rect">
             <a:avLst/>
@@ -4775,260 +5404,22 @@
           </a:bodyPr>
           <a:lstStyle/>
           <a:p>
-            <a:pPr algn="l">
-              <a:spcBef>
-                <a:spcPts val="0"/>
-              </a:spcBef>
-              <a:spcAft>
-                <a:spcPts val="800"/>
-              </a:spcAft>
-            </a:pPr>
-            <a:r>
-              <a:rPr sz="1600" b="1" i="0">
+            <a:pPr algn="ctr">
+              <a:spcBef>
+                <a:spcPts val="0"/>
+              </a:spcBef>
+              <a:spcAft>
+                <a:spcPts val="600"/>
+              </a:spcAft>
+            </a:pPr>
+            <a:r>
+              <a:rPr sz="1350" b="0" i="1">
                 <a:solidFill>
                   <a:srgbClr val="0A0A0A"/>
                 </a:solidFill>
-                <a:latin typeface="Arial"/>
-              </a:rPr>
-              <a:t>Qué predecimos</a:t>
-            </a:r>
-          </a:p>
-          <a:p>
-            <a:pPr algn="l">
-              <a:spcBef>
-                <a:spcPts val="0"/>
-              </a:spcBef>
-              <a:spcAft>
-                <a:spcPts val="1200"/>
-              </a:spcAft>
-            </a:pPr>
-            <a:r>
-              <a:rPr sz="1450" b="0" i="0">
-                <a:solidFill>
-                  <a:srgbClr val="0A0A0A"/>
-                </a:solidFill>
                 <a:latin typeface="Calibri"/>
               </a:rPr>
-              <a:t>El salario bruto REAL, no el nominal: deflactado a pesos (por IPC) y a dólares (por US CPI) de mayo 2026. Así un perfil es comparable entre ediciones.</a:t>
-            </a:r>
-          </a:p>
-          <a:p>
-            <a:pPr algn="l">
-              <a:spcBef>
-                <a:spcPts val="0"/>
-              </a:spcBef>
-              <a:spcAft>
-                <a:spcPts val="800"/>
-              </a:spcAft>
-            </a:pPr>
-            <a:r>
-              <a:rPr sz="1600" b="1" i="0">
-                <a:solidFill>
-                  <a:srgbClr val="0A0A0A"/>
-                </a:solidFill>
-                <a:latin typeface="Arial"/>
-              </a:rPr>
-              <a:t>Por qué real y no nominal</a:t>
-            </a:r>
-          </a:p>
-          <a:p>
-            <a:pPr algn="l">
-              <a:spcBef>
-                <a:spcPts val="0"/>
-              </a:spcBef>
-              <a:spcAft>
-                <a:spcPts val="600"/>
-              </a:spcAft>
-            </a:pPr>
-            <a:r>
-              <a:rPr sz="1450" b="0" i="0">
-                <a:solidFill>
-                  <a:srgbClr val="0A0A0A"/>
-                </a:solidFill>
-                <a:latin typeface="Calibri"/>
-              </a:rPr>
-              <a:t>El número nominal creció 10× sólo por inflación: entrenar sobre nominal mezclaría épocas y aprendería el paso del tiempo, no el perfil.</a:t>
-            </a:r>
-          </a:p>
-        </p:txBody>
-      </p:sp>
-      <p:sp>
-        <p:nvSpPr>
-          <p:cNvPr id="6" name="Rounded Rectangle 5"/>
-          <p:cNvSpPr/>
-          <p:nvPr/>
-        </p:nvSpPr>
-        <p:spPr>
-          <a:xfrm>
-            <a:off x="6766560" y="1828800"/>
-            <a:ext cx="4846320" cy="4114800"/>
-          </a:xfrm>
-          <a:prstGeom prst="roundRect">
-            <a:avLst/>
-          </a:prstGeom>
-          <a:solidFill>
-            <a:srgbClr val="0A0A0A"/>
-          </a:solidFill>
-          <a:ln>
-            <a:noFill/>
-          </a:ln>
-          <a:effectLst/>
-        </p:spPr>
-        <p:style>
-          <a:lnRef idx="1">
-            <a:schemeClr val="accent1"/>
-          </a:lnRef>
-          <a:fillRef idx="3">
-            <a:schemeClr val="accent1"/>
-          </a:fillRef>
-          <a:effectRef idx="2">
-            <a:schemeClr val="accent1"/>
-          </a:effectRef>
-          <a:fontRef idx="minor">
-            <a:schemeClr val="lt1"/>
-          </a:fontRef>
-        </p:style>
-        <p:txBody>
-          <a:bodyPr rtlCol="0" anchor="ctr"/>
-          <a:lstStyle/>
-          <a:p>
-            <a:pPr algn="ctr"/>
-          </a:p>
-        </p:txBody>
-      </p:sp>
-      <p:sp>
-        <p:nvSpPr>
-          <p:cNvPr id="7" name="TextBox 6"/>
-          <p:cNvSpPr txBox="1"/>
-          <p:nvPr/>
-        </p:nvSpPr>
-        <p:spPr>
-          <a:xfrm>
-            <a:off x="7086600" y="2286000"/>
-            <a:ext cx="4206240" cy="3291840"/>
-          </a:xfrm>
-          <a:prstGeom prst="rect">
-            <a:avLst/>
-          </a:prstGeom>
-          <a:noFill/>
-        </p:spPr>
-        <p:txBody>
-          <a:bodyPr wrap="square" lIns="45720" rIns="45720" tIns="18288" bIns="18288">
-            <a:spAutoFit/>
-          </a:bodyPr>
-          <a:lstStyle/>
-          <a:p>
-            <a:pPr algn="l">
-              <a:spcBef>
-                <a:spcPts val="0"/>
-              </a:spcBef>
-              <a:spcAft>
-                <a:spcPts val="1200"/>
-              </a:spcAft>
-            </a:pPr>
-            <a:r>
-              <a:rPr sz="1300" b="1" i="0">
-                <a:solidFill>
-                  <a:srgbClr val="E6FF00"/>
-                </a:solidFill>
-                <a:latin typeface="Arial"/>
-              </a:rPr>
-              <a:t>DOS UNIDADES</a:t>
-            </a:r>
-          </a:p>
-          <a:p>
-            <a:pPr algn="l">
-              <a:spcBef>
-                <a:spcPts val="0"/>
-              </a:spcBef>
-              <a:spcAft>
-                <a:spcPts val="200"/>
-              </a:spcAft>
-            </a:pPr>
-            <a:r>
-              <a:rPr sz="1700" b="1" i="0">
-                <a:solidFill>
-                  <a:srgbClr val="FFFFFF"/>
-                </a:solidFill>
-                <a:latin typeface="Arial"/>
-              </a:rPr>
-              <a:t>salario_real_ars</a:t>
-            </a:r>
-          </a:p>
-          <a:p>
-            <a:pPr algn="l">
-              <a:spcBef>
-                <a:spcPts val="0"/>
-              </a:spcBef>
-              <a:spcAft>
-                <a:spcPts val="1400"/>
-              </a:spcAft>
-            </a:pPr>
-            <a:r>
-              <a:rPr sz="1200" b="0" i="0">
-                <a:solidFill>
-                  <a:srgbClr val="8C8C8C"/>
-                </a:solidFill>
-                <a:latin typeface="Calibri"/>
-              </a:rPr>
-              <a:t>pesos constantes may-2026</a:t>
-            </a:r>
-          </a:p>
-          <a:p>
-            <a:pPr algn="l">
-              <a:spcBef>
-                <a:spcPts val="0"/>
-              </a:spcBef>
-              <a:spcAft>
-                <a:spcPts val="200"/>
-              </a:spcAft>
-            </a:pPr>
-            <a:r>
-              <a:rPr sz="1700" b="1" i="0">
-                <a:solidFill>
-                  <a:srgbClr val="FFFFFF"/>
-                </a:solidFill>
-                <a:latin typeface="Arial"/>
-              </a:rPr>
-              <a:t>salario_real_usd</a:t>
-            </a:r>
-          </a:p>
-          <a:p>
-            <a:pPr algn="l">
-              <a:spcBef>
-                <a:spcPts val="0"/>
-              </a:spcBef>
-              <a:spcAft>
-                <a:spcPts val="1000"/>
-              </a:spcAft>
-            </a:pPr>
-            <a:r>
-              <a:rPr sz="1200" b="0" i="0">
-                <a:solidFill>
-                  <a:srgbClr val="8C8C8C"/>
-                </a:solidFill>
-                <a:latin typeface="Calibri"/>
-              </a:rPr>
-              <a:t>dólares constantes may-2026</a:t>
-            </a:r>
-          </a:p>
-          <a:p>
-            <a:pPr algn="l">
-              <a:spcBef>
-                <a:spcPts val="0"/>
-              </a:spcBef>
-              <a:spcAft>
-                <a:spcPts val="600"/>
-              </a:spcAft>
-            </a:pPr>
-            <a:r>
-              <a:rPr sz="1250" b="0" i="1">
-                <a:solidFill>
-                  <a:srgbClr val="E6FF00"/>
-                </a:solidFill>
-                <a:latin typeface="Calibri"/>
-              </a:rPr>
-              <a:t>Difieren en una constante → mismo R².</a:t>
+              <a:t>Seniority casi sin solapamiento (jr $1,8M → sr $4,3M)  ·  CABA +24% vs interior  ·  remoto +43% en USD.</a:t>
             </a:r>
           </a:p>
         </p:txBody>
@@ -5129,7 +5520,7 @@
                 </a:solidFill>
                 <a:latin typeface="Arial"/>
               </a:rPr>
-              <a:t>05  ·  </a:t>
+              <a:t>04  ·  </a:t>
             </a:r>
             <a:r>
               <a:rPr sz="1300" b="1">
@@ -5138,7 +5529,7 @@
                 </a:solidFill>
                 <a:latin typeface="Arial"/>
               </a:rPr>
-              <a:t>COMPARACIÓN DE MODELOS</a:t>
+              <a:t>EDA</a:t>
             </a:r>
           </a:p>
         </p:txBody>
@@ -5180,14 +5571,14 @@
                 </a:solidFill>
                 <a:latin typeface="Arial"/>
               </a:rPr>
-              <a:t>Cinco técnicas comparadas</a:t>
+              <a:t>Tecnologías más usadas</a:t>
             </a:r>
           </a:p>
         </p:txBody>
       </p:sp>
       <p:pic>
         <p:nvPicPr>
-          <p:cNvPr id="5" name="Picture 4" descr="modelos_bn.png"/>
+          <p:cNvPr id="5" name="Picture 4" descr="eda_04_tecnologias.png"/>
           <p:cNvPicPr>
             <a:picLocks noChangeAspect="1"/>
           </p:cNvPicPr>
@@ -5201,8 +5592,8 @@
         </p:blipFill>
         <p:spPr>
           <a:xfrm>
-            <a:off x="457200" y="2229381"/>
-            <a:ext cx="7315200" cy="3130757"/>
+            <a:off x="1210082" y="1691640"/>
+            <a:ext cx="6083755" cy="4389120"/>
           </a:xfrm>
           <a:prstGeom prst="rect">
             <a:avLst/>
@@ -5217,14 +5608,14 @@
         </p:nvSpPr>
         <p:spPr>
           <a:xfrm>
-            <a:off x="7955279" y="1828800"/>
-            <a:ext cx="3749039" cy="4114800"/>
+            <a:off x="8321040" y="1874519"/>
+            <a:ext cx="3383280" cy="4023360"/>
           </a:xfrm>
           <a:prstGeom prst="roundRect">
             <a:avLst/>
           </a:prstGeom>
           <a:solidFill>
-            <a:srgbClr val="EDEDED"/>
+            <a:srgbClr val="0A0A0A"/>
           </a:solidFill>
           <a:ln>
             <a:noFill/>
@@ -5261,8 +5652,8 @@
         </p:nvSpPr>
         <p:spPr>
           <a:xfrm>
-            <a:off x="8183879" y="2057400"/>
-            <a:ext cx="3291840" cy="3749039"/>
+            <a:off x="8549640" y="2103120"/>
+            <a:ext cx="2926080" cy="3657600"/>
           </a:xfrm>
           <a:prstGeom prst="rect">
             <a:avLst/>
@@ -5284,13 +5675,13 @@
               </a:spcAft>
             </a:pPr>
             <a:r>
-              <a:rPr sz="1250" b="1" i="0">
-                <a:solidFill>
-                  <a:srgbClr val="0A0A0A"/>
+              <a:rPr sz="1400" b="1" i="0">
+                <a:solidFill>
+                  <a:srgbClr val="E6FF00"/>
                 </a:solidFill>
                 <a:latin typeface="Arial"/>
               </a:rPr>
-              <a:t>VALIDACIÓN TEMPORAL</a:t>
+              <a:t>EL PREMIUM</a:t>
             </a:r>
           </a:p>
           <a:p>
@@ -5303,108 +5694,70 @@
               </a:spcAft>
             </a:pPr>
             <a:r>
-              <a:rPr sz="1250" b="0" i="0">
-                <a:solidFill>
-                  <a:srgbClr val="0A0A0A"/>
+              <a:rPr sz="1300" b="0" i="0">
+                <a:solidFill>
+                  <a:srgbClr val="FFFFFF"/>
                 </a:solidFill>
                 <a:latin typeface="Calibri"/>
               </a:rPr>
-              <a:t>Train = ediciones previas. Test = última encuesta 2025.2 (nunca vista).</a:t>
-            </a:r>
-          </a:p>
-          <a:p>
-            <a:pPr algn="l">
-              <a:spcBef>
-                <a:spcPts val="0"/>
-              </a:spcBef>
-              <a:spcAft>
-                <a:spcPts val="600"/>
-              </a:spcAft>
-            </a:pPr>
-            <a:r>
-              <a:rPr sz="1250" b="0" i="0">
-                <a:solidFill>
-                  <a:srgbClr val="8C8C8C"/>
+              <a:t>No lo da la cantidad de tecnologías, sino cuáles:</a:t>
+            </a:r>
+          </a:p>
+          <a:p>
+            <a:pPr algn="l">
+              <a:spcBef>
+                <a:spcPts val="0"/>
+              </a:spcBef>
+              <a:spcAft>
+                <a:spcPts val="900"/>
+              </a:spcAft>
+            </a:pPr>
+            <a:r>
+              <a:rPr sz="1300" b="0" i="0">
+                <a:solidFill>
+                  <a:srgbClr val="FFFFFF"/>
                 </a:solidFill>
                 <a:latin typeface="Calibri"/>
               </a:rPr>
-              <a:t>—  Lineal simple: 0.13</a:t>
-            </a:r>
-          </a:p>
-          <a:p>
-            <a:pPr algn="l">
-              <a:spcBef>
-                <a:spcPts val="0"/>
-              </a:spcBef>
-              <a:spcAft>
-                <a:spcPts val="600"/>
-              </a:spcAft>
-            </a:pPr>
-            <a:r>
-              <a:rPr sz="1250" b="0" i="0">
-                <a:solidFill>
-                  <a:srgbClr val="8C8C8C"/>
+              <a:t>—  Go +45%  ·  Rust +48%  ·  Scala +42%</a:t>
+            </a:r>
+          </a:p>
+          <a:p>
+            <a:pPr algn="l">
+              <a:spcBef>
+                <a:spcPts val="0"/>
+              </a:spcBef>
+              <a:spcAft>
+                <a:spcPts val="900"/>
+              </a:spcAft>
+            </a:pPr>
+            <a:r>
+              <a:rPr sz="1300" b="0" i="0">
+                <a:solidFill>
+                  <a:srgbClr val="FFFFFF"/>
                 </a:solidFill>
                 <a:latin typeface="Calibri"/>
               </a:rPr>
-              <a:t>—  Lineal múltiple: 0.22</a:t>
-            </a:r>
-          </a:p>
-          <a:p>
-            <a:pPr algn="l">
-              <a:spcBef>
-                <a:spcPts val="0"/>
-              </a:spcBef>
-              <a:spcAft>
-                <a:spcPts val="600"/>
-              </a:spcAft>
-            </a:pPr>
-            <a:r>
-              <a:rPr sz="1250" b="0" i="0">
-                <a:solidFill>
-                  <a:srgbClr val="8C8C8C"/>
+              <a:t>—  Python +13%</a:t>
+            </a:r>
+          </a:p>
+          <a:p>
+            <a:pPr algn="l">
+              <a:spcBef>
+                <a:spcPts val="0"/>
+              </a:spcBef>
+              <a:spcAft>
+                <a:spcPts val="900"/>
+              </a:spcAft>
+            </a:pPr>
+            <a:r>
+              <a:rPr sz="1300" b="0" i="0">
+                <a:solidFill>
+                  <a:srgbClr val="FFFFFF"/>
                 </a:solidFill>
                 <a:latin typeface="Calibri"/>
               </a:rPr>
-              <a:t>—  Árbol: 0.20</a:t>
-            </a:r>
-          </a:p>
-          <a:p>
-            <a:pPr algn="l">
-              <a:spcBef>
-                <a:spcPts val="0"/>
-              </a:spcBef>
-              <a:spcAft>
-                <a:spcPts val="600"/>
-              </a:spcAft>
-            </a:pPr>
-            <a:r>
-              <a:rPr sz="1250" b="0" i="0">
-                <a:solidFill>
-                  <a:srgbClr val="8C8C8C"/>
-                </a:solidFill>
-                <a:latin typeface="Calibri"/>
-              </a:rPr>
-              <a:t>—  Polinómica: 0.28</a:t>
-            </a:r>
-          </a:p>
-          <a:p>
-            <a:pPr algn="l">
-              <a:spcBef>
-                <a:spcPts val="0"/>
-              </a:spcBef>
-              <a:spcAft>
-                <a:spcPts val="600"/>
-              </a:spcAft>
-            </a:pPr>
-            <a:r>
-              <a:rPr sz="1350" b="1" i="0">
-                <a:solidFill>
-                  <a:srgbClr val="0A0A0A"/>
-                </a:solidFill>
-                <a:latin typeface="Calibri"/>
-              </a:rPr>
-              <a:t>—  Random Forest: 0.27 (elegido)</a:t>
+              <a:t>—  Frontend web (CSS/HTML) bajo la media</a:t>
             </a:r>
           </a:p>
         </p:txBody>
@@ -5505,7 +5858,7 @@
                 </a:solidFill>
                 <a:latin typeface="Arial"/>
               </a:rPr>
-              <a:t>05  ·  </a:t>
+              <a:t>04  ·  </a:t>
             </a:r>
             <a:r>
               <a:rPr sz="1300" b="1">
@@ -5514,7 +5867,7 @@
                 </a:solidFill>
                 <a:latin typeface="Arial"/>
               </a:rPr>
-              <a:t>RANDOM FOREST</a:t>
+              <a:t>EDA · DISPERSIÓN Y VARIABLES</a:t>
             </a:r>
           </a:p>
         </p:txBody>
@@ -5556,27 +5909,51 @@
                 </a:solidFill>
                 <a:latin typeface="Arial"/>
               </a:rPr>
-              <a:t>Por qué elegimos Random Forest</a:t>
-            </a:r>
-          </a:p>
-        </p:txBody>
-      </p:sp>
-      <p:sp>
-        <p:nvSpPr>
-          <p:cNvPr id="5" name="Rectangle 4"/>
+              <a:t>Cómo se eligieron los ejes (PCA)</a:t>
+            </a:r>
+          </a:p>
+        </p:txBody>
+      </p:sp>
+      <p:pic>
+        <p:nvPicPr>
+          <p:cNvPr id="5" name="Picture 4" descr="clusters_bn.png"/>
+          <p:cNvPicPr>
+            <a:picLocks noChangeAspect="1"/>
+          </p:cNvPicPr>
+          <p:nvPr/>
+        </p:nvPicPr>
+        <p:blipFill>
+          <a:blip r:embed="rId2"/>
+          <a:stretch>
+            <a:fillRect/>
+          </a:stretch>
+        </p:blipFill>
+        <p:spPr>
+          <a:xfrm>
+            <a:off x="457200" y="2351472"/>
+            <a:ext cx="7680960" cy="2886574"/>
+          </a:xfrm>
+          <a:prstGeom prst="rect">
+            <a:avLst/>
+          </a:prstGeom>
+        </p:spPr>
+      </p:pic>
+      <p:sp>
+        <p:nvSpPr>
+          <p:cNvPr id="6" name="Rounded Rectangle 5"/>
           <p:cNvSpPr/>
           <p:nvPr/>
         </p:nvSpPr>
         <p:spPr>
           <a:xfrm>
-            <a:off x="640080" y="1828800"/>
-            <a:ext cx="502920" cy="502920"/>
-          </a:xfrm>
-          <a:prstGeom prst="rect">
+            <a:off x="8366760" y="1828800"/>
+            <a:ext cx="3337560" cy="4114800"/>
+          </a:xfrm>
+          <a:prstGeom prst="roundRect">
             <a:avLst/>
           </a:prstGeom>
           <a:solidFill>
-            <a:srgbClr val="E6FF00"/>
+            <a:srgbClr val="1A1A1A"/>
           </a:solidFill>
           <a:ln>
             <a:noFill/>
@@ -5607,14 +5984,14 @@
       </p:sp>
       <p:sp>
         <p:nvSpPr>
-          <p:cNvPr id="6" name="TextBox 5"/>
+          <p:cNvPr id="7" name="TextBox 6"/>
           <p:cNvSpPr txBox="1"/>
           <p:nvPr/>
         </p:nvSpPr>
         <p:spPr>
           <a:xfrm>
-            <a:off x="658368" y="1874519"/>
-            <a:ext cx="502920" cy="457200"/>
+            <a:off x="8595360" y="2057400"/>
+            <a:ext cx="2880360" cy="3749039"/>
           </a:xfrm>
           <a:prstGeom prst="rect">
             <a:avLst/>
@@ -5627,64 +6004,79 @@
           </a:bodyPr>
           <a:lstStyle/>
           <a:p>
-            <a:pPr algn="ctr">
-              <a:spcBef>
-                <a:spcPts val="0"/>
-              </a:spcBef>
-              <a:spcAft>
-                <a:spcPts val="0"/>
-              </a:spcAft>
-            </a:pPr>
-            <a:r>
-              <a:rPr sz="1800" b="1" i="0">
-                <a:solidFill>
-                  <a:srgbClr val="0A0A0A"/>
+            <a:pPr algn="l">
+              <a:spcBef>
+                <a:spcPts val="0"/>
+              </a:spcBef>
+              <a:spcAft>
+                <a:spcPts val="800"/>
+              </a:spcAft>
+            </a:pPr>
+            <a:r>
+              <a:rPr sz="1300" b="1" i="0">
+                <a:solidFill>
+                  <a:srgbClr val="E6FF00"/>
+                </a:solidFill>
+                <a:latin typeface="Arial"/>
+              </a:rPr>
+              <a:t>PROYECCIÓN 2D</a:t>
+            </a:r>
+          </a:p>
+          <a:p>
+            <a:pPr algn="l">
+              <a:spcBef>
+                <a:spcPts val="0"/>
+              </a:spcBef>
+              <a:spcAft>
+                <a:spcPts val="800"/>
+              </a:spcAft>
+            </a:pPr>
+            <a:r>
+              <a:rPr sz="1250" b="0" i="0">
+                <a:solidFill>
+                  <a:srgbClr val="FFFFFF"/>
                 </a:solidFill>
                 <a:latin typeface="Calibri"/>
               </a:rPr>
-              <a:t>✓</a:t>
-            </a:r>
-          </a:p>
-        </p:txBody>
-      </p:sp>
-      <p:sp>
-        <p:nvSpPr>
-          <p:cNvPr id="7" name="TextBox 6"/>
-          <p:cNvSpPr txBox="1"/>
-          <p:nvPr/>
-        </p:nvSpPr>
-        <p:spPr>
-          <a:xfrm>
-            <a:off x="1325880" y="1801368"/>
-            <a:ext cx="10241280" cy="868680"/>
-          </a:xfrm>
-          <a:prstGeom prst="rect">
-            <a:avLst/>
-          </a:prstGeom>
-          <a:noFill/>
-        </p:spPr>
-        <p:txBody>
-          <a:bodyPr wrap="square" lIns="45720" rIns="45720" tIns="18288" bIns="18288">
-            <a:spAutoFit/>
-          </a:bodyPr>
-          <a:lstStyle/>
-          <a:p>
-            <a:pPr algn="l">
-              <a:spcBef>
-                <a:spcPts val="0"/>
-              </a:spcBef>
-              <a:spcAft>
-                <a:spcPts val="200"/>
-              </a:spcAft>
-            </a:pPr>
-            <a:r>
-              <a:rPr sz="1500" b="1" i="0">
+              <a:t>El perfil tiene muchas dimensiones; PCA las comprime a 2 ejes:</a:t>
+            </a:r>
+          </a:p>
+          <a:p>
+            <a:pPr algn="l">
+              <a:spcBef>
+                <a:spcPts val="0"/>
+              </a:spcBef>
+              <a:spcAft>
+                <a:spcPts val="800"/>
+              </a:spcAft>
+            </a:pPr>
+            <a:r>
+              <a:rPr sz="1250" b="0" i="0">
                 <a:solidFill>
                   <a:srgbClr val="FFFFFF"/>
                 </a:solidFill>
-                <a:latin typeface="Arial"/>
-              </a:rPr>
-              <a:t>A la par del mejor R²</a:t>
+                <a:latin typeface="Calibri"/>
+              </a:rPr>
+              <a:t>—  Comp. 1 (48%) — años de carrera (junior → senior)</a:t>
+            </a:r>
+          </a:p>
+          <a:p>
+            <a:pPr algn="l">
+              <a:spcBef>
+                <a:spcPts val="0"/>
+              </a:spcBef>
+              <a:spcAft>
+                <a:spcPts val="1000"/>
+              </a:spcAft>
+            </a:pPr>
+            <a:r>
+              <a:rPr sz="1250" b="0" i="0">
+                <a:solidFill>
+                  <a:srgbClr val="FFFFFF"/>
+                </a:solidFill>
+                <a:latin typeface="Calibri"/>
+              </a:rPr>
+              <a:t>—  Comp. 2 (15%) — rotación / antigüedad</a:t>
             </a:r>
           </a:p>
           <a:p>
@@ -5697,601 +6089,13 @@
               </a:spcAft>
             </a:pPr>
             <a:r>
-              <a:rPr sz="1300" b="0" i="0">
-                <a:solidFill>
-                  <a:srgbClr val="8C8C8C"/>
+              <a:rPr sz="1250" b="0" i="1">
+                <a:solidFill>
+                  <a:srgbClr val="E6FF00"/>
                 </a:solidFill>
                 <a:latin typeface="Calibri"/>
               </a:rPr>
-              <a:t>empata con la polinómica en test (R²≈0.27); se elige por lo demás.</a:t>
-            </a:r>
-          </a:p>
-        </p:txBody>
-      </p:sp>
-      <p:sp>
-        <p:nvSpPr>
-          <p:cNvPr id="8" name="Rectangle 7"/>
-          <p:cNvSpPr/>
-          <p:nvPr/>
-        </p:nvSpPr>
-        <p:spPr>
-          <a:xfrm>
-            <a:off x="640080" y="2724912"/>
-            <a:ext cx="502920" cy="502920"/>
-          </a:xfrm>
-          <a:prstGeom prst="rect">
-            <a:avLst/>
-          </a:prstGeom>
-          <a:solidFill>
-            <a:srgbClr val="E6FF00"/>
-          </a:solidFill>
-          <a:ln>
-            <a:noFill/>
-          </a:ln>
-          <a:effectLst/>
-        </p:spPr>
-        <p:style>
-          <a:lnRef idx="1">
-            <a:schemeClr val="accent1"/>
-          </a:lnRef>
-          <a:fillRef idx="3">
-            <a:schemeClr val="accent1"/>
-          </a:fillRef>
-          <a:effectRef idx="2">
-            <a:schemeClr val="accent1"/>
-          </a:effectRef>
-          <a:fontRef idx="minor">
-            <a:schemeClr val="lt1"/>
-          </a:fontRef>
-        </p:style>
-        <p:txBody>
-          <a:bodyPr rtlCol="0" anchor="ctr"/>
-          <a:lstStyle/>
-          <a:p>
-            <a:pPr algn="ctr"/>
-          </a:p>
-        </p:txBody>
-      </p:sp>
-      <p:sp>
-        <p:nvSpPr>
-          <p:cNvPr id="9" name="TextBox 8"/>
-          <p:cNvSpPr txBox="1"/>
-          <p:nvPr/>
-        </p:nvSpPr>
-        <p:spPr>
-          <a:xfrm>
-            <a:off x="658368" y="2770632"/>
-            <a:ext cx="502920" cy="457200"/>
-          </a:xfrm>
-          <a:prstGeom prst="rect">
-            <a:avLst/>
-          </a:prstGeom>
-          <a:noFill/>
-        </p:spPr>
-        <p:txBody>
-          <a:bodyPr wrap="square" lIns="45720" rIns="45720" tIns="18288" bIns="18288">
-            <a:spAutoFit/>
-          </a:bodyPr>
-          <a:lstStyle/>
-          <a:p>
-            <a:pPr algn="ctr">
-              <a:spcBef>
-                <a:spcPts val="0"/>
-              </a:spcBef>
-              <a:spcAft>
-                <a:spcPts val="0"/>
-              </a:spcAft>
-            </a:pPr>
-            <a:r>
-              <a:rPr sz="1800" b="1" i="0">
-                <a:solidFill>
-                  <a:srgbClr val="0A0A0A"/>
-                </a:solidFill>
-                <a:latin typeface="Calibri"/>
-              </a:rPr>
-              <a:t>✓</a:t>
-            </a:r>
-          </a:p>
-        </p:txBody>
-      </p:sp>
-      <p:sp>
-        <p:nvSpPr>
-          <p:cNvPr id="10" name="TextBox 9"/>
-          <p:cNvSpPr txBox="1"/>
-          <p:nvPr/>
-        </p:nvSpPr>
-        <p:spPr>
-          <a:xfrm>
-            <a:off x="1325880" y="2697480"/>
-            <a:ext cx="10241280" cy="868680"/>
-          </a:xfrm>
-          <a:prstGeom prst="rect">
-            <a:avLst/>
-          </a:prstGeom>
-          <a:noFill/>
-        </p:spPr>
-        <p:txBody>
-          <a:bodyPr wrap="square" lIns="45720" rIns="45720" tIns="18288" bIns="18288">
-            <a:spAutoFit/>
-          </a:bodyPr>
-          <a:lstStyle/>
-          <a:p>
-            <a:pPr algn="l">
-              <a:spcBef>
-                <a:spcPts val="0"/>
-              </a:spcBef>
-              <a:spcAft>
-                <a:spcPts val="200"/>
-              </a:spcAft>
-            </a:pPr>
-            <a:r>
-              <a:rPr sz="1500" b="1" i="0">
-                <a:solidFill>
-                  <a:srgbClr val="FFFFFF"/>
-                </a:solidFill>
-                <a:latin typeface="Arial"/>
-              </a:rPr>
-              <a:t>Capta no linealidad e interacciones</a:t>
-            </a:r>
-          </a:p>
-          <a:p>
-            <a:pPr algn="l">
-              <a:spcBef>
-                <a:spcPts val="0"/>
-              </a:spcBef>
-              <a:spcAft>
-                <a:spcPts val="600"/>
-              </a:spcAft>
-            </a:pPr>
-            <a:r>
-              <a:rPr sz="1300" b="0" i="0">
-                <a:solidFill>
-                  <a:srgbClr val="8C8C8C"/>
-                </a:solidFill>
-                <a:latin typeface="Calibri"/>
-              </a:rPr>
-              <a:t>sin ingeniería manual (p. ej. el plateau de la experiencia).</a:t>
-            </a:r>
-          </a:p>
-        </p:txBody>
-      </p:sp>
-      <p:sp>
-        <p:nvSpPr>
-          <p:cNvPr id="11" name="Rectangle 10"/>
-          <p:cNvSpPr/>
-          <p:nvPr/>
-        </p:nvSpPr>
-        <p:spPr>
-          <a:xfrm>
-            <a:off x="640080" y="3621024"/>
-            <a:ext cx="502920" cy="502920"/>
-          </a:xfrm>
-          <a:prstGeom prst="rect">
-            <a:avLst/>
-          </a:prstGeom>
-          <a:solidFill>
-            <a:srgbClr val="E6FF00"/>
-          </a:solidFill>
-          <a:ln>
-            <a:noFill/>
-          </a:ln>
-          <a:effectLst/>
-        </p:spPr>
-        <p:style>
-          <a:lnRef idx="1">
-            <a:schemeClr val="accent1"/>
-          </a:lnRef>
-          <a:fillRef idx="3">
-            <a:schemeClr val="accent1"/>
-          </a:fillRef>
-          <a:effectRef idx="2">
-            <a:schemeClr val="accent1"/>
-          </a:effectRef>
-          <a:fontRef idx="minor">
-            <a:schemeClr val="lt1"/>
-          </a:fontRef>
-        </p:style>
-        <p:txBody>
-          <a:bodyPr rtlCol="0" anchor="ctr"/>
-          <a:lstStyle/>
-          <a:p>
-            <a:pPr algn="ctr"/>
-          </a:p>
-        </p:txBody>
-      </p:sp>
-      <p:sp>
-        <p:nvSpPr>
-          <p:cNvPr id="12" name="TextBox 11"/>
-          <p:cNvSpPr txBox="1"/>
-          <p:nvPr/>
-        </p:nvSpPr>
-        <p:spPr>
-          <a:xfrm>
-            <a:off x="658368" y="3666744"/>
-            <a:ext cx="502920" cy="457200"/>
-          </a:xfrm>
-          <a:prstGeom prst="rect">
-            <a:avLst/>
-          </a:prstGeom>
-          <a:noFill/>
-        </p:spPr>
-        <p:txBody>
-          <a:bodyPr wrap="square" lIns="45720" rIns="45720" tIns="18288" bIns="18288">
-            <a:spAutoFit/>
-          </a:bodyPr>
-          <a:lstStyle/>
-          <a:p>
-            <a:pPr algn="ctr">
-              <a:spcBef>
-                <a:spcPts val="0"/>
-              </a:spcBef>
-              <a:spcAft>
-                <a:spcPts val="0"/>
-              </a:spcAft>
-            </a:pPr>
-            <a:r>
-              <a:rPr sz="1800" b="1" i="0">
-                <a:solidFill>
-                  <a:srgbClr val="0A0A0A"/>
-                </a:solidFill>
-                <a:latin typeface="Calibri"/>
-              </a:rPr>
-              <a:t>✓</a:t>
-            </a:r>
-          </a:p>
-        </p:txBody>
-      </p:sp>
-      <p:sp>
-        <p:nvSpPr>
-          <p:cNvPr id="13" name="TextBox 12"/>
-          <p:cNvSpPr txBox="1"/>
-          <p:nvPr/>
-        </p:nvSpPr>
-        <p:spPr>
-          <a:xfrm>
-            <a:off x="1325880" y="3593592"/>
-            <a:ext cx="10241280" cy="868680"/>
-          </a:xfrm>
-          <a:prstGeom prst="rect">
-            <a:avLst/>
-          </a:prstGeom>
-          <a:noFill/>
-        </p:spPr>
-        <p:txBody>
-          <a:bodyPr wrap="square" lIns="45720" rIns="45720" tIns="18288" bIns="18288">
-            <a:spAutoFit/>
-          </a:bodyPr>
-          <a:lstStyle/>
-          <a:p>
-            <a:pPr algn="l">
-              <a:spcBef>
-                <a:spcPts val="0"/>
-              </a:spcBef>
-              <a:spcAft>
-                <a:spcPts val="200"/>
-              </a:spcAft>
-            </a:pPr>
-            <a:r>
-              <a:rPr sz="1500" b="1" i="0">
-                <a:solidFill>
-                  <a:srgbClr val="FFFFFF"/>
-                </a:solidFill>
-                <a:latin typeface="Arial"/>
-              </a:rPr>
-              <a:t>Robusto</a:t>
-            </a:r>
-          </a:p>
-          <a:p>
-            <a:pPr algn="l">
-              <a:spcBef>
-                <a:spcPts val="0"/>
-              </a:spcBef>
-              <a:spcAft>
-                <a:spcPts val="600"/>
-              </a:spcAft>
-            </a:pPr>
-            <a:r>
-              <a:rPr sz="1300" b="0" i="0">
-                <a:solidFill>
-                  <a:srgbClr val="8C8C8C"/>
-                </a:solidFill>
-                <a:latin typeface="Calibri"/>
-              </a:rPr>
-              <a:t>tolera outliers y mezcla de escalas; no necesita estandarizar.</a:t>
-            </a:r>
-          </a:p>
-        </p:txBody>
-      </p:sp>
-      <p:sp>
-        <p:nvSpPr>
-          <p:cNvPr id="14" name="Rectangle 13"/>
-          <p:cNvSpPr/>
-          <p:nvPr/>
-        </p:nvSpPr>
-        <p:spPr>
-          <a:xfrm>
-            <a:off x="640080" y="4517136"/>
-            <a:ext cx="502920" cy="502920"/>
-          </a:xfrm>
-          <a:prstGeom prst="rect">
-            <a:avLst/>
-          </a:prstGeom>
-          <a:solidFill>
-            <a:srgbClr val="E6FF00"/>
-          </a:solidFill>
-          <a:ln>
-            <a:noFill/>
-          </a:ln>
-          <a:effectLst/>
-        </p:spPr>
-        <p:style>
-          <a:lnRef idx="1">
-            <a:schemeClr val="accent1"/>
-          </a:lnRef>
-          <a:fillRef idx="3">
-            <a:schemeClr val="accent1"/>
-          </a:fillRef>
-          <a:effectRef idx="2">
-            <a:schemeClr val="accent1"/>
-          </a:effectRef>
-          <a:fontRef idx="minor">
-            <a:schemeClr val="lt1"/>
-          </a:fontRef>
-        </p:style>
-        <p:txBody>
-          <a:bodyPr rtlCol="0" anchor="ctr"/>
-          <a:lstStyle/>
-          <a:p>
-            <a:pPr algn="ctr"/>
-          </a:p>
-        </p:txBody>
-      </p:sp>
-      <p:sp>
-        <p:nvSpPr>
-          <p:cNvPr id="15" name="TextBox 14"/>
-          <p:cNvSpPr txBox="1"/>
-          <p:nvPr/>
-        </p:nvSpPr>
-        <p:spPr>
-          <a:xfrm>
-            <a:off x="658368" y="4562855"/>
-            <a:ext cx="502920" cy="457200"/>
-          </a:xfrm>
-          <a:prstGeom prst="rect">
-            <a:avLst/>
-          </a:prstGeom>
-          <a:noFill/>
-        </p:spPr>
-        <p:txBody>
-          <a:bodyPr wrap="square" lIns="45720" rIns="45720" tIns="18288" bIns="18288">
-            <a:spAutoFit/>
-          </a:bodyPr>
-          <a:lstStyle/>
-          <a:p>
-            <a:pPr algn="ctr">
-              <a:spcBef>
-                <a:spcPts val="0"/>
-              </a:spcBef>
-              <a:spcAft>
-                <a:spcPts val="0"/>
-              </a:spcAft>
-            </a:pPr>
-            <a:r>
-              <a:rPr sz="1800" b="1" i="0">
-                <a:solidFill>
-                  <a:srgbClr val="0A0A0A"/>
-                </a:solidFill>
-                <a:latin typeface="Calibri"/>
-              </a:rPr>
-              <a:t>✓</a:t>
-            </a:r>
-          </a:p>
-        </p:txBody>
-      </p:sp>
-      <p:sp>
-        <p:nvSpPr>
-          <p:cNvPr id="16" name="TextBox 15"/>
-          <p:cNvSpPr txBox="1"/>
-          <p:nvPr/>
-        </p:nvSpPr>
-        <p:spPr>
-          <a:xfrm>
-            <a:off x="1325880" y="4489703"/>
-            <a:ext cx="10241280" cy="868680"/>
-          </a:xfrm>
-          <a:prstGeom prst="rect">
-            <a:avLst/>
-          </a:prstGeom>
-          <a:noFill/>
-        </p:spPr>
-        <p:txBody>
-          <a:bodyPr wrap="square" lIns="45720" rIns="45720" tIns="18288" bIns="18288">
-            <a:spAutoFit/>
-          </a:bodyPr>
-          <a:lstStyle/>
-          <a:p>
-            <a:pPr algn="l">
-              <a:spcBef>
-                <a:spcPts val="0"/>
-              </a:spcBef>
-              <a:spcAft>
-                <a:spcPts val="200"/>
-              </a:spcAft>
-            </a:pPr>
-            <a:r>
-              <a:rPr sz="1500" b="1" i="0">
-                <a:solidFill>
-                  <a:srgbClr val="FFFFFF"/>
-                </a:solidFill>
-                <a:latin typeface="Arial"/>
-              </a:rPr>
-              <a:t>Sin overfitting</a:t>
-            </a:r>
-          </a:p>
-          <a:p>
-            <a:pPr algn="l">
-              <a:spcBef>
-                <a:spcPts val="0"/>
-              </a:spcBef>
-              <a:spcAft>
-                <a:spcPts val="600"/>
-              </a:spcAft>
-            </a:pPr>
-            <a:r>
-              <a:rPr sz="1300" b="0" i="0">
-                <a:solidFill>
-                  <a:srgbClr val="8C8C8C"/>
-                </a:solidFill>
-                <a:latin typeface="Calibri"/>
-              </a:rPr>
-              <a:t>regularizado (profundidad y hojas mínimas): train ≈ test.</a:t>
-            </a:r>
-          </a:p>
-        </p:txBody>
-      </p:sp>
-      <p:sp>
-        <p:nvSpPr>
-          <p:cNvPr id="17" name="Rectangle 16"/>
-          <p:cNvSpPr/>
-          <p:nvPr/>
-        </p:nvSpPr>
-        <p:spPr>
-          <a:xfrm>
-            <a:off x="640080" y="5413248"/>
-            <a:ext cx="502920" cy="502920"/>
-          </a:xfrm>
-          <a:prstGeom prst="rect">
-            <a:avLst/>
-          </a:prstGeom>
-          <a:solidFill>
-            <a:srgbClr val="E6FF00"/>
-          </a:solidFill>
-          <a:ln>
-            <a:noFill/>
-          </a:ln>
-          <a:effectLst/>
-        </p:spPr>
-        <p:style>
-          <a:lnRef idx="1">
-            <a:schemeClr val="accent1"/>
-          </a:lnRef>
-          <a:fillRef idx="3">
-            <a:schemeClr val="accent1"/>
-          </a:fillRef>
-          <a:effectRef idx="2">
-            <a:schemeClr val="accent1"/>
-          </a:effectRef>
-          <a:fontRef idx="minor">
-            <a:schemeClr val="lt1"/>
-          </a:fontRef>
-        </p:style>
-        <p:txBody>
-          <a:bodyPr rtlCol="0" anchor="ctr"/>
-          <a:lstStyle/>
-          <a:p>
-            <a:pPr algn="ctr"/>
-          </a:p>
-        </p:txBody>
-      </p:sp>
-      <p:sp>
-        <p:nvSpPr>
-          <p:cNvPr id="18" name="TextBox 17"/>
-          <p:cNvSpPr txBox="1"/>
-          <p:nvPr/>
-        </p:nvSpPr>
-        <p:spPr>
-          <a:xfrm>
-            <a:off x="658368" y="5458968"/>
-            <a:ext cx="502920" cy="457200"/>
-          </a:xfrm>
-          <a:prstGeom prst="rect">
-            <a:avLst/>
-          </a:prstGeom>
-          <a:noFill/>
-        </p:spPr>
-        <p:txBody>
-          <a:bodyPr wrap="square" lIns="45720" rIns="45720" tIns="18288" bIns="18288">
-            <a:spAutoFit/>
-          </a:bodyPr>
-          <a:lstStyle/>
-          <a:p>
-            <a:pPr algn="ctr">
-              <a:spcBef>
-                <a:spcPts val="0"/>
-              </a:spcBef>
-              <a:spcAft>
-                <a:spcPts val="0"/>
-              </a:spcAft>
-            </a:pPr>
-            <a:r>
-              <a:rPr sz="1800" b="1" i="0">
-                <a:solidFill>
-                  <a:srgbClr val="0A0A0A"/>
-                </a:solidFill>
-                <a:latin typeface="Calibri"/>
-              </a:rPr>
-              <a:t>✓</a:t>
-            </a:r>
-          </a:p>
-        </p:txBody>
-      </p:sp>
-      <p:sp>
-        <p:nvSpPr>
-          <p:cNvPr id="19" name="TextBox 18"/>
-          <p:cNvSpPr txBox="1"/>
-          <p:nvPr/>
-        </p:nvSpPr>
-        <p:spPr>
-          <a:xfrm>
-            <a:off x="1325880" y="5385816"/>
-            <a:ext cx="10241280" cy="868680"/>
-          </a:xfrm>
-          <a:prstGeom prst="rect">
-            <a:avLst/>
-          </a:prstGeom>
-          <a:noFill/>
-        </p:spPr>
-        <p:txBody>
-          <a:bodyPr wrap="square" lIns="45720" rIns="45720" tIns="18288" bIns="18288">
-            <a:spAutoFit/>
-          </a:bodyPr>
-          <a:lstStyle/>
-          <a:p>
-            <a:pPr algn="l">
-              <a:spcBef>
-                <a:spcPts val="0"/>
-              </a:spcBef>
-              <a:spcAft>
-                <a:spcPts val="200"/>
-              </a:spcAft>
-            </a:pPr>
-            <a:r>
-              <a:rPr sz="1500" b="1" i="0">
-                <a:solidFill>
-                  <a:srgbClr val="FFFFFF"/>
-                </a:solidFill>
-                <a:latin typeface="Arial"/>
-              </a:rPr>
-              <a:t>Interpretable</a:t>
-            </a:r>
-          </a:p>
-          <a:p>
-            <a:pPr algn="l">
-              <a:spcBef>
-                <a:spcPts val="0"/>
-              </a:spcBef>
-              <a:spcAft>
-                <a:spcPts val="600"/>
-              </a:spcAft>
-            </a:pPr>
-            <a:r>
-              <a:rPr sz="1300" b="0" i="0">
-                <a:solidFill>
-                  <a:srgbClr val="8C8C8C"/>
-                </a:solidFill>
-                <a:latin typeface="Calibri"/>
-              </a:rPr>
-              <a:t>entrega importancia de variables para la lectura de negocio.</a:t>
+              <a:t>Puntos cercanos = perfiles parecidos.</a:t>
             </a:r>
           </a:p>
         </p:txBody>
@@ -6401,7 +6205,7 @@
                 </a:solidFill>
                 <a:latin typeface="Arial"/>
               </a:rPr>
-              <a:t>K-MEANS</a:t>
+              <a:t>MODELOS DE MINERÍA DE DATOS</a:t>
             </a:r>
           </a:p>
         </p:txBody>
@@ -6443,35 +6247,110 @@
                 </a:solidFill>
                 <a:latin typeface="Arial"/>
               </a:rPr>
-              <a:t>Segmentación no supervisada</a:t>
-            </a:r>
-          </a:p>
-        </p:txBody>
-      </p:sp>
-      <p:pic>
-        <p:nvPicPr>
-          <p:cNvPr id="5" name="Picture 4" descr="clusters_bn.png"/>
-          <p:cNvPicPr>
-            <a:picLocks noChangeAspect="1"/>
-          </p:cNvPicPr>
-          <p:nvPr/>
-        </p:nvPicPr>
-        <p:blipFill>
-          <a:blip r:embed="rId2"/>
-          <a:stretch>
-            <a:fillRect/>
-          </a:stretch>
-        </p:blipFill>
-        <p:spPr>
-          <a:xfrm>
-            <a:off x="457200" y="2426026"/>
-            <a:ext cx="7040880" cy="2646026"/>
-          </a:xfrm>
-          <a:prstGeom prst="rect">
-            <a:avLst/>
-          </a:prstGeom>
-        </p:spPr>
-      </p:pic>
+              <a:t>Variable target</a:t>
+            </a:r>
+          </a:p>
+        </p:txBody>
+      </p:sp>
+      <p:sp>
+        <p:nvSpPr>
+          <p:cNvPr id="5" name="TextBox 4"/>
+          <p:cNvSpPr txBox="1"/>
+          <p:nvPr/>
+        </p:nvSpPr>
+        <p:spPr>
+          <a:xfrm>
+            <a:off x="548640" y="1828800"/>
+            <a:ext cx="5852160" cy="4206240"/>
+          </a:xfrm>
+          <a:prstGeom prst="rect">
+            <a:avLst/>
+          </a:prstGeom>
+          <a:noFill/>
+        </p:spPr>
+        <p:txBody>
+          <a:bodyPr wrap="square" lIns="45720" rIns="45720" tIns="18288" bIns="18288">
+            <a:spAutoFit/>
+          </a:bodyPr>
+          <a:lstStyle/>
+          <a:p>
+            <a:pPr algn="l">
+              <a:spcBef>
+                <a:spcPts val="0"/>
+              </a:spcBef>
+              <a:spcAft>
+                <a:spcPts val="800"/>
+              </a:spcAft>
+            </a:pPr>
+            <a:r>
+              <a:rPr sz="1600" b="1" i="0">
+                <a:solidFill>
+                  <a:srgbClr val="0A0A0A"/>
+                </a:solidFill>
+                <a:latin typeface="Arial"/>
+              </a:rPr>
+              <a:t>Qué predecimos</a:t>
+            </a:r>
+          </a:p>
+          <a:p>
+            <a:pPr algn="l">
+              <a:spcBef>
+                <a:spcPts val="0"/>
+              </a:spcBef>
+              <a:spcAft>
+                <a:spcPts val="1200"/>
+              </a:spcAft>
+            </a:pPr>
+            <a:r>
+              <a:rPr sz="1450" b="0" i="0">
+                <a:solidFill>
+                  <a:srgbClr val="0A0A0A"/>
+                </a:solidFill>
+                <a:latin typeface="Calibri"/>
+              </a:rPr>
+              <a:t>El salario bruto REAL, no el nominal: deflactado a pesos (por IPC) y a dólares (por US CPI) de mayo 2026. Así un perfil es comparable entre ediciones.</a:t>
+            </a:r>
+          </a:p>
+          <a:p>
+            <a:pPr algn="l">
+              <a:spcBef>
+                <a:spcPts val="0"/>
+              </a:spcBef>
+              <a:spcAft>
+                <a:spcPts val="800"/>
+              </a:spcAft>
+            </a:pPr>
+            <a:r>
+              <a:rPr sz="1600" b="1" i="0">
+                <a:solidFill>
+                  <a:srgbClr val="0A0A0A"/>
+                </a:solidFill>
+                <a:latin typeface="Arial"/>
+              </a:rPr>
+              <a:t>Por qué real y no nominal</a:t>
+            </a:r>
+          </a:p>
+          <a:p>
+            <a:pPr algn="l">
+              <a:spcBef>
+                <a:spcPts val="0"/>
+              </a:spcBef>
+              <a:spcAft>
+                <a:spcPts val="600"/>
+              </a:spcAft>
+            </a:pPr>
+            <a:r>
+              <a:rPr sz="1450" b="0" i="0">
+                <a:solidFill>
+                  <a:srgbClr val="0A0A0A"/>
+                </a:solidFill>
+                <a:latin typeface="Calibri"/>
+              </a:rPr>
+              <a:t>El número nominal creció 10× sólo por inflación: entrenar sobre nominal mezclaría épocas y aprendería el paso del tiempo, no el perfil.</a:t>
+            </a:r>
+          </a:p>
+        </p:txBody>
+      </p:sp>
       <p:sp>
         <p:nvSpPr>
           <p:cNvPr id="6" name="Rounded Rectangle 5"/>
@@ -6480,8 +6359,8 @@
         </p:nvSpPr>
         <p:spPr>
           <a:xfrm>
-            <a:off x="7772400" y="1828800"/>
-            <a:ext cx="3931920" cy="4114800"/>
+            <a:off x="6766560" y="1828800"/>
+            <a:ext cx="4846320" cy="4114800"/>
           </a:xfrm>
           <a:prstGeom prst="roundRect">
             <a:avLst/>
@@ -6524,8 +6403,8 @@
         </p:nvSpPr>
         <p:spPr>
           <a:xfrm>
-            <a:off x="8001000" y="2057400"/>
-            <a:ext cx="3474720" cy="3749039"/>
+            <a:off x="7086600" y="2286000"/>
+            <a:ext cx="4206240" cy="3291840"/>
           </a:xfrm>
           <a:prstGeom prst="rect">
             <a:avLst/>
@@ -6543,154 +6422,112 @@
                 <a:spcPts val="0"/>
               </a:spcBef>
               <a:spcAft>
+                <a:spcPts val="1200"/>
+              </a:spcAft>
+            </a:pPr>
+            <a:r>
+              <a:rPr sz="1300" b="1" i="0">
+                <a:solidFill>
+                  <a:srgbClr val="E6FF00"/>
+                </a:solidFill>
+                <a:latin typeface="Arial"/>
+              </a:rPr>
+              <a:t>DOS UNIDADES</a:t>
+            </a:r>
+          </a:p>
+          <a:p>
+            <a:pPr algn="l">
+              <a:spcBef>
+                <a:spcPts val="0"/>
+              </a:spcBef>
+              <a:spcAft>
+                <a:spcPts val="200"/>
+              </a:spcAft>
+            </a:pPr>
+            <a:r>
+              <a:rPr sz="1700" b="1" i="0">
+                <a:solidFill>
+                  <a:srgbClr val="FFFFFF"/>
+                </a:solidFill>
+                <a:latin typeface="Arial"/>
+              </a:rPr>
+              <a:t>salario_real_ars</a:t>
+            </a:r>
+          </a:p>
+          <a:p>
+            <a:pPr algn="l">
+              <a:spcBef>
+                <a:spcPts val="0"/>
+              </a:spcBef>
+              <a:spcAft>
+                <a:spcPts val="1400"/>
+              </a:spcAft>
+            </a:pPr>
+            <a:r>
+              <a:rPr sz="1200" b="0" i="0">
+                <a:solidFill>
+                  <a:srgbClr val="8C8C8C"/>
+                </a:solidFill>
+                <a:latin typeface="Calibri"/>
+              </a:rPr>
+              <a:t>pesos constantes may-2026</a:t>
+            </a:r>
+          </a:p>
+          <a:p>
+            <a:pPr algn="l">
+              <a:spcBef>
+                <a:spcPts val="0"/>
+              </a:spcBef>
+              <a:spcAft>
+                <a:spcPts val="200"/>
+              </a:spcAft>
+            </a:pPr>
+            <a:r>
+              <a:rPr sz="1700" b="1" i="0">
+                <a:solidFill>
+                  <a:srgbClr val="FFFFFF"/>
+                </a:solidFill>
+                <a:latin typeface="Arial"/>
+              </a:rPr>
+              <a:t>salario_real_usd</a:t>
+            </a:r>
+          </a:p>
+          <a:p>
+            <a:pPr algn="l">
+              <a:spcBef>
+                <a:spcPts val="0"/>
+              </a:spcBef>
+              <a:spcAft>
                 <a:spcPts val="1000"/>
               </a:spcAft>
             </a:pPr>
             <a:r>
-              <a:rPr sz="1400" b="1" i="0">
+              <a:rPr sz="1200" b="0" i="0">
+                <a:solidFill>
+                  <a:srgbClr val="8C8C8C"/>
+                </a:solidFill>
+                <a:latin typeface="Calibri"/>
+              </a:rPr>
+              <a:t>dólares constantes may-2026</a:t>
+            </a:r>
+          </a:p>
+          <a:p>
+            <a:pPr algn="l">
+              <a:spcBef>
+                <a:spcPts val="0"/>
+              </a:spcBef>
+              <a:spcAft>
+                <a:spcPts val="600"/>
+              </a:spcAft>
+            </a:pPr>
+            <a:r>
+              <a:rPr sz="1250" b="0" i="1">
                 <a:solidFill>
                   <a:srgbClr val="E6FF00"/>
                 </a:solidFill>
-                <a:latin typeface="Arial"/>
-              </a:rPr>
-              <a:t>4 ARQUETIPOS</a:t>
-            </a:r>
-          </a:p>
-          <a:p>
-            <a:pPr algn="l">
-              <a:spcBef>
-                <a:spcPts val="0"/>
-              </a:spcBef>
-              <a:spcAft>
-                <a:spcPts val="1000"/>
-              </a:spcAft>
-            </a:pPr>
-            <a:r>
-              <a:rPr sz="1300" b="0" i="0">
-                <a:solidFill>
-                  <a:srgbClr val="FFFFFF"/>
-                </a:solidFill>
                 <a:latin typeface="Calibri"/>
               </a:rPr>
-              <a:t>—  Junior remoto (49%) — $2,75M</a:t>
-            </a:r>
-          </a:p>
-          <a:p>
-            <a:pPr algn="l">
-              <a:spcBef>
-                <a:spcPts val="0"/>
-              </a:spcBef>
-              <a:spcAft>
-                <a:spcPts val="1000"/>
-              </a:spcAft>
-            </a:pPr>
-            <a:r>
-              <a:rPr sz="1300" b="0" i="0">
-                <a:solidFill>
-                  <a:srgbClr val="FFFFFF"/>
-                </a:solidFill>
-                <a:latin typeface="Calibri"/>
-              </a:rPr>
-              <a:t>—  Semi-senior dolarizado (21%) — $2,81M</a:t>
-            </a:r>
-          </a:p>
-          <a:p>
-            <a:pPr algn="l">
-              <a:spcBef>
-                <a:spcPts val="0"/>
-              </a:spcBef>
-              <a:spcAft>
-                <a:spcPts val="1000"/>
-              </a:spcAft>
-            </a:pPr>
-            <a:r>
-              <a:rPr sz="1300" b="0" i="0">
-                <a:solidFill>
-                  <a:srgbClr val="FFFFFF"/>
-                </a:solidFill>
-                <a:latin typeface="Calibri"/>
-              </a:rPr>
-              <a:t>—  Senior remoto (21%) — $4,43M · el mejor pago</a:t>
-            </a:r>
-          </a:p>
-          <a:p>
-            <a:pPr algn="l">
-              <a:spcBef>
-                <a:spcPts val="0"/>
-              </a:spcBef>
-              <a:spcAft>
-                <a:spcPts val="1000"/>
-              </a:spcAft>
-            </a:pPr>
-            <a:r>
-              <a:rPr sz="1300" b="0" i="0">
-                <a:solidFill>
-                  <a:srgbClr val="FFFFFF"/>
-                </a:solidFill>
-                <a:latin typeface="Calibri"/>
-              </a:rPr>
-              <a:t>—  Senior +15 corporativo estable (9%) — $4,01M</a:t>
-            </a:r>
-          </a:p>
-          <a:p>
-            <a:pPr algn="l">
-              <a:spcBef>
-                <a:spcPts val="0"/>
-              </a:spcBef>
-              <a:spcAft>
-                <a:spcPts val="600"/>
-              </a:spcAft>
-            </a:pPr>
-            <a:r>
-              <a:rPr sz="1250" b="0" i="1">
-                <a:solidFill>
-                  <a:srgbClr val="E6FF00"/>
-                </a:solidFill>
-                <a:latin typeface="Calibri"/>
-              </a:rPr>
-              <a:t>k=4 elegido con codo + silueta.</a:t>
-            </a:r>
-          </a:p>
-        </p:txBody>
-      </p:sp>
-      <p:sp>
-        <p:nvSpPr>
-          <p:cNvPr id="8" name="TextBox 7"/>
-          <p:cNvSpPr txBox="1"/>
-          <p:nvPr/>
-        </p:nvSpPr>
-        <p:spPr>
-          <a:xfrm>
-            <a:off x="457200" y="5897880"/>
-            <a:ext cx="7223760" cy="822960"/>
-          </a:xfrm>
-          <a:prstGeom prst="rect">
-            <a:avLst/>
-          </a:prstGeom>
-          <a:noFill/>
-        </p:spPr>
-        <p:txBody>
-          <a:bodyPr wrap="square" lIns="45720" rIns="45720" tIns="18288" bIns="18288">
-            <a:spAutoFit/>
-          </a:bodyPr>
-          <a:lstStyle/>
-          <a:p>
-            <a:pPr algn="l">
-              <a:spcBef>
-                <a:spcPts val="0"/>
-              </a:spcBef>
-              <a:spcAft>
-                <a:spcPts val="600"/>
-              </a:spcAft>
-            </a:pPr>
-            <a:r>
-              <a:rPr sz="1000" b="0" i="1">
-                <a:solidFill>
-                  <a:srgbClr val="8C8C8C"/>
-                </a:solidFill>
-                <a:latin typeface="Calibri"/>
-              </a:rPr>
-              <a:t>Nota: K-Means asigna cada punto a su centroide más cercano (verificado al 100%). Se ven solapados por la proyección 2D (muestra el 62% de la info) y porque los perfiles son un continuo — no por error del modelo.</a:t>
+              <a:t>Difieren en una constante → mismo R².</a:t>
             </a:r>
           </a:p>
         </p:txBody>
@@ -6800,7 +6637,7 @@
                 </a:solidFill>
                 <a:latin typeface="Arial"/>
               </a:rPr>
-              <a:t>DIFICULTADES CON EL DATASET</a:t>
+              <a:t>COMPARACIÓN DE MODELOS</a:t>
             </a:r>
           </a:p>
         </p:txBody>
@@ -6842,27 +6679,51 @@
                 </a:solidFill>
                 <a:latin typeface="Arial"/>
               </a:rPr>
-              <a:t>Problemas y cómo se resolvieron</a:t>
-            </a:r>
-          </a:p>
-        </p:txBody>
-      </p:sp>
-      <p:sp>
-        <p:nvSpPr>
-          <p:cNvPr id="5" name="Rectangle 4"/>
+              <a:t>Cinco técnicas comparadas</a:t>
+            </a:r>
+          </a:p>
+        </p:txBody>
+      </p:sp>
+      <p:pic>
+        <p:nvPicPr>
+          <p:cNvPr id="5" name="Picture 4" descr="modelos_bn.png"/>
+          <p:cNvPicPr>
+            <a:picLocks noChangeAspect="1"/>
+          </p:cNvPicPr>
+          <p:nvPr/>
+        </p:nvPicPr>
+        <p:blipFill>
+          <a:blip r:embed="rId2"/>
+          <a:stretch>
+            <a:fillRect/>
+          </a:stretch>
+        </p:blipFill>
+        <p:spPr>
+          <a:xfrm>
+            <a:off x="457200" y="2229381"/>
+            <a:ext cx="7315200" cy="3130757"/>
+          </a:xfrm>
+          <a:prstGeom prst="rect">
+            <a:avLst/>
+          </a:prstGeom>
+        </p:spPr>
+      </p:pic>
+      <p:sp>
+        <p:nvSpPr>
+          <p:cNvPr id="6" name="Rounded Rectangle 5"/>
           <p:cNvSpPr/>
           <p:nvPr/>
         </p:nvSpPr>
         <p:spPr>
           <a:xfrm>
-            <a:off x="640080" y="1828800"/>
-            <a:ext cx="457200" cy="457200"/>
-          </a:xfrm>
-          <a:prstGeom prst="rect">
+            <a:off x="7955279" y="1828800"/>
+            <a:ext cx="3749039" cy="4114800"/>
+          </a:xfrm>
+          <a:prstGeom prst="roundRect">
             <a:avLst/>
           </a:prstGeom>
           <a:solidFill>
-            <a:srgbClr val="0A0A0A"/>
+            <a:srgbClr val="EDEDED"/>
           </a:solidFill>
           <a:ln>
             <a:noFill/>
@@ -6893,14 +6754,14 @@
       </p:sp>
       <p:sp>
         <p:nvSpPr>
-          <p:cNvPr id="6" name="TextBox 5"/>
+          <p:cNvPr id="7" name="TextBox 6"/>
           <p:cNvSpPr txBox="1"/>
           <p:nvPr/>
         </p:nvSpPr>
         <p:spPr>
           <a:xfrm>
-            <a:off x="640080" y="1865376"/>
-            <a:ext cx="457200" cy="411480"/>
+            <a:off x="8183879" y="2057400"/>
+            <a:ext cx="3291840" cy="3749039"/>
           </a:xfrm>
           <a:prstGeom prst="rect">
             <a:avLst/>
@@ -6913,64 +6774,41 @@
           </a:bodyPr>
           <a:lstStyle/>
           <a:p>
-            <a:pPr algn="ctr">
-              <a:spcBef>
-                <a:spcPts val="0"/>
-              </a:spcBef>
-              <a:spcAft>
-                <a:spcPts val="0"/>
-              </a:spcAft>
-            </a:pPr>
-            <a:r>
-              <a:rPr sz="1800" b="1" i="0">
-                <a:solidFill>
-                  <a:srgbClr val="E6FF00"/>
+            <a:pPr algn="l">
+              <a:spcBef>
+                <a:spcPts val="0"/>
+              </a:spcBef>
+              <a:spcAft>
+                <a:spcPts val="800"/>
+              </a:spcAft>
+            </a:pPr>
+            <a:r>
+              <a:rPr sz="1250" b="1" i="0">
+                <a:solidFill>
+                  <a:srgbClr val="0A0A0A"/>
                 </a:solidFill>
                 <a:latin typeface="Arial"/>
               </a:rPr>
-              <a:t>!</a:t>
-            </a:r>
-          </a:p>
-        </p:txBody>
-      </p:sp>
-      <p:sp>
-        <p:nvSpPr>
-          <p:cNvPr id="7" name="TextBox 6"/>
-          <p:cNvSpPr txBox="1"/>
-          <p:nvPr/>
-        </p:nvSpPr>
-        <p:spPr>
-          <a:xfrm>
-            <a:off x="1280160" y="1801368"/>
-            <a:ext cx="10332720" cy="868680"/>
-          </a:xfrm>
-          <a:prstGeom prst="rect">
-            <a:avLst/>
-          </a:prstGeom>
-          <a:noFill/>
-        </p:spPr>
-        <p:txBody>
-          <a:bodyPr wrap="square" lIns="45720" rIns="45720" tIns="18288" bIns="18288">
-            <a:spAutoFit/>
-          </a:bodyPr>
-          <a:lstStyle/>
-          <a:p>
-            <a:pPr algn="l">
-              <a:spcBef>
-                <a:spcPts val="0"/>
-              </a:spcBef>
-              <a:spcAft>
-                <a:spcPts val="200"/>
-              </a:spcAft>
-            </a:pPr>
-            <a:r>
-              <a:rPr sz="1450" b="1" i="0">
+              <a:t>VALIDACIÓN TEMPORAL</a:t>
+            </a:r>
+          </a:p>
+          <a:p>
+            <a:pPr algn="l">
+              <a:spcBef>
+                <a:spcPts val="0"/>
+              </a:spcBef>
+              <a:spcAft>
+                <a:spcPts val="1000"/>
+              </a:spcAft>
+            </a:pPr>
+            <a:r>
+              <a:rPr sz="1250" b="0" i="0">
                 <a:solidFill>
                   <a:srgbClr val="0A0A0A"/>
                 </a:solidFill>
-                <a:latin typeface="Arial"/>
-              </a:rPr>
-              <a:t>Comparar a través de 10× de inflación</a:t>
+                <a:latin typeface="Calibri"/>
+              </a:rPr>
+              <a:t>Train = ediciones previas. Test = última encuesta 2025.2 (nunca vista).</a:t>
             </a:r>
           </a:p>
           <a:p>
@@ -6989,595 +6827,83 @@
                 </a:solidFill>
                 <a:latin typeface="Calibri"/>
               </a:rPr>
-              <a:t>deflación por IPC y, en USD, por inflación de EE.UU.</a:t>
-            </a:r>
-          </a:p>
-        </p:txBody>
-      </p:sp>
-      <p:sp>
-        <p:nvSpPr>
-          <p:cNvPr id="8" name="Rectangle 7"/>
-          <p:cNvSpPr/>
-          <p:nvPr/>
-        </p:nvSpPr>
-        <p:spPr>
-          <a:xfrm>
-            <a:off x="640080" y="2724912"/>
-            <a:ext cx="457200" cy="457200"/>
-          </a:xfrm>
-          <a:prstGeom prst="rect">
-            <a:avLst/>
-          </a:prstGeom>
-          <a:solidFill>
-            <a:srgbClr val="0A0A0A"/>
-          </a:solidFill>
-          <a:ln>
-            <a:noFill/>
-          </a:ln>
-          <a:effectLst/>
-        </p:spPr>
-        <p:style>
-          <a:lnRef idx="1">
-            <a:schemeClr val="accent1"/>
-          </a:lnRef>
-          <a:fillRef idx="3">
-            <a:schemeClr val="accent1"/>
-          </a:fillRef>
-          <a:effectRef idx="2">
-            <a:schemeClr val="accent1"/>
-          </a:effectRef>
-          <a:fontRef idx="minor">
-            <a:schemeClr val="lt1"/>
-          </a:fontRef>
-        </p:style>
-        <p:txBody>
-          <a:bodyPr rtlCol="0" anchor="ctr"/>
-          <a:lstStyle/>
-          <a:p>
-            <a:pPr algn="ctr"/>
-          </a:p>
-        </p:txBody>
-      </p:sp>
-      <p:sp>
-        <p:nvSpPr>
-          <p:cNvPr id="9" name="TextBox 8"/>
-          <p:cNvSpPr txBox="1"/>
-          <p:nvPr/>
-        </p:nvSpPr>
-        <p:spPr>
-          <a:xfrm>
-            <a:off x="640080" y="2761488"/>
-            <a:ext cx="457200" cy="411480"/>
-          </a:xfrm>
-          <a:prstGeom prst="rect">
-            <a:avLst/>
-          </a:prstGeom>
-          <a:noFill/>
-        </p:spPr>
-        <p:txBody>
-          <a:bodyPr wrap="square" lIns="45720" rIns="45720" tIns="18288" bIns="18288">
-            <a:spAutoFit/>
-          </a:bodyPr>
-          <a:lstStyle/>
-          <a:p>
-            <a:pPr algn="ctr">
-              <a:spcBef>
-                <a:spcPts val="0"/>
-              </a:spcBef>
-              <a:spcAft>
-                <a:spcPts val="0"/>
-              </a:spcAft>
-            </a:pPr>
-            <a:r>
-              <a:rPr sz="1800" b="1" i="0">
-                <a:solidFill>
-                  <a:srgbClr val="E6FF00"/>
-                </a:solidFill>
-                <a:latin typeface="Arial"/>
-              </a:rPr>
-              <a:t>!</a:t>
-            </a:r>
-          </a:p>
-        </p:txBody>
-      </p:sp>
-      <p:sp>
-        <p:nvSpPr>
-          <p:cNvPr id="10" name="TextBox 9"/>
-          <p:cNvSpPr txBox="1"/>
-          <p:nvPr/>
-        </p:nvSpPr>
-        <p:spPr>
-          <a:xfrm>
-            <a:off x="1280160" y="2697480"/>
-            <a:ext cx="10332720" cy="868680"/>
-          </a:xfrm>
-          <a:prstGeom prst="rect">
-            <a:avLst/>
-          </a:prstGeom>
-          <a:noFill/>
-        </p:spPr>
-        <p:txBody>
-          <a:bodyPr wrap="square" lIns="45720" rIns="45720" tIns="18288" bIns="18288">
-            <a:spAutoFit/>
-          </a:bodyPr>
-          <a:lstStyle/>
-          <a:p>
-            <a:pPr algn="l">
-              <a:spcBef>
-                <a:spcPts val="0"/>
-              </a:spcBef>
-              <a:spcAft>
-                <a:spcPts val="200"/>
-              </a:spcAft>
-            </a:pPr>
-            <a:r>
-              <a:rPr sz="1450" b="1" i="0">
+              <a:t>—  Lineal simple: 0.13</a:t>
+            </a:r>
+          </a:p>
+          <a:p>
+            <a:pPr algn="l">
+              <a:spcBef>
+                <a:spcPts val="0"/>
+              </a:spcBef>
+              <a:spcAft>
+                <a:spcPts val="600"/>
+              </a:spcAft>
+            </a:pPr>
+            <a:r>
+              <a:rPr sz="1250" b="0" i="0">
+                <a:solidFill>
+                  <a:srgbClr val="8C8C8C"/>
+                </a:solidFill>
+                <a:latin typeface="Calibri"/>
+              </a:rPr>
+              <a:t>—  Lineal múltiple: 0.22</a:t>
+            </a:r>
+          </a:p>
+          <a:p>
+            <a:pPr algn="l">
+              <a:spcBef>
+                <a:spcPts val="0"/>
+              </a:spcBef>
+              <a:spcAft>
+                <a:spcPts val="600"/>
+              </a:spcAft>
+            </a:pPr>
+            <a:r>
+              <a:rPr sz="1250" b="0" i="0">
+                <a:solidFill>
+                  <a:srgbClr val="8C8C8C"/>
+                </a:solidFill>
+                <a:latin typeface="Calibri"/>
+              </a:rPr>
+              <a:t>—  Árbol: 0.20</a:t>
+            </a:r>
+          </a:p>
+          <a:p>
+            <a:pPr algn="l">
+              <a:spcBef>
+                <a:spcPts val="0"/>
+              </a:spcBef>
+              <a:spcAft>
+                <a:spcPts val="600"/>
+              </a:spcAft>
+            </a:pPr>
+            <a:r>
+              <a:rPr sz="1250" b="0" i="0">
+                <a:solidFill>
+                  <a:srgbClr val="8C8C8C"/>
+                </a:solidFill>
+                <a:latin typeface="Calibri"/>
+              </a:rPr>
+              <a:t>—  Polinómica: 0.28</a:t>
+            </a:r>
+          </a:p>
+          <a:p>
+            <a:pPr algn="l">
+              <a:spcBef>
+                <a:spcPts val="0"/>
+              </a:spcBef>
+              <a:spcAft>
+                <a:spcPts val="600"/>
+              </a:spcAft>
+            </a:pPr>
+            <a:r>
+              <a:rPr sz="1350" b="1" i="0">
                 <a:solidFill>
                   <a:srgbClr val="0A0A0A"/>
                 </a:solidFill>
-                <a:latin typeface="Arial"/>
-              </a:rPr>
-              <a:t>Ajuste según la moneda nativa</a:t>
-            </a:r>
-          </a:p>
-          <a:p>
-            <a:pPr algn="l">
-              <a:spcBef>
-                <a:spcPts val="0"/>
-              </a:spcBef>
-              <a:spcAft>
-                <a:spcPts val="600"/>
-              </a:spcAft>
-            </a:pPr>
-            <a:r>
-              <a:rPr sz="1250" b="0" i="0">
-                <a:solidFill>
-                  <a:srgbClr val="8C8C8C"/>
-                </a:solidFill>
                 <a:latin typeface="Calibri"/>
               </a:rPr>
-              <a:t>un sueldo dolarizado se ajusta por inflación de su país, no la local.</a:t>
-            </a:r>
-          </a:p>
-        </p:txBody>
-      </p:sp>
-      <p:sp>
-        <p:nvSpPr>
-          <p:cNvPr id="11" name="Rectangle 10"/>
-          <p:cNvSpPr/>
-          <p:nvPr/>
-        </p:nvSpPr>
-        <p:spPr>
-          <a:xfrm>
-            <a:off x="640080" y="3621024"/>
-            <a:ext cx="457200" cy="457200"/>
-          </a:xfrm>
-          <a:prstGeom prst="rect">
-            <a:avLst/>
-          </a:prstGeom>
-          <a:solidFill>
-            <a:srgbClr val="0A0A0A"/>
-          </a:solidFill>
-          <a:ln>
-            <a:noFill/>
-          </a:ln>
-          <a:effectLst/>
-        </p:spPr>
-        <p:style>
-          <a:lnRef idx="1">
-            <a:schemeClr val="accent1"/>
-          </a:lnRef>
-          <a:fillRef idx="3">
-            <a:schemeClr val="accent1"/>
-          </a:fillRef>
-          <a:effectRef idx="2">
-            <a:schemeClr val="accent1"/>
-          </a:effectRef>
-          <a:fontRef idx="minor">
-            <a:schemeClr val="lt1"/>
-          </a:fontRef>
-        </p:style>
-        <p:txBody>
-          <a:bodyPr rtlCol="0" anchor="ctr"/>
-          <a:lstStyle/>
-          <a:p>
-            <a:pPr algn="ctr"/>
-          </a:p>
-        </p:txBody>
-      </p:sp>
-      <p:sp>
-        <p:nvSpPr>
-          <p:cNvPr id="12" name="TextBox 11"/>
-          <p:cNvSpPr txBox="1"/>
-          <p:nvPr/>
-        </p:nvSpPr>
-        <p:spPr>
-          <a:xfrm>
-            <a:off x="640080" y="3657600"/>
-            <a:ext cx="457200" cy="411480"/>
-          </a:xfrm>
-          <a:prstGeom prst="rect">
-            <a:avLst/>
-          </a:prstGeom>
-          <a:noFill/>
-        </p:spPr>
-        <p:txBody>
-          <a:bodyPr wrap="square" lIns="45720" rIns="45720" tIns="18288" bIns="18288">
-            <a:spAutoFit/>
-          </a:bodyPr>
-          <a:lstStyle/>
-          <a:p>
-            <a:pPr algn="ctr">
-              <a:spcBef>
-                <a:spcPts val="0"/>
-              </a:spcBef>
-              <a:spcAft>
-                <a:spcPts val="0"/>
-              </a:spcAft>
-            </a:pPr>
-            <a:r>
-              <a:rPr sz="1800" b="1" i="0">
-                <a:solidFill>
-                  <a:srgbClr val="E6FF00"/>
-                </a:solidFill>
-                <a:latin typeface="Arial"/>
-              </a:rPr>
-              <a:t>!</a:t>
-            </a:r>
-          </a:p>
-        </p:txBody>
-      </p:sp>
-      <p:sp>
-        <p:nvSpPr>
-          <p:cNvPr id="13" name="TextBox 12"/>
-          <p:cNvSpPr txBox="1"/>
-          <p:nvPr/>
-        </p:nvSpPr>
-        <p:spPr>
-          <a:xfrm>
-            <a:off x="1280160" y="3593592"/>
-            <a:ext cx="10332720" cy="868680"/>
-          </a:xfrm>
-          <a:prstGeom prst="rect">
-            <a:avLst/>
-          </a:prstGeom>
-          <a:noFill/>
-        </p:spPr>
-        <p:txBody>
-          <a:bodyPr wrap="square" lIns="45720" rIns="45720" tIns="18288" bIns="18288">
-            <a:spAutoFit/>
-          </a:bodyPr>
-          <a:lstStyle/>
-          <a:p>
-            <a:pPr algn="l">
-              <a:spcBef>
-                <a:spcPts val="0"/>
-              </a:spcBef>
-              <a:spcAft>
-                <a:spcPts val="200"/>
-              </a:spcAft>
-            </a:pPr>
-            <a:r>
-              <a:rPr sz="1450" b="1" i="0">
-                <a:solidFill>
-                  <a:srgbClr val="0A0A0A"/>
-                </a:solidFill>
-                <a:latin typeface="Arial"/>
-              </a:rPr>
-              <a:t>Seniority inferido en ediciones viejas</a:t>
-            </a:r>
-          </a:p>
-          <a:p>
-            <a:pPr algn="l">
-              <a:spcBef>
-                <a:spcPts val="0"/>
-              </a:spcBef>
-              <a:spcAft>
-                <a:spcPts val="600"/>
-              </a:spcAft>
-            </a:pPr>
-            <a:r>
-              <a:rPr sz="1250" b="0" i="0">
-                <a:solidFill>
-                  <a:srgbClr val="8C8C8C"/>
-                </a:solidFill>
-                <a:latin typeface="Calibri"/>
-              </a:rPr>
-              <a:t>generaba multicolinealidad → se excluyó sin perder R².</a:t>
-            </a:r>
-          </a:p>
-        </p:txBody>
-      </p:sp>
-      <p:sp>
-        <p:nvSpPr>
-          <p:cNvPr id="14" name="Rectangle 13"/>
-          <p:cNvSpPr/>
-          <p:nvPr/>
-        </p:nvSpPr>
-        <p:spPr>
-          <a:xfrm>
-            <a:off x="640080" y="4517136"/>
-            <a:ext cx="457200" cy="457200"/>
-          </a:xfrm>
-          <a:prstGeom prst="rect">
-            <a:avLst/>
-          </a:prstGeom>
-          <a:solidFill>
-            <a:srgbClr val="0A0A0A"/>
-          </a:solidFill>
-          <a:ln>
-            <a:noFill/>
-          </a:ln>
-          <a:effectLst/>
-        </p:spPr>
-        <p:style>
-          <a:lnRef idx="1">
-            <a:schemeClr val="accent1"/>
-          </a:lnRef>
-          <a:fillRef idx="3">
-            <a:schemeClr val="accent1"/>
-          </a:fillRef>
-          <a:effectRef idx="2">
-            <a:schemeClr val="accent1"/>
-          </a:effectRef>
-          <a:fontRef idx="minor">
-            <a:schemeClr val="lt1"/>
-          </a:fontRef>
-        </p:style>
-        <p:txBody>
-          <a:bodyPr rtlCol="0" anchor="ctr"/>
-          <a:lstStyle/>
-          <a:p>
-            <a:pPr algn="ctr"/>
-          </a:p>
-        </p:txBody>
-      </p:sp>
-      <p:sp>
-        <p:nvSpPr>
-          <p:cNvPr id="15" name="TextBox 14"/>
-          <p:cNvSpPr txBox="1"/>
-          <p:nvPr/>
-        </p:nvSpPr>
-        <p:spPr>
-          <a:xfrm>
-            <a:off x="640080" y="4553712"/>
-            <a:ext cx="457200" cy="411480"/>
-          </a:xfrm>
-          <a:prstGeom prst="rect">
-            <a:avLst/>
-          </a:prstGeom>
-          <a:noFill/>
-        </p:spPr>
-        <p:txBody>
-          <a:bodyPr wrap="square" lIns="45720" rIns="45720" tIns="18288" bIns="18288">
-            <a:spAutoFit/>
-          </a:bodyPr>
-          <a:lstStyle/>
-          <a:p>
-            <a:pPr algn="ctr">
-              <a:spcBef>
-                <a:spcPts val="0"/>
-              </a:spcBef>
-              <a:spcAft>
-                <a:spcPts val="0"/>
-              </a:spcAft>
-            </a:pPr>
-            <a:r>
-              <a:rPr sz="1800" b="1" i="0">
-                <a:solidFill>
-                  <a:srgbClr val="E6FF00"/>
-                </a:solidFill>
-                <a:latin typeface="Arial"/>
-              </a:rPr>
-              <a:t>!</a:t>
-            </a:r>
-          </a:p>
-        </p:txBody>
-      </p:sp>
-      <p:sp>
-        <p:nvSpPr>
-          <p:cNvPr id="16" name="TextBox 15"/>
-          <p:cNvSpPr txBox="1"/>
-          <p:nvPr/>
-        </p:nvSpPr>
-        <p:spPr>
-          <a:xfrm>
-            <a:off x="1280160" y="4489703"/>
-            <a:ext cx="10332720" cy="868680"/>
-          </a:xfrm>
-          <a:prstGeom prst="rect">
-            <a:avLst/>
-          </a:prstGeom>
-          <a:noFill/>
-        </p:spPr>
-        <p:txBody>
-          <a:bodyPr wrap="square" lIns="45720" rIns="45720" tIns="18288" bIns="18288">
-            <a:spAutoFit/>
-          </a:bodyPr>
-          <a:lstStyle/>
-          <a:p>
-            <a:pPr algn="l">
-              <a:spcBef>
-                <a:spcPts val="0"/>
-              </a:spcBef>
-              <a:spcAft>
-                <a:spcPts val="200"/>
-              </a:spcAft>
-            </a:pPr>
-            <a:r>
-              <a:rPr sz="1450" b="1" i="0">
-                <a:solidFill>
-                  <a:srgbClr val="0A0A0A"/>
-                </a:solidFill>
-                <a:latin typeface="Arial"/>
-              </a:rPr>
-              <a:t>Validación realista</a:t>
-            </a:r>
-          </a:p>
-          <a:p>
-            <a:pPr algn="l">
-              <a:spcBef>
-                <a:spcPts val="0"/>
-              </a:spcBef>
-              <a:spcAft>
-                <a:spcPts val="600"/>
-              </a:spcAft>
-            </a:pPr>
-            <a:r>
-              <a:rPr sz="1250" b="0" i="0">
-                <a:solidFill>
-                  <a:srgbClr val="8C8C8C"/>
-                </a:solidFill>
-                <a:latin typeface="Calibri"/>
-              </a:rPr>
-              <a:t>split temporal (no aleatorio) para simular el uso real.</a:t>
-            </a:r>
-          </a:p>
-        </p:txBody>
-      </p:sp>
-      <p:sp>
-        <p:nvSpPr>
-          <p:cNvPr id="17" name="Rectangle 16"/>
-          <p:cNvSpPr/>
-          <p:nvPr/>
-        </p:nvSpPr>
-        <p:spPr>
-          <a:xfrm>
-            <a:off x="640080" y="5413248"/>
-            <a:ext cx="457200" cy="457200"/>
-          </a:xfrm>
-          <a:prstGeom prst="rect">
-            <a:avLst/>
-          </a:prstGeom>
-          <a:solidFill>
-            <a:srgbClr val="0A0A0A"/>
-          </a:solidFill>
-          <a:ln>
-            <a:noFill/>
-          </a:ln>
-          <a:effectLst/>
-        </p:spPr>
-        <p:style>
-          <a:lnRef idx="1">
-            <a:schemeClr val="accent1"/>
-          </a:lnRef>
-          <a:fillRef idx="3">
-            <a:schemeClr val="accent1"/>
-          </a:fillRef>
-          <a:effectRef idx="2">
-            <a:schemeClr val="accent1"/>
-          </a:effectRef>
-          <a:fontRef idx="minor">
-            <a:schemeClr val="lt1"/>
-          </a:fontRef>
-        </p:style>
-        <p:txBody>
-          <a:bodyPr rtlCol="0" anchor="ctr"/>
-          <a:lstStyle/>
-          <a:p>
-            <a:pPr algn="ctr"/>
-          </a:p>
-        </p:txBody>
-      </p:sp>
-      <p:sp>
-        <p:nvSpPr>
-          <p:cNvPr id="18" name="TextBox 17"/>
-          <p:cNvSpPr txBox="1"/>
-          <p:nvPr/>
-        </p:nvSpPr>
-        <p:spPr>
-          <a:xfrm>
-            <a:off x="640080" y="5449824"/>
-            <a:ext cx="457200" cy="411480"/>
-          </a:xfrm>
-          <a:prstGeom prst="rect">
-            <a:avLst/>
-          </a:prstGeom>
-          <a:noFill/>
-        </p:spPr>
-        <p:txBody>
-          <a:bodyPr wrap="square" lIns="45720" rIns="45720" tIns="18288" bIns="18288">
-            <a:spAutoFit/>
-          </a:bodyPr>
-          <a:lstStyle/>
-          <a:p>
-            <a:pPr algn="ctr">
-              <a:spcBef>
-                <a:spcPts val="0"/>
-              </a:spcBef>
-              <a:spcAft>
-                <a:spcPts val="0"/>
-              </a:spcAft>
-            </a:pPr>
-            <a:r>
-              <a:rPr sz="1800" b="1" i="0">
-                <a:solidFill>
-                  <a:srgbClr val="E6FF00"/>
-                </a:solidFill>
-                <a:latin typeface="Arial"/>
-              </a:rPr>
-              <a:t>!</a:t>
-            </a:r>
-          </a:p>
-        </p:txBody>
-      </p:sp>
-      <p:sp>
-        <p:nvSpPr>
-          <p:cNvPr id="19" name="TextBox 18"/>
-          <p:cNvSpPr txBox="1"/>
-          <p:nvPr/>
-        </p:nvSpPr>
-        <p:spPr>
-          <a:xfrm>
-            <a:off x="1280160" y="5385816"/>
-            <a:ext cx="10332720" cy="868680"/>
-          </a:xfrm>
-          <a:prstGeom prst="rect">
-            <a:avLst/>
-          </a:prstGeom>
-          <a:noFill/>
-        </p:spPr>
-        <p:txBody>
-          <a:bodyPr wrap="square" lIns="45720" rIns="45720" tIns="18288" bIns="18288">
-            <a:spAutoFit/>
-          </a:bodyPr>
-          <a:lstStyle/>
-          <a:p>
-            <a:pPr algn="l">
-              <a:spcBef>
-                <a:spcPts val="0"/>
-              </a:spcBef>
-              <a:spcAft>
-                <a:spcPts val="200"/>
-              </a:spcAft>
-            </a:pPr>
-            <a:r>
-              <a:rPr sz="1450" b="1" i="0">
-                <a:solidFill>
-                  <a:srgbClr val="0A0A0A"/>
-                </a:solidFill>
-                <a:latin typeface="Arial"/>
-              </a:rPr>
-              <a:t>Ruido de las tecnologías</a:t>
-            </a:r>
-          </a:p>
-          <a:p>
-            <a:pPr algn="l">
-              <a:spcBef>
-                <a:spcPts val="0"/>
-              </a:spcBef>
-              <a:spcAft>
-                <a:spcPts val="600"/>
-              </a:spcAft>
-            </a:pPr>
-            <a:r>
-              <a:rPr sz="1250" b="0" i="0">
-                <a:solidFill>
-                  <a:srgbClr val="8C8C8C"/>
-                </a:solidFill>
-                <a:latin typeface="Calibri"/>
-              </a:rPr>
-              <a:t>sacadas del modelo (su premium era proxy del contexto); roles agrupados en top-15.</a:t>
+              <a:t>—  Random Forest: 0.27 (elegido)</a:t>
             </a:r>
           </a:p>
         </p:txBody>
@@ -7615,164 +6941,6 @@
             <a:avLst/>
           </a:prstGeom>
           <a:solidFill>
-            <a:srgbClr val="FFFFFF"/>
-          </a:solidFill>
-          <a:ln>
-            <a:noFill/>
-          </a:ln>
-          <a:effectLst/>
-        </p:spPr>
-        <p:style>
-          <a:lnRef idx="1">
-            <a:schemeClr val="accent1"/>
-          </a:lnRef>
-          <a:fillRef idx="3">
-            <a:schemeClr val="accent1"/>
-          </a:fillRef>
-          <a:effectRef idx="2">
-            <a:schemeClr val="accent1"/>
-          </a:effectRef>
-          <a:fontRef idx="minor">
-            <a:schemeClr val="lt1"/>
-          </a:fontRef>
-        </p:style>
-        <p:txBody>
-          <a:bodyPr rtlCol="0" anchor="ctr"/>
-          <a:lstStyle/>
-          <a:p>
-            <a:pPr algn="ctr"/>
-          </a:p>
-        </p:txBody>
-      </p:sp>
-      <p:sp>
-        <p:nvSpPr>
-          <p:cNvPr id="3" name="TextBox 2"/>
-          <p:cNvSpPr txBox="1"/>
-          <p:nvPr/>
-        </p:nvSpPr>
-        <p:spPr>
-          <a:xfrm>
-            <a:off x="548640" y="384048"/>
-            <a:ext cx="10058400" cy="457200"/>
-          </a:xfrm>
-          <a:prstGeom prst="rect">
-            <a:avLst/>
-          </a:prstGeom>
-          <a:noFill/>
-        </p:spPr>
-        <p:txBody>
-          <a:bodyPr wrap="square" lIns="45720" rIns="45720" tIns="18288" bIns="18288">
-            <a:spAutoFit/>
-          </a:bodyPr>
-          <a:lstStyle/>
-          <a:p>
-            <a:pPr>
-              <a:spcAft>
-                <a:spcPts val="0"/>
-              </a:spcAft>
-            </a:pPr>
-            <a:r>
-              <a:rPr sz="1300" b="1">
-                <a:solidFill>
-                  <a:srgbClr val="0A0A0A"/>
-                </a:solidFill>
-                <a:latin typeface="Arial"/>
-              </a:rPr>
-              <a:t>06  ·  </a:t>
-            </a:r>
-            <a:r>
-              <a:rPr sz="1300" b="1">
-                <a:solidFill>
-                  <a:srgbClr val="8C8C8C"/>
-                </a:solidFill>
-                <a:latin typeface="Arial"/>
-              </a:rPr>
-              <a:t>RESULTADOS Y STORYTELLING</a:t>
-            </a:r>
-          </a:p>
-        </p:txBody>
-      </p:sp>
-      <p:sp>
-        <p:nvSpPr>
-          <p:cNvPr id="4" name="TextBox 3"/>
-          <p:cNvSpPr txBox="1"/>
-          <p:nvPr/>
-        </p:nvSpPr>
-        <p:spPr>
-          <a:xfrm>
-            <a:off x="548640" y="868680"/>
-            <a:ext cx="11064240" cy="914400"/>
-          </a:xfrm>
-          <a:prstGeom prst="rect">
-            <a:avLst/>
-          </a:prstGeom>
-          <a:noFill/>
-        </p:spPr>
-        <p:txBody>
-          <a:bodyPr wrap="square" lIns="45720" rIns="45720" tIns="18288" bIns="18288">
-            <a:spAutoFit/>
-          </a:bodyPr>
-          <a:lstStyle/>
-          <a:p>
-            <a:pPr algn="l">
-              <a:spcBef>
-                <a:spcPts val="0"/>
-              </a:spcBef>
-              <a:spcAft>
-                <a:spcPts val="0"/>
-              </a:spcAft>
-            </a:pPr>
-            <a:r>
-              <a:rPr sz="3400" b="1" i="0">
-                <a:solidFill>
-                  <a:srgbClr val="0A0A0A"/>
-                </a:solidFill>
-                <a:latin typeface="Arial"/>
-              </a:rPr>
-              <a:t>Brechas salariales y región</a:t>
-            </a:r>
-          </a:p>
-        </p:txBody>
-      </p:sp>
-      <p:pic>
-        <p:nvPicPr>
-          <p:cNvPr id="5" name="Picture 4" descr="eda_05_geografia.png"/>
-          <p:cNvPicPr>
-            <a:picLocks noChangeAspect="1"/>
-          </p:cNvPicPr>
-          <p:nvPr/>
-        </p:nvPicPr>
-        <p:blipFill>
-          <a:blip r:embed="rId2"/>
-          <a:stretch>
-            <a:fillRect/>
-          </a:stretch>
-        </p:blipFill>
-        <p:spPr>
-          <a:xfrm>
-            <a:off x="1057444" y="1737360"/>
-            <a:ext cx="5566071" cy="4023360"/>
-          </a:xfrm>
-          <a:prstGeom prst="rect">
-            <a:avLst/>
-          </a:prstGeom>
-        </p:spPr>
-      </p:pic>
-      <p:sp>
-        <p:nvSpPr>
-          <p:cNvPr id="6" name="Rounded Rectangle 5"/>
-          <p:cNvSpPr/>
-          <p:nvPr/>
-        </p:nvSpPr>
-        <p:spPr>
-          <a:xfrm>
-            <a:off x="7406640" y="1783080"/>
-            <a:ext cx="4297680" cy="4206240"/>
-          </a:xfrm>
-          <a:prstGeom prst="roundRect">
-            <a:avLst/>
-          </a:prstGeom>
-          <a:solidFill>
             <a:srgbClr val="0A0A0A"/>
           </a:solidFill>
           <a:ln>
@@ -7804,14 +6972,14 @@
       </p:sp>
       <p:sp>
         <p:nvSpPr>
-          <p:cNvPr id="7" name="TextBox 6"/>
+          <p:cNvPr id="3" name="TextBox 2"/>
           <p:cNvSpPr txBox="1"/>
           <p:nvPr/>
         </p:nvSpPr>
         <p:spPr>
           <a:xfrm>
-            <a:off x="7680960" y="2011680"/>
-            <a:ext cx="3749039" cy="3840480"/>
+            <a:off x="548640" y="384048"/>
+            <a:ext cx="10058400" cy="457200"/>
           </a:xfrm>
           <a:prstGeom prst="rect">
             <a:avLst/>
@@ -7824,6 +6992,182 @@
           </a:bodyPr>
           <a:lstStyle/>
           <a:p>
+            <a:pPr>
+              <a:spcAft>
+                <a:spcPts val="0"/>
+              </a:spcAft>
+            </a:pPr>
+            <a:r>
+              <a:rPr sz="1300" b="1">
+                <a:solidFill>
+                  <a:srgbClr val="E6FF00"/>
+                </a:solidFill>
+                <a:latin typeface="Arial"/>
+              </a:rPr>
+              <a:t>05  ·  </a:t>
+            </a:r>
+            <a:r>
+              <a:rPr sz="1300" b="1">
+                <a:solidFill>
+                  <a:srgbClr val="8C8C8C"/>
+                </a:solidFill>
+                <a:latin typeface="Arial"/>
+              </a:rPr>
+              <a:t>RANDOM FOREST</a:t>
+            </a:r>
+          </a:p>
+        </p:txBody>
+      </p:sp>
+      <p:sp>
+        <p:nvSpPr>
+          <p:cNvPr id="4" name="TextBox 3"/>
+          <p:cNvSpPr txBox="1"/>
+          <p:nvPr/>
+        </p:nvSpPr>
+        <p:spPr>
+          <a:xfrm>
+            <a:off x="548640" y="868680"/>
+            <a:ext cx="11064240" cy="914400"/>
+          </a:xfrm>
+          <a:prstGeom prst="rect">
+            <a:avLst/>
+          </a:prstGeom>
+          <a:noFill/>
+        </p:spPr>
+        <p:txBody>
+          <a:bodyPr wrap="square" lIns="45720" rIns="45720" tIns="18288" bIns="18288">
+            <a:spAutoFit/>
+          </a:bodyPr>
+          <a:lstStyle/>
+          <a:p>
+            <a:pPr algn="l">
+              <a:spcBef>
+                <a:spcPts val="0"/>
+              </a:spcBef>
+              <a:spcAft>
+                <a:spcPts val="0"/>
+              </a:spcAft>
+            </a:pPr>
+            <a:r>
+              <a:rPr sz="3400" b="1" i="0">
+                <a:solidFill>
+                  <a:srgbClr val="FFFFFF"/>
+                </a:solidFill>
+                <a:latin typeface="Arial"/>
+              </a:rPr>
+              <a:t>Por qué elegimos Random Forest</a:t>
+            </a:r>
+          </a:p>
+        </p:txBody>
+      </p:sp>
+      <p:sp>
+        <p:nvSpPr>
+          <p:cNvPr id="5" name="Rectangle 4"/>
+          <p:cNvSpPr/>
+          <p:nvPr/>
+        </p:nvSpPr>
+        <p:spPr>
+          <a:xfrm>
+            <a:off x="640080" y="1828800"/>
+            <a:ext cx="502920" cy="502920"/>
+          </a:xfrm>
+          <a:prstGeom prst="rect">
+            <a:avLst/>
+          </a:prstGeom>
+          <a:solidFill>
+            <a:srgbClr val="E6FF00"/>
+          </a:solidFill>
+          <a:ln>
+            <a:noFill/>
+          </a:ln>
+          <a:effectLst/>
+        </p:spPr>
+        <p:style>
+          <a:lnRef idx="1">
+            <a:schemeClr val="accent1"/>
+          </a:lnRef>
+          <a:fillRef idx="3">
+            <a:schemeClr val="accent1"/>
+          </a:fillRef>
+          <a:effectRef idx="2">
+            <a:schemeClr val="accent1"/>
+          </a:effectRef>
+          <a:fontRef idx="minor">
+            <a:schemeClr val="lt1"/>
+          </a:fontRef>
+        </p:style>
+        <p:txBody>
+          <a:bodyPr rtlCol="0" anchor="ctr"/>
+          <a:lstStyle/>
+          <a:p>
+            <a:pPr algn="ctr"/>
+          </a:p>
+        </p:txBody>
+      </p:sp>
+      <p:sp>
+        <p:nvSpPr>
+          <p:cNvPr id="6" name="TextBox 5"/>
+          <p:cNvSpPr txBox="1"/>
+          <p:nvPr/>
+        </p:nvSpPr>
+        <p:spPr>
+          <a:xfrm>
+            <a:off x="658368" y="1874519"/>
+            <a:ext cx="502920" cy="457200"/>
+          </a:xfrm>
+          <a:prstGeom prst="rect">
+            <a:avLst/>
+          </a:prstGeom>
+          <a:noFill/>
+        </p:spPr>
+        <p:txBody>
+          <a:bodyPr wrap="square" lIns="45720" rIns="45720" tIns="18288" bIns="18288">
+            <a:spAutoFit/>
+          </a:bodyPr>
+          <a:lstStyle/>
+          <a:p>
+            <a:pPr algn="ctr">
+              <a:spcBef>
+                <a:spcPts val="0"/>
+              </a:spcBef>
+              <a:spcAft>
+                <a:spcPts val="0"/>
+              </a:spcAft>
+            </a:pPr>
+            <a:r>
+              <a:rPr sz="1800" b="1" i="0">
+                <a:solidFill>
+                  <a:srgbClr val="0A0A0A"/>
+                </a:solidFill>
+                <a:latin typeface="Calibri"/>
+              </a:rPr>
+              <a:t>✓</a:t>
+            </a:r>
+          </a:p>
+        </p:txBody>
+      </p:sp>
+      <p:sp>
+        <p:nvSpPr>
+          <p:cNvPr id="7" name="TextBox 6"/>
+          <p:cNvSpPr txBox="1"/>
+          <p:nvPr/>
+        </p:nvSpPr>
+        <p:spPr>
+          <a:xfrm>
+            <a:off x="1325880" y="1801368"/>
+            <a:ext cx="10241280" cy="868680"/>
+          </a:xfrm>
+          <a:prstGeom prst="rect">
+            <a:avLst/>
+          </a:prstGeom>
+          <a:noFill/>
+        </p:spPr>
+        <p:txBody>
+          <a:bodyPr wrap="square" lIns="45720" rIns="45720" tIns="18288" bIns="18288">
+            <a:spAutoFit/>
+          </a:bodyPr>
+          <a:lstStyle/>
+          <a:p>
             <a:pPr algn="l">
               <a:spcBef>
                 <a:spcPts val="0"/>
@@ -7833,127 +7177,620 @@
               </a:spcAft>
             </a:pPr>
             <a:r>
-              <a:rPr sz="4400" b="1" i="0">
-                <a:solidFill>
-                  <a:srgbClr val="E6FF00"/>
+              <a:rPr sz="1500" b="1" i="0">
+                <a:solidFill>
+                  <a:srgbClr val="FFFFFF"/>
                 </a:solidFill>
                 <a:latin typeface="Arial"/>
               </a:rPr>
-              <a:t>3×</a:t>
-            </a:r>
-          </a:p>
-          <a:p>
-            <a:pPr algn="l">
-              <a:spcBef>
-                <a:spcPts val="0"/>
-              </a:spcBef>
-              <a:spcAft>
-                <a:spcPts val="1400"/>
+              <a:t>A la par del mejor R²</a:t>
+            </a:r>
+          </a:p>
+          <a:p>
+            <a:pPr algn="l">
+              <a:spcBef>
+                <a:spcPts val="0"/>
+              </a:spcBef>
+              <a:spcAft>
+                <a:spcPts val="600"/>
               </a:spcAft>
             </a:pPr>
             <a:r>
               <a:rPr sz="1300" b="0" i="0">
                 <a:solidFill>
+                  <a:srgbClr val="8C8C8C"/>
+                </a:solidFill>
+                <a:latin typeface="Calibri"/>
+              </a:rPr>
+              <a:t>empata con la polinómica en test (R²≈0.27); se elige por lo demás.</a:t>
+            </a:r>
+          </a:p>
+        </p:txBody>
+      </p:sp>
+      <p:sp>
+        <p:nvSpPr>
+          <p:cNvPr id="8" name="Rectangle 7"/>
+          <p:cNvSpPr/>
+          <p:nvPr/>
+        </p:nvSpPr>
+        <p:spPr>
+          <a:xfrm>
+            <a:off x="640080" y="2724912"/>
+            <a:ext cx="502920" cy="502920"/>
+          </a:xfrm>
+          <a:prstGeom prst="rect">
+            <a:avLst/>
+          </a:prstGeom>
+          <a:solidFill>
+            <a:srgbClr val="E6FF00"/>
+          </a:solidFill>
+          <a:ln>
+            <a:noFill/>
+          </a:ln>
+          <a:effectLst/>
+        </p:spPr>
+        <p:style>
+          <a:lnRef idx="1">
+            <a:schemeClr val="accent1"/>
+          </a:lnRef>
+          <a:fillRef idx="3">
+            <a:schemeClr val="accent1"/>
+          </a:fillRef>
+          <a:effectRef idx="2">
+            <a:schemeClr val="accent1"/>
+          </a:effectRef>
+          <a:fontRef idx="minor">
+            <a:schemeClr val="lt1"/>
+          </a:fontRef>
+        </p:style>
+        <p:txBody>
+          <a:bodyPr rtlCol="0" anchor="ctr"/>
+          <a:lstStyle/>
+          <a:p>
+            <a:pPr algn="ctr"/>
+          </a:p>
+        </p:txBody>
+      </p:sp>
+      <p:sp>
+        <p:nvSpPr>
+          <p:cNvPr id="9" name="TextBox 8"/>
+          <p:cNvSpPr txBox="1"/>
+          <p:nvPr/>
+        </p:nvSpPr>
+        <p:spPr>
+          <a:xfrm>
+            <a:off x="658368" y="2770632"/>
+            <a:ext cx="502920" cy="457200"/>
+          </a:xfrm>
+          <a:prstGeom prst="rect">
+            <a:avLst/>
+          </a:prstGeom>
+          <a:noFill/>
+        </p:spPr>
+        <p:txBody>
+          <a:bodyPr wrap="square" lIns="45720" rIns="45720" tIns="18288" bIns="18288">
+            <a:spAutoFit/>
+          </a:bodyPr>
+          <a:lstStyle/>
+          <a:p>
+            <a:pPr algn="ctr">
+              <a:spcBef>
+                <a:spcPts val="0"/>
+              </a:spcBef>
+              <a:spcAft>
+                <a:spcPts val="0"/>
+              </a:spcAft>
+            </a:pPr>
+            <a:r>
+              <a:rPr sz="1800" b="1" i="0">
+                <a:solidFill>
+                  <a:srgbClr val="0A0A0A"/>
+                </a:solidFill>
+                <a:latin typeface="Calibri"/>
+              </a:rPr>
+              <a:t>✓</a:t>
+            </a:r>
+          </a:p>
+        </p:txBody>
+      </p:sp>
+      <p:sp>
+        <p:nvSpPr>
+          <p:cNvPr id="10" name="TextBox 9"/>
+          <p:cNvSpPr txBox="1"/>
+          <p:nvPr/>
+        </p:nvSpPr>
+        <p:spPr>
+          <a:xfrm>
+            <a:off x="1325880" y="2697480"/>
+            <a:ext cx="10241280" cy="868680"/>
+          </a:xfrm>
+          <a:prstGeom prst="rect">
+            <a:avLst/>
+          </a:prstGeom>
+          <a:noFill/>
+        </p:spPr>
+        <p:txBody>
+          <a:bodyPr wrap="square" lIns="45720" rIns="45720" tIns="18288" bIns="18288">
+            <a:spAutoFit/>
+          </a:bodyPr>
+          <a:lstStyle/>
+          <a:p>
+            <a:pPr algn="l">
+              <a:spcBef>
+                <a:spcPts val="0"/>
+              </a:spcBef>
+              <a:spcAft>
+                <a:spcPts val="200"/>
+              </a:spcAft>
+            </a:pPr>
+            <a:r>
+              <a:rPr sz="1500" b="1" i="0">
+                <a:solidFill>
                   <a:srgbClr val="FFFFFF"/>
                 </a:solidFill>
+                <a:latin typeface="Arial"/>
+              </a:rPr>
+              <a:t>Capta no linealidad e interacciones</a:t>
+            </a:r>
+          </a:p>
+          <a:p>
+            <a:pPr algn="l">
+              <a:spcBef>
+                <a:spcPts val="0"/>
+              </a:spcBef>
+              <a:spcAft>
+                <a:spcPts val="600"/>
+              </a:spcAft>
+            </a:pPr>
+            <a:r>
+              <a:rPr sz="1300" b="0" i="0">
+                <a:solidFill>
+                  <a:srgbClr val="8C8C8C"/>
+                </a:solidFill>
                 <a:latin typeface="Calibri"/>
               </a:rPr>
-              <a:t>brecha junior → senior: la experiencia manda</a:t>
-            </a:r>
-          </a:p>
-          <a:p>
-            <a:pPr algn="l">
-              <a:spcBef>
-                <a:spcPts val="0"/>
-              </a:spcBef>
-              <a:spcAft>
-                <a:spcPts val="400"/>
-              </a:spcAft>
-            </a:pPr>
-            <a:r>
-              <a:rPr sz="1350" b="1" i="0">
-                <a:solidFill>
-                  <a:srgbClr val="E6FF00"/>
+              <a:t>sin ingeniería manual (p. ej. el plateau de la experiencia).</a:t>
+            </a:r>
+          </a:p>
+        </p:txBody>
+      </p:sp>
+      <p:sp>
+        <p:nvSpPr>
+          <p:cNvPr id="11" name="Rectangle 10"/>
+          <p:cNvSpPr/>
+          <p:nvPr/>
+        </p:nvSpPr>
+        <p:spPr>
+          <a:xfrm>
+            <a:off x="640080" y="3621024"/>
+            <a:ext cx="502920" cy="502920"/>
+          </a:xfrm>
+          <a:prstGeom prst="rect">
+            <a:avLst/>
+          </a:prstGeom>
+          <a:solidFill>
+            <a:srgbClr val="E6FF00"/>
+          </a:solidFill>
+          <a:ln>
+            <a:noFill/>
+          </a:ln>
+          <a:effectLst/>
+        </p:spPr>
+        <p:style>
+          <a:lnRef idx="1">
+            <a:schemeClr val="accent1"/>
+          </a:lnRef>
+          <a:fillRef idx="3">
+            <a:schemeClr val="accent1"/>
+          </a:fillRef>
+          <a:effectRef idx="2">
+            <a:schemeClr val="accent1"/>
+          </a:effectRef>
+          <a:fontRef idx="minor">
+            <a:schemeClr val="lt1"/>
+          </a:fontRef>
+        </p:style>
+        <p:txBody>
+          <a:bodyPr rtlCol="0" anchor="ctr"/>
+          <a:lstStyle/>
+          <a:p>
+            <a:pPr algn="ctr"/>
+          </a:p>
+        </p:txBody>
+      </p:sp>
+      <p:sp>
+        <p:nvSpPr>
+          <p:cNvPr id="12" name="TextBox 11"/>
+          <p:cNvSpPr txBox="1"/>
+          <p:nvPr/>
+        </p:nvSpPr>
+        <p:spPr>
+          <a:xfrm>
+            <a:off x="658368" y="3666744"/>
+            <a:ext cx="502920" cy="457200"/>
+          </a:xfrm>
+          <a:prstGeom prst="rect">
+            <a:avLst/>
+          </a:prstGeom>
+          <a:noFill/>
+        </p:spPr>
+        <p:txBody>
+          <a:bodyPr wrap="square" lIns="45720" rIns="45720" tIns="18288" bIns="18288">
+            <a:spAutoFit/>
+          </a:bodyPr>
+          <a:lstStyle/>
+          <a:p>
+            <a:pPr algn="ctr">
+              <a:spcBef>
+                <a:spcPts val="0"/>
+              </a:spcBef>
+              <a:spcAft>
+                <a:spcPts val="0"/>
+              </a:spcAft>
+            </a:pPr>
+            <a:r>
+              <a:rPr sz="1800" b="1" i="0">
+                <a:solidFill>
+                  <a:srgbClr val="0A0A0A"/>
+                </a:solidFill>
+                <a:latin typeface="Calibri"/>
+              </a:rPr>
+              <a:t>✓</a:t>
+            </a:r>
+          </a:p>
+        </p:txBody>
+      </p:sp>
+      <p:sp>
+        <p:nvSpPr>
+          <p:cNvPr id="13" name="TextBox 12"/>
+          <p:cNvSpPr txBox="1"/>
+          <p:nvPr/>
+        </p:nvSpPr>
+        <p:spPr>
+          <a:xfrm>
+            <a:off x="1325880" y="3593592"/>
+            <a:ext cx="10241280" cy="868680"/>
+          </a:xfrm>
+          <a:prstGeom prst="rect">
+            <a:avLst/>
+          </a:prstGeom>
+          <a:noFill/>
+        </p:spPr>
+        <p:txBody>
+          <a:bodyPr wrap="square" lIns="45720" rIns="45720" tIns="18288" bIns="18288">
+            <a:spAutoFit/>
+          </a:bodyPr>
+          <a:lstStyle/>
+          <a:p>
+            <a:pPr algn="l">
+              <a:spcBef>
+                <a:spcPts val="0"/>
+              </a:spcBef>
+              <a:spcAft>
+                <a:spcPts val="200"/>
+              </a:spcAft>
+            </a:pPr>
+            <a:r>
+              <a:rPr sz="1500" b="1" i="0">
+                <a:solidFill>
+                  <a:srgbClr val="FFFFFF"/>
                 </a:solidFill>
                 <a:latin typeface="Arial"/>
               </a:rPr>
-              <a:t>Brechas salariales:</a:t>
-            </a:r>
-          </a:p>
-          <a:p>
-            <a:pPr algn="l">
-              <a:spcBef>
-                <a:spcPts val="0"/>
-              </a:spcBef>
-              <a:spcAft>
-                <a:spcPts val="800"/>
-              </a:spcAft>
-            </a:pPr>
-            <a:r>
-              <a:rPr sz="1250" b="0" i="0">
+              <a:t>Robusto</a:t>
+            </a:r>
+          </a:p>
+          <a:p>
+            <a:pPr algn="l">
+              <a:spcBef>
+                <a:spcPts val="0"/>
+              </a:spcBef>
+              <a:spcAft>
+                <a:spcPts val="600"/>
+              </a:spcAft>
+            </a:pPr>
+            <a:r>
+              <a:rPr sz="1300" b="0" i="0">
+                <a:solidFill>
+                  <a:srgbClr val="8C8C8C"/>
+                </a:solidFill>
+                <a:latin typeface="Calibri"/>
+              </a:rPr>
+              <a:t>tolera outliers y mezcla de escalas; no necesita estandarizar.</a:t>
+            </a:r>
+          </a:p>
+        </p:txBody>
+      </p:sp>
+      <p:sp>
+        <p:nvSpPr>
+          <p:cNvPr id="14" name="Rectangle 13"/>
+          <p:cNvSpPr/>
+          <p:nvPr/>
+        </p:nvSpPr>
+        <p:spPr>
+          <a:xfrm>
+            <a:off x="640080" y="4517136"/>
+            <a:ext cx="502920" cy="502920"/>
+          </a:xfrm>
+          <a:prstGeom prst="rect">
+            <a:avLst/>
+          </a:prstGeom>
+          <a:solidFill>
+            <a:srgbClr val="E6FF00"/>
+          </a:solidFill>
+          <a:ln>
+            <a:noFill/>
+          </a:ln>
+          <a:effectLst/>
+        </p:spPr>
+        <p:style>
+          <a:lnRef idx="1">
+            <a:schemeClr val="accent1"/>
+          </a:lnRef>
+          <a:fillRef idx="3">
+            <a:schemeClr val="accent1"/>
+          </a:fillRef>
+          <a:effectRef idx="2">
+            <a:schemeClr val="accent1"/>
+          </a:effectRef>
+          <a:fontRef idx="minor">
+            <a:schemeClr val="lt1"/>
+          </a:fontRef>
+        </p:style>
+        <p:txBody>
+          <a:bodyPr rtlCol="0" anchor="ctr"/>
+          <a:lstStyle/>
+          <a:p>
+            <a:pPr algn="ctr"/>
+          </a:p>
+        </p:txBody>
+      </p:sp>
+      <p:sp>
+        <p:nvSpPr>
+          <p:cNvPr id="15" name="TextBox 14"/>
+          <p:cNvSpPr txBox="1"/>
+          <p:nvPr/>
+        </p:nvSpPr>
+        <p:spPr>
+          <a:xfrm>
+            <a:off x="658368" y="4562855"/>
+            <a:ext cx="502920" cy="457200"/>
+          </a:xfrm>
+          <a:prstGeom prst="rect">
+            <a:avLst/>
+          </a:prstGeom>
+          <a:noFill/>
+        </p:spPr>
+        <p:txBody>
+          <a:bodyPr wrap="square" lIns="45720" rIns="45720" tIns="18288" bIns="18288">
+            <a:spAutoFit/>
+          </a:bodyPr>
+          <a:lstStyle/>
+          <a:p>
+            <a:pPr algn="ctr">
+              <a:spcBef>
+                <a:spcPts val="0"/>
+              </a:spcBef>
+              <a:spcAft>
+                <a:spcPts val="0"/>
+              </a:spcAft>
+            </a:pPr>
+            <a:r>
+              <a:rPr sz="1800" b="1" i="0">
+                <a:solidFill>
+                  <a:srgbClr val="0A0A0A"/>
+                </a:solidFill>
+                <a:latin typeface="Calibri"/>
+              </a:rPr>
+              <a:t>✓</a:t>
+            </a:r>
+          </a:p>
+        </p:txBody>
+      </p:sp>
+      <p:sp>
+        <p:nvSpPr>
+          <p:cNvPr id="16" name="TextBox 15"/>
+          <p:cNvSpPr txBox="1"/>
+          <p:nvPr/>
+        </p:nvSpPr>
+        <p:spPr>
+          <a:xfrm>
+            <a:off x="1325880" y="4489703"/>
+            <a:ext cx="10241280" cy="868680"/>
+          </a:xfrm>
+          <a:prstGeom prst="rect">
+            <a:avLst/>
+          </a:prstGeom>
+          <a:noFill/>
+        </p:spPr>
+        <p:txBody>
+          <a:bodyPr wrap="square" lIns="45720" rIns="45720" tIns="18288" bIns="18288">
+            <a:spAutoFit/>
+          </a:bodyPr>
+          <a:lstStyle/>
+          <a:p>
+            <a:pPr algn="l">
+              <a:spcBef>
+                <a:spcPts val="0"/>
+              </a:spcBef>
+              <a:spcAft>
+                <a:spcPts val="200"/>
+              </a:spcAft>
+            </a:pPr>
+            <a:r>
+              <a:rPr sz="1500" b="1" i="0">
                 <a:solidFill>
                   <a:srgbClr val="FFFFFF"/>
                 </a:solidFill>
+                <a:latin typeface="Arial"/>
+              </a:rPr>
+              <a:t>Sin overfitting</a:t>
+            </a:r>
+          </a:p>
+          <a:p>
+            <a:pPr algn="l">
+              <a:spcBef>
+                <a:spcPts val="0"/>
+              </a:spcBef>
+              <a:spcAft>
+                <a:spcPts val="600"/>
+              </a:spcAft>
+            </a:pPr>
+            <a:r>
+              <a:rPr sz="1300" b="0" i="0">
+                <a:solidFill>
+                  <a:srgbClr val="8C8C8C"/>
+                </a:solidFill>
                 <a:latin typeface="Calibri"/>
               </a:rPr>
-              <a:t>liderazgo +0,19 (la mayor)  ·  remoto +43% en USD</a:t>
-            </a:r>
-          </a:p>
-          <a:p>
-            <a:pPr algn="l">
-              <a:spcBef>
-                <a:spcPts val="0"/>
-              </a:spcBef>
-              <a:spcAft>
-                <a:spcPts val="400"/>
-              </a:spcAft>
-            </a:pPr>
-            <a:r>
-              <a:rPr sz="1350" b="1" i="0">
-                <a:solidFill>
-                  <a:srgbClr val="E6FF00"/>
+              <a:t>regularizado (profundidad y hojas mínimas): train ≈ test.</a:t>
+            </a:r>
+          </a:p>
+        </p:txBody>
+      </p:sp>
+      <p:sp>
+        <p:nvSpPr>
+          <p:cNvPr id="17" name="Rectangle 16"/>
+          <p:cNvSpPr/>
+          <p:nvPr/>
+        </p:nvSpPr>
+        <p:spPr>
+          <a:xfrm>
+            <a:off x="640080" y="5413248"/>
+            <a:ext cx="502920" cy="502920"/>
+          </a:xfrm>
+          <a:prstGeom prst="rect">
+            <a:avLst/>
+          </a:prstGeom>
+          <a:solidFill>
+            <a:srgbClr val="E6FF00"/>
+          </a:solidFill>
+          <a:ln>
+            <a:noFill/>
+          </a:ln>
+          <a:effectLst/>
+        </p:spPr>
+        <p:style>
+          <a:lnRef idx="1">
+            <a:schemeClr val="accent1"/>
+          </a:lnRef>
+          <a:fillRef idx="3">
+            <a:schemeClr val="accent1"/>
+          </a:fillRef>
+          <a:effectRef idx="2">
+            <a:schemeClr val="accent1"/>
+          </a:effectRef>
+          <a:fontRef idx="minor">
+            <a:schemeClr val="lt1"/>
+          </a:fontRef>
+        </p:style>
+        <p:txBody>
+          <a:bodyPr rtlCol="0" anchor="ctr"/>
+          <a:lstStyle/>
+          <a:p>
+            <a:pPr algn="ctr"/>
+          </a:p>
+        </p:txBody>
+      </p:sp>
+      <p:sp>
+        <p:nvSpPr>
+          <p:cNvPr id="18" name="TextBox 17"/>
+          <p:cNvSpPr txBox="1"/>
+          <p:nvPr/>
+        </p:nvSpPr>
+        <p:spPr>
+          <a:xfrm>
+            <a:off x="658368" y="5458968"/>
+            <a:ext cx="502920" cy="457200"/>
+          </a:xfrm>
+          <a:prstGeom prst="rect">
+            <a:avLst/>
+          </a:prstGeom>
+          <a:noFill/>
+        </p:spPr>
+        <p:txBody>
+          <a:bodyPr wrap="square" lIns="45720" rIns="45720" tIns="18288" bIns="18288">
+            <a:spAutoFit/>
+          </a:bodyPr>
+          <a:lstStyle/>
+          <a:p>
+            <a:pPr algn="ctr">
+              <a:spcBef>
+                <a:spcPts val="0"/>
+              </a:spcBef>
+              <a:spcAft>
+                <a:spcPts val="0"/>
+              </a:spcAft>
+            </a:pPr>
+            <a:r>
+              <a:rPr sz="1800" b="1" i="0">
+                <a:solidFill>
+                  <a:srgbClr val="0A0A0A"/>
+                </a:solidFill>
+                <a:latin typeface="Calibri"/>
+              </a:rPr>
+              <a:t>✓</a:t>
+            </a:r>
+          </a:p>
+        </p:txBody>
+      </p:sp>
+      <p:sp>
+        <p:nvSpPr>
+          <p:cNvPr id="19" name="TextBox 18"/>
+          <p:cNvSpPr txBox="1"/>
+          <p:nvPr/>
+        </p:nvSpPr>
+        <p:spPr>
+          <a:xfrm>
+            <a:off x="1325880" y="5385816"/>
+            <a:ext cx="10241280" cy="868680"/>
+          </a:xfrm>
+          <a:prstGeom prst="rect">
+            <a:avLst/>
+          </a:prstGeom>
+          <a:noFill/>
+        </p:spPr>
+        <p:txBody>
+          <a:bodyPr wrap="square" lIns="45720" rIns="45720" tIns="18288" bIns="18288">
+            <a:spAutoFit/>
+          </a:bodyPr>
+          <a:lstStyle/>
+          <a:p>
+            <a:pPr algn="l">
+              <a:spcBef>
+                <a:spcPts val="0"/>
+              </a:spcBef>
+              <a:spcAft>
+                <a:spcPts val="200"/>
+              </a:spcAft>
+            </a:pPr>
+            <a:r>
+              <a:rPr sz="1500" b="1" i="0">
+                <a:solidFill>
+                  <a:srgbClr val="FFFFFF"/>
                 </a:solidFill>
                 <a:latin typeface="Arial"/>
               </a:rPr>
-              <a:t>Comparativa regional:</a:t>
-            </a:r>
-          </a:p>
-          <a:p>
-            <a:pPr algn="l">
-              <a:spcBef>
-                <a:spcPts val="0"/>
-              </a:spcBef>
-              <a:spcAft>
-                <a:spcPts val="800"/>
-              </a:spcAft>
-            </a:pPr>
-            <a:r>
-              <a:rPr sz="1250" b="0" i="0">
-                <a:solidFill>
-                  <a:srgbClr val="FFFFFF"/>
+              <a:t>Interpretable</a:t>
+            </a:r>
+          </a:p>
+          <a:p>
+            <a:pPr algn="l">
+              <a:spcBef>
+                <a:spcPts val="0"/>
+              </a:spcBef>
+              <a:spcAft>
+                <a:spcPts val="600"/>
+              </a:spcAft>
+            </a:pPr>
+            <a:r>
+              <a:rPr sz="1300" b="0" i="0">
+                <a:solidFill>
+                  <a:srgbClr val="8C8C8C"/>
                 </a:solidFill>
                 <a:latin typeface="Calibri"/>
               </a:rPr>
-              <a:t>CABA +24%  ·  Patagonia (energía) destaca</a:t>
-            </a:r>
-          </a:p>
-          <a:p>
-            <a:pPr algn="l">
-              <a:spcBef>
-                <a:spcPts val="0"/>
-              </a:spcBef>
-              <a:spcAft>
-                <a:spcPts val="600"/>
-              </a:spcAft>
-            </a:pPr>
-            <a:r>
-              <a:rPr sz="1250" b="0" i="1">
-                <a:solidFill>
-                  <a:srgbClr val="FFFFFF"/>
-                </a:solidFill>
-                <a:latin typeface="Calibri"/>
-              </a:rPr>
-              <a:t>Dolarización (H5): no dio más estabilidad.</a:t>
+              <a:t>entrega importancia de variables para la lectura de negocio.</a:t>
             </a:r>
           </a:p>
         </p:txBody>
@@ -8763,7 +8600,7 @@
                 </a:solidFill>
                 <a:latin typeface="Arial"/>
               </a:rPr>
-              <a:t>06  ·  </a:t>
+              <a:t>05  ·  </a:t>
             </a:r>
             <a:r>
               <a:rPr sz="1300" b="1">
@@ -8772,7 +8609,7 @@
                 </a:solidFill>
                 <a:latin typeface="Arial"/>
               </a:rPr>
-              <a:t>RESULTADOS · COMPARATIVA INTERNACIONAL</a:t>
+              <a:t>K-MEANS</a:t>
             </a:r>
           </a:p>
         </p:txBody>
@@ -8814,14 +8651,14 @@
                 </a:solidFill>
                 <a:latin typeface="Arial"/>
               </a:rPr>
-              <a:t>Argentina vs el mundo</a:t>
+              <a:t>Segmentación no supervisada</a:t>
             </a:r>
           </a:p>
         </p:txBody>
       </p:sp>
       <p:pic>
         <p:nvPicPr>
-          <p:cNvPr id="5" name="Picture 4" descr="comparacion_mundo.png"/>
+          <p:cNvPr id="5" name="Picture 4" descr="clusters_bn.png"/>
           <p:cNvPicPr>
             <a:picLocks noChangeAspect="1"/>
           </p:cNvPicPr>
@@ -8835,8 +8672,8 @@
         </p:blipFill>
         <p:spPr>
           <a:xfrm>
-            <a:off x="365760" y="2007196"/>
-            <a:ext cx="7955279" cy="3849447"/>
+            <a:off x="457200" y="2426026"/>
+            <a:ext cx="7040880" cy="2646026"/>
           </a:xfrm>
           <a:prstGeom prst="rect">
             <a:avLst/>
@@ -8851,8 +8688,8 @@
         </p:nvSpPr>
         <p:spPr>
           <a:xfrm>
-            <a:off x="8412480" y="1828800"/>
-            <a:ext cx="3291840" cy="4114800"/>
+            <a:off x="7772400" y="1828800"/>
+            <a:ext cx="3931920" cy="4114800"/>
           </a:xfrm>
           <a:prstGeom prst="roundRect">
             <a:avLst/>
@@ -8895,8 +8732,8 @@
         </p:nvSpPr>
         <p:spPr>
           <a:xfrm>
-            <a:off x="8641080" y="2057400"/>
-            <a:ext cx="2880360" cy="3749039"/>
+            <a:off x="8001000" y="2057400"/>
+            <a:ext cx="3474720" cy="3749039"/>
           </a:xfrm>
           <a:prstGeom prst="rect">
             <a:avLst/>
@@ -8914,74 +8751,93 @@
                 <a:spcPts val="0"/>
               </a:spcBef>
               <a:spcAft>
-                <a:spcPts val="800"/>
-              </a:spcAft>
-            </a:pPr>
-            <a:r>
-              <a:rPr sz="1300" b="1" i="0">
+                <a:spcPts val="1000"/>
+              </a:spcAft>
+            </a:pPr>
+            <a:r>
+              <a:rPr sz="1400" b="1" i="0">
                 <a:solidFill>
                   <a:srgbClr val="E6FF00"/>
                 </a:solidFill>
                 <a:latin typeface="Arial"/>
               </a:rPr>
-              <a:t>STACK OVERFLOW</a:t>
-            </a:r>
-          </a:p>
-          <a:p>
-            <a:pPr algn="l">
-              <a:spcBef>
-                <a:spcPts val="0"/>
-              </a:spcBef>
-              <a:spcAft>
-                <a:spcPts val="900"/>
-              </a:spcAft>
-            </a:pPr>
-            <a:r>
-              <a:rPr sz="1250" b="0" i="0">
+              <a:t>4 ARQUETIPOS</a:t>
+            </a:r>
+          </a:p>
+          <a:p>
+            <a:pPr algn="l">
+              <a:spcBef>
+                <a:spcPts val="0"/>
+              </a:spcBef>
+              <a:spcAft>
+                <a:spcPts val="1000"/>
+              </a:spcAft>
+            </a:pPr>
+            <a:r>
+              <a:rPr sz="1300" b="0" i="0">
                 <a:solidFill>
                   <a:srgbClr val="FFFFFF"/>
                 </a:solidFill>
                 <a:latin typeface="Calibri"/>
               </a:rPr>
-              <a:t>—  Argentina USD 3.333/mes</a:t>
-            </a:r>
-          </a:p>
-          <a:p>
-            <a:pPr algn="l">
-              <a:spcBef>
-                <a:spcPts val="0"/>
-              </a:spcBef>
-              <a:spcAft>
-                <a:spcPts val="900"/>
-              </a:spcAft>
-            </a:pPr>
-            <a:r>
-              <a:rPr sz="1250" b="0" i="0">
+              <a:t>—  Junior remoto (49%) — $2,75M</a:t>
+            </a:r>
+          </a:p>
+          <a:p>
+            <a:pPr algn="l">
+              <a:spcBef>
+                <a:spcPts val="0"/>
+              </a:spcBef>
+              <a:spcAft>
+                <a:spcPts val="1000"/>
+              </a:spcAft>
+            </a:pPr>
+            <a:r>
+              <a:rPr sz="1300" b="0" i="0">
                 <a:solidFill>
                   <a:srgbClr val="FFFFFF"/>
                 </a:solidFill>
                 <a:latin typeface="Calibri"/>
               </a:rPr>
-              <a:t>—  Arriba de Brasil, Ucrania e India</a:t>
-            </a:r>
-          </a:p>
-          <a:p>
-            <a:pPr algn="l">
-              <a:spcBef>
-                <a:spcPts val="0"/>
-              </a:spcBef>
-              <a:spcAft>
-                <a:spcPts val="900"/>
-              </a:spcAft>
-            </a:pPr>
-            <a:r>
-              <a:rPr sz="1250" b="0" i="0">
+              <a:t>—  Semi-senior dolarizado (21%) — $2,81M</a:t>
+            </a:r>
+          </a:p>
+          <a:p>
+            <a:pPr algn="l">
+              <a:spcBef>
+                <a:spcPts val="0"/>
+              </a:spcBef>
+              <a:spcAft>
+                <a:spcPts val="1000"/>
+              </a:spcAft>
+            </a:pPr>
+            <a:r>
+              <a:rPr sz="1300" b="0" i="0">
                 <a:solidFill>
                   <a:srgbClr val="FFFFFF"/>
                 </a:solidFill>
                 <a:latin typeface="Calibri"/>
               </a:rPr>
-              <a:t>—  Abajo de Europa y EE.UU. (12.500)</a:t>
+              <a:t>—  Senior remoto (21%) — $4,43M · el mejor pago</a:t>
+            </a:r>
+          </a:p>
+          <a:p>
+            <a:pPr algn="l">
+              <a:spcBef>
+                <a:spcPts val="0"/>
+              </a:spcBef>
+              <a:spcAft>
+                <a:spcPts val="1000"/>
+              </a:spcAft>
+            </a:pPr>
+            <a:r>
+              <a:rPr sz="1300" b="0" i="0">
+                <a:solidFill>
+                  <a:srgbClr val="FFFFFF"/>
+                </a:solidFill>
+                <a:latin typeface="Calibri"/>
+              </a:rPr>
+              <a:t>—  Senior +15 corporativo estable (9%) — $4,01M</a:t>
             </a:r>
           </a:p>
           <a:p>
@@ -8994,13 +8850,55 @@
               </a:spcAft>
             </a:pPr>
             <a:r>
-              <a:rPr sz="1200" b="0" i="1">
+              <a:rPr sz="1250" b="0" i="1">
                 <a:solidFill>
                   <a:srgbClr val="E6FF00"/>
                 </a:solidFill>
                 <a:latin typeface="Calibri"/>
               </a:rPr>
-              <a:t>Sysarmy mide USD 2.264: más conservador. Stack Overflow capta perfiles más internacionales / senior.</a:t>
+              <a:t>k=4 elegido con codo + silueta.</a:t>
+            </a:r>
+          </a:p>
+        </p:txBody>
+      </p:sp>
+      <p:sp>
+        <p:nvSpPr>
+          <p:cNvPr id="8" name="TextBox 7"/>
+          <p:cNvSpPr txBox="1"/>
+          <p:nvPr/>
+        </p:nvSpPr>
+        <p:spPr>
+          <a:xfrm>
+            <a:off x="457200" y="5897880"/>
+            <a:ext cx="7223760" cy="822960"/>
+          </a:xfrm>
+          <a:prstGeom prst="rect">
+            <a:avLst/>
+          </a:prstGeom>
+          <a:noFill/>
+        </p:spPr>
+        <p:txBody>
+          <a:bodyPr wrap="square" lIns="45720" rIns="45720" tIns="18288" bIns="18288">
+            <a:spAutoFit/>
+          </a:bodyPr>
+          <a:lstStyle/>
+          <a:p>
+            <a:pPr algn="l">
+              <a:spcBef>
+                <a:spcPts val="0"/>
+              </a:spcBef>
+              <a:spcAft>
+                <a:spcPts val="600"/>
+              </a:spcAft>
+            </a:pPr>
+            <a:r>
+              <a:rPr sz="1000" b="0" i="1">
+                <a:solidFill>
+                  <a:srgbClr val="8C8C8C"/>
+                </a:solidFill>
+                <a:latin typeface="Calibri"/>
+              </a:rPr>
+              <a:t>Nota: K-Means asigna cada punto a su centroide más cercano (verificado al 100%). Se ven solapados por la proyección 2D (muestra el 62% de la info) y porque los perfiles son un continuo — no por error del modelo.</a:t>
             </a:r>
           </a:p>
         </p:txBody>
@@ -9038,6 +8936,1607 @@
             <a:avLst/>
           </a:prstGeom>
           <a:solidFill>
+            <a:srgbClr val="FFFFFF"/>
+          </a:solidFill>
+          <a:ln>
+            <a:noFill/>
+          </a:ln>
+          <a:effectLst/>
+        </p:spPr>
+        <p:style>
+          <a:lnRef idx="1">
+            <a:schemeClr val="accent1"/>
+          </a:lnRef>
+          <a:fillRef idx="3">
+            <a:schemeClr val="accent1"/>
+          </a:fillRef>
+          <a:effectRef idx="2">
+            <a:schemeClr val="accent1"/>
+          </a:effectRef>
+          <a:fontRef idx="minor">
+            <a:schemeClr val="lt1"/>
+          </a:fontRef>
+        </p:style>
+        <p:txBody>
+          <a:bodyPr rtlCol="0" anchor="ctr"/>
+          <a:lstStyle/>
+          <a:p>
+            <a:pPr algn="ctr"/>
+          </a:p>
+        </p:txBody>
+      </p:sp>
+      <p:sp>
+        <p:nvSpPr>
+          <p:cNvPr id="3" name="TextBox 2"/>
+          <p:cNvSpPr txBox="1"/>
+          <p:nvPr/>
+        </p:nvSpPr>
+        <p:spPr>
+          <a:xfrm>
+            <a:off x="548640" y="384048"/>
+            <a:ext cx="10058400" cy="457200"/>
+          </a:xfrm>
+          <a:prstGeom prst="rect">
+            <a:avLst/>
+          </a:prstGeom>
+          <a:noFill/>
+        </p:spPr>
+        <p:txBody>
+          <a:bodyPr wrap="square" lIns="45720" rIns="45720" tIns="18288" bIns="18288">
+            <a:spAutoFit/>
+          </a:bodyPr>
+          <a:lstStyle/>
+          <a:p>
+            <a:pPr>
+              <a:spcAft>
+                <a:spcPts val="0"/>
+              </a:spcAft>
+            </a:pPr>
+            <a:r>
+              <a:rPr sz="1300" b="1">
+                <a:solidFill>
+                  <a:srgbClr val="0A0A0A"/>
+                </a:solidFill>
+                <a:latin typeface="Arial"/>
+              </a:rPr>
+              <a:t>05  ·  </a:t>
+            </a:r>
+            <a:r>
+              <a:rPr sz="1300" b="1">
+                <a:solidFill>
+                  <a:srgbClr val="8C8C8C"/>
+                </a:solidFill>
+                <a:latin typeface="Arial"/>
+              </a:rPr>
+              <a:t>DIFICULTADES CON EL DATASET</a:t>
+            </a:r>
+          </a:p>
+        </p:txBody>
+      </p:sp>
+      <p:sp>
+        <p:nvSpPr>
+          <p:cNvPr id="4" name="TextBox 3"/>
+          <p:cNvSpPr txBox="1"/>
+          <p:nvPr/>
+        </p:nvSpPr>
+        <p:spPr>
+          <a:xfrm>
+            <a:off x="548640" y="868680"/>
+            <a:ext cx="11064240" cy="914400"/>
+          </a:xfrm>
+          <a:prstGeom prst="rect">
+            <a:avLst/>
+          </a:prstGeom>
+          <a:noFill/>
+        </p:spPr>
+        <p:txBody>
+          <a:bodyPr wrap="square" lIns="45720" rIns="45720" tIns="18288" bIns="18288">
+            <a:spAutoFit/>
+          </a:bodyPr>
+          <a:lstStyle/>
+          <a:p>
+            <a:pPr algn="l">
+              <a:spcBef>
+                <a:spcPts val="0"/>
+              </a:spcBef>
+              <a:spcAft>
+                <a:spcPts val="0"/>
+              </a:spcAft>
+            </a:pPr>
+            <a:r>
+              <a:rPr sz="3400" b="1" i="0">
+                <a:solidFill>
+                  <a:srgbClr val="0A0A0A"/>
+                </a:solidFill>
+                <a:latin typeface="Arial"/>
+              </a:rPr>
+              <a:t>Problemas y cómo se resolvieron</a:t>
+            </a:r>
+          </a:p>
+        </p:txBody>
+      </p:sp>
+      <p:sp>
+        <p:nvSpPr>
+          <p:cNvPr id="5" name="Rectangle 4"/>
+          <p:cNvSpPr/>
+          <p:nvPr/>
+        </p:nvSpPr>
+        <p:spPr>
+          <a:xfrm>
+            <a:off x="640080" y="1828800"/>
+            <a:ext cx="457200" cy="457200"/>
+          </a:xfrm>
+          <a:prstGeom prst="rect">
+            <a:avLst/>
+          </a:prstGeom>
+          <a:solidFill>
+            <a:srgbClr val="0A0A0A"/>
+          </a:solidFill>
+          <a:ln>
+            <a:noFill/>
+          </a:ln>
+          <a:effectLst/>
+        </p:spPr>
+        <p:style>
+          <a:lnRef idx="1">
+            <a:schemeClr val="accent1"/>
+          </a:lnRef>
+          <a:fillRef idx="3">
+            <a:schemeClr val="accent1"/>
+          </a:fillRef>
+          <a:effectRef idx="2">
+            <a:schemeClr val="accent1"/>
+          </a:effectRef>
+          <a:fontRef idx="minor">
+            <a:schemeClr val="lt1"/>
+          </a:fontRef>
+        </p:style>
+        <p:txBody>
+          <a:bodyPr rtlCol="0" anchor="ctr"/>
+          <a:lstStyle/>
+          <a:p>
+            <a:pPr algn="ctr"/>
+          </a:p>
+        </p:txBody>
+      </p:sp>
+      <p:sp>
+        <p:nvSpPr>
+          <p:cNvPr id="6" name="TextBox 5"/>
+          <p:cNvSpPr txBox="1"/>
+          <p:nvPr/>
+        </p:nvSpPr>
+        <p:spPr>
+          <a:xfrm>
+            <a:off x="640080" y="1865376"/>
+            <a:ext cx="457200" cy="411480"/>
+          </a:xfrm>
+          <a:prstGeom prst="rect">
+            <a:avLst/>
+          </a:prstGeom>
+          <a:noFill/>
+        </p:spPr>
+        <p:txBody>
+          <a:bodyPr wrap="square" lIns="45720" rIns="45720" tIns="18288" bIns="18288">
+            <a:spAutoFit/>
+          </a:bodyPr>
+          <a:lstStyle/>
+          <a:p>
+            <a:pPr algn="ctr">
+              <a:spcBef>
+                <a:spcPts val="0"/>
+              </a:spcBef>
+              <a:spcAft>
+                <a:spcPts val="0"/>
+              </a:spcAft>
+            </a:pPr>
+            <a:r>
+              <a:rPr sz="1800" b="1" i="0">
+                <a:solidFill>
+                  <a:srgbClr val="E6FF00"/>
+                </a:solidFill>
+                <a:latin typeface="Arial"/>
+              </a:rPr>
+              <a:t>!</a:t>
+            </a:r>
+          </a:p>
+        </p:txBody>
+      </p:sp>
+      <p:sp>
+        <p:nvSpPr>
+          <p:cNvPr id="7" name="TextBox 6"/>
+          <p:cNvSpPr txBox="1"/>
+          <p:nvPr/>
+        </p:nvSpPr>
+        <p:spPr>
+          <a:xfrm>
+            <a:off x="1280160" y="1801368"/>
+            <a:ext cx="10332720" cy="868680"/>
+          </a:xfrm>
+          <a:prstGeom prst="rect">
+            <a:avLst/>
+          </a:prstGeom>
+          <a:noFill/>
+        </p:spPr>
+        <p:txBody>
+          <a:bodyPr wrap="square" lIns="45720" rIns="45720" tIns="18288" bIns="18288">
+            <a:spAutoFit/>
+          </a:bodyPr>
+          <a:lstStyle/>
+          <a:p>
+            <a:pPr algn="l">
+              <a:spcBef>
+                <a:spcPts val="0"/>
+              </a:spcBef>
+              <a:spcAft>
+                <a:spcPts val="200"/>
+              </a:spcAft>
+            </a:pPr>
+            <a:r>
+              <a:rPr sz="1450" b="1" i="0">
+                <a:solidFill>
+                  <a:srgbClr val="0A0A0A"/>
+                </a:solidFill>
+                <a:latin typeface="Arial"/>
+              </a:rPr>
+              <a:t>Comparar a través de 10× de inflación</a:t>
+            </a:r>
+          </a:p>
+          <a:p>
+            <a:pPr algn="l">
+              <a:spcBef>
+                <a:spcPts val="0"/>
+              </a:spcBef>
+              <a:spcAft>
+                <a:spcPts val="600"/>
+              </a:spcAft>
+            </a:pPr>
+            <a:r>
+              <a:rPr sz="1250" b="0" i="0">
+                <a:solidFill>
+                  <a:srgbClr val="8C8C8C"/>
+                </a:solidFill>
+                <a:latin typeface="Calibri"/>
+              </a:rPr>
+              <a:t>deflación por IPC y, en USD, por inflación de EE.UU.</a:t>
+            </a:r>
+          </a:p>
+        </p:txBody>
+      </p:sp>
+      <p:sp>
+        <p:nvSpPr>
+          <p:cNvPr id="8" name="Rectangle 7"/>
+          <p:cNvSpPr/>
+          <p:nvPr/>
+        </p:nvSpPr>
+        <p:spPr>
+          <a:xfrm>
+            <a:off x="640080" y="2724912"/>
+            <a:ext cx="457200" cy="457200"/>
+          </a:xfrm>
+          <a:prstGeom prst="rect">
+            <a:avLst/>
+          </a:prstGeom>
+          <a:solidFill>
+            <a:srgbClr val="0A0A0A"/>
+          </a:solidFill>
+          <a:ln>
+            <a:noFill/>
+          </a:ln>
+          <a:effectLst/>
+        </p:spPr>
+        <p:style>
+          <a:lnRef idx="1">
+            <a:schemeClr val="accent1"/>
+          </a:lnRef>
+          <a:fillRef idx="3">
+            <a:schemeClr val="accent1"/>
+          </a:fillRef>
+          <a:effectRef idx="2">
+            <a:schemeClr val="accent1"/>
+          </a:effectRef>
+          <a:fontRef idx="minor">
+            <a:schemeClr val="lt1"/>
+          </a:fontRef>
+        </p:style>
+        <p:txBody>
+          <a:bodyPr rtlCol="0" anchor="ctr"/>
+          <a:lstStyle/>
+          <a:p>
+            <a:pPr algn="ctr"/>
+          </a:p>
+        </p:txBody>
+      </p:sp>
+      <p:sp>
+        <p:nvSpPr>
+          <p:cNvPr id="9" name="TextBox 8"/>
+          <p:cNvSpPr txBox="1"/>
+          <p:nvPr/>
+        </p:nvSpPr>
+        <p:spPr>
+          <a:xfrm>
+            <a:off x="640080" y="2761488"/>
+            <a:ext cx="457200" cy="411480"/>
+          </a:xfrm>
+          <a:prstGeom prst="rect">
+            <a:avLst/>
+          </a:prstGeom>
+          <a:noFill/>
+        </p:spPr>
+        <p:txBody>
+          <a:bodyPr wrap="square" lIns="45720" rIns="45720" tIns="18288" bIns="18288">
+            <a:spAutoFit/>
+          </a:bodyPr>
+          <a:lstStyle/>
+          <a:p>
+            <a:pPr algn="ctr">
+              <a:spcBef>
+                <a:spcPts val="0"/>
+              </a:spcBef>
+              <a:spcAft>
+                <a:spcPts val="0"/>
+              </a:spcAft>
+            </a:pPr>
+            <a:r>
+              <a:rPr sz="1800" b="1" i="0">
+                <a:solidFill>
+                  <a:srgbClr val="E6FF00"/>
+                </a:solidFill>
+                <a:latin typeface="Arial"/>
+              </a:rPr>
+              <a:t>!</a:t>
+            </a:r>
+          </a:p>
+        </p:txBody>
+      </p:sp>
+      <p:sp>
+        <p:nvSpPr>
+          <p:cNvPr id="10" name="TextBox 9"/>
+          <p:cNvSpPr txBox="1"/>
+          <p:nvPr/>
+        </p:nvSpPr>
+        <p:spPr>
+          <a:xfrm>
+            <a:off x="1280160" y="2697480"/>
+            <a:ext cx="10332720" cy="868680"/>
+          </a:xfrm>
+          <a:prstGeom prst="rect">
+            <a:avLst/>
+          </a:prstGeom>
+          <a:noFill/>
+        </p:spPr>
+        <p:txBody>
+          <a:bodyPr wrap="square" lIns="45720" rIns="45720" tIns="18288" bIns="18288">
+            <a:spAutoFit/>
+          </a:bodyPr>
+          <a:lstStyle/>
+          <a:p>
+            <a:pPr algn="l">
+              <a:spcBef>
+                <a:spcPts val="0"/>
+              </a:spcBef>
+              <a:spcAft>
+                <a:spcPts val="200"/>
+              </a:spcAft>
+            </a:pPr>
+            <a:r>
+              <a:rPr sz="1450" b="1" i="0">
+                <a:solidFill>
+                  <a:srgbClr val="0A0A0A"/>
+                </a:solidFill>
+                <a:latin typeface="Arial"/>
+              </a:rPr>
+              <a:t>Ajuste según la moneda nativa</a:t>
+            </a:r>
+          </a:p>
+          <a:p>
+            <a:pPr algn="l">
+              <a:spcBef>
+                <a:spcPts val="0"/>
+              </a:spcBef>
+              <a:spcAft>
+                <a:spcPts val="600"/>
+              </a:spcAft>
+            </a:pPr>
+            <a:r>
+              <a:rPr sz="1250" b="0" i="0">
+                <a:solidFill>
+                  <a:srgbClr val="8C8C8C"/>
+                </a:solidFill>
+                <a:latin typeface="Calibri"/>
+              </a:rPr>
+              <a:t>un sueldo dolarizado se ajusta por inflación de su país, no la local.</a:t>
+            </a:r>
+          </a:p>
+        </p:txBody>
+      </p:sp>
+      <p:sp>
+        <p:nvSpPr>
+          <p:cNvPr id="11" name="Rectangle 10"/>
+          <p:cNvSpPr/>
+          <p:nvPr/>
+        </p:nvSpPr>
+        <p:spPr>
+          <a:xfrm>
+            <a:off x="640080" y="3621024"/>
+            <a:ext cx="457200" cy="457200"/>
+          </a:xfrm>
+          <a:prstGeom prst="rect">
+            <a:avLst/>
+          </a:prstGeom>
+          <a:solidFill>
+            <a:srgbClr val="0A0A0A"/>
+          </a:solidFill>
+          <a:ln>
+            <a:noFill/>
+          </a:ln>
+          <a:effectLst/>
+        </p:spPr>
+        <p:style>
+          <a:lnRef idx="1">
+            <a:schemeClr val="accent1"/>
+          </a:lnRef>
+          <a:fillRef idx="3">
+            <a:schemeClr val="accent1"/>
+          </a:fillRef>
+          <a:effectRef idx="2">
+            <a:schemeClr val="accent1"/>
+          </a:effectRef>
+          <a:fontRef idx="minor">
+            <a:schemeClr val="lt1"/>
+          </a:fontRef>
+        </p:style>
+        <p:txBody>
+          <a:bodyPr rtlCol="0" anchor="ctr"/>
+          <a:lstStyle/>
+          <a:p>
+            <a:pPr algn="ctr"/>
+          </a:p>
+        </p:txBody>
+      </p:sp>
+      <p:sp>
+        <p:nvSpPr>
+          <p:cNvPr id="12" name="TextBox 11"/>
+          <p:cNvSpPr txBox="1"/>
+          <p:nvPr/>
+        </p:nvSpPr>
+        <p:spPr>
+          <a:xfrm>
+            <a:off x="640080" y="3657600"/>
+            <a:ext cx="457200" cy="411480"/>
+          </a:xfrm>
+          <a:prstGeom prst="rect">
+            <a:avLst/>
+          </a:prstGeom>
+          <a:noFill/>
+        </p:spPr>
+        <p:txBody>
+          <a:bodyPr wrap="square" lIns="45720" rIns="45720" tIns="18288" bIns="18288">
+            <a:spAutoFit/>
+          </a:bodyPr>
+          <a:lstStyle/>
+          <a:p>
+            <a:pPr algn="ctr">
+              <a:spcBef>
+                <a:spcPts val="0"/>
+              </a:spcBef>
+              <a:spcAft>
+                <a:spcPts val="0"/>
+              </a:spcAft>
+            </a:pPr>
+            <a:r>
+              <a:rPr sz="1800" b="1" i="0">
+                <a:solidFill>
+                  <a:srgbClr val="E6FF00"/>
+                </a:solidFill>
+                <a:latin typeface="Arial"/>
+              </a:rPr>
+              <a:t>!</a:t>
+            </a:r>
+          </a:p>
+        </p:txBody>
+      </p:sp>
+      <p:sp>
+        <p:nvSpPr>
+          <p:cNvPr id="13" name="TextBox 12"/>
+          <p:cNvSpPr txBox="1"/>
+          <p:nvPr/>
+        </p:nvSpPr>
+        <p:spPr>
+          <a:xfrm>
+            <a:off x="1280160" y="3593592"/>
+            <a:ext cx="10332720" cy="868680"/>
+          </a:xfrm>
+          <a:prstGeom prst="rect">
+            <a:avLst/>
+          </a:prstGeom>
+          <a:noFill/>
+        </p:spPr>
+        <p:txBody>
+          <a:bodyPr wrap="square" lIns="45720" rIns="45720" tIns="18288" bIns="18288">
+            <a:spAutoFit/>
+          </a:bodyPr>
+          <a:lstStyle/>
+          <a:p>
+            <a:pPr algn="l">
+              <a:spcBef>
+                <a:spcPts val="0"/>
+              </a:spcBef>
+              <a:spcAft>
+                <a:spcPts val="200"/>
+              </a:spcAft>
+            </a:pPr>
+            <a:r>
+              <a:rPr sz="1450" b="1" i="0">
+                <a:solidFill>
+                  <a:srgbClr val="0A0A0A"/>
+                </a:solidFill>
+                <a:latin typeface="Arial"/>
+              </a:rPr>
+              <a:t>Seniority inferido en ediciones viejas</a:t>
+            </a:r>
+          </a:p>
+          <a:p>
+            <a:pPr algn="l">
+              <a:spcBef>
+                <a:spcPts val="0"/>
+              </a:spcBef>
+              <a:spcAft>
+                <a:spcPts val="600"/>
+              </a:spcAft>
+            </a:pPr>
+            <a:r>
+              <a:rPr sz="1250" b="0" i="0">
+                <a:solidFill>
+                  <a:srgbClr val="8C8C8C"/>
+                </a:solidFill>
+                <a:latin typeface="Calibri"/>
+              </a:rPr>
+              <a:t>generaba multicolinealidad → se excluyó sin perder R².</a:t>
+            </a:r>
+          </a:p>
+        </p:txBody>
+      </p:sp>
+      <p:sp>
+        <p:nvSpPr>
+          <p:cNvPr id="14" name="Rectangle 13"/>
+          <p:cNvSpPr/>
+          <p:nvPr/>
+        </p:nvSpPr>
+        <p:spPr>
+          <a:xfrm>
+            <a:off x="640080" y="4517136"/>
+            <a:ext cx="457200" cy="457200"/>
+          </a:xfrm>
+          <a:prstGeom prst="rect">
+            <a:avLst/>
+          </a:prstGeom>
+          <a:solidFill>
+            <a:srgbClr val="0A0A0A"/>
+          </a:solidFill>
+          <a:ln>
+            <a:noFill/>
+          </a:ln>
+          <a:effectLst/>
+        </p:spPr>
+        <p:style>
+          <a:lnRef idx="1">
+            <a:schemeClr val="accent1"/>
+          </a:lnRef>
+          <a:fillRef idx="3">
+            <a:schemeClr val="accent1"/>
+          </a:fillRef>
+          <a:effectRef idx="2">
+            <a:schemeClr val="accent1"/>
+          </a:effectRef>
+          <a:fontRef idx="minor">
+            <a:schemeClr val="lt1"/>
+          </a:fontRef>
+        </p:style>
+        <p:txBody>
+          <a:bodyPr rtlCol="0" anchor="ctr"/>
+          <a:lstStyle/>
+          <a:p>
+            <a:pPr algn="ctr"/>
+          </a:p>
+        </p:txBody>
+      </p:sp>
+      <p:sp>
+        <p:nvSpPr>
+          <p:cNvPr id="15" name="TextBox 14"/>
+          <p:cNvSpPr txBox="1"/>
+          <p:nvPr/>
+        </p:nvSpPr>
+        <p:spPr>
+          <a:xfrm>
+            <a:off x="640080" y="4553712"/>
+            <a:ext cx="457200" cy="411480"/>
+          </a:xfrm>
+          <a:prstGeom prst="rect">
+            <a:avLst/>
+          </a:prstGeom>
+          <a:noFill/>
+        </p:spPr>
+        <p:txBody>
+          <a:bodyPr wrap="square" lIns="45720" rIns="45720" tIns="18288" bIns="18288">
+            <a:spAutoFit/>
+          </a:bodyPr>
+          <a:lstStyle/>
+          <a:p>
+            <a:pPr algn="ctr">
+              <a:spcBef>
+                <a:spcPts val="0"/>
+              </a:spcBef>
+              <a:spcAft>
+                <a:spcPts val="0"/>
+              </a:spcAft>
+            </a:pPr>
+            <a:r>
+              <a:rPr sz="1800" b="1" i="0">
+                <a:solidFill>
+                  <a:srgbClr val="E6FF00"/>
+                </a:solidFill>
+                <a:latin typeface="Arial"/>
+              </a:rPr>
+              <a:t>!</a:t>
+            </a:r>
+          </a:p>
+        </p:txBody>
+      </p:sp>
+      <p:sp>
+        <p:nvSpPr>
+          <p:cNvPr id="16" name="TextBox 15"/>
+          <p:cNvSpPr txBox="1"/>
+          <p:nvPr/>
+        </p:nvSpPr>
+        <p:spPr>
+          <a:xfrm>
+            <a:off x="1280160" y="4489703"/>
+            <a:ext cx="10332720" cy="868680"/>
+          </a:xfrm>
+          <a:prstGeom prst="rect">
+            <a:avLst/>
+          </a:prstGeom>
+          <a:noFill/>
+        </p:spPr>
+        <p:txBody>
+          <a:bodyPr wrap="square" lIns="45720" rIns="45720" tIns="18288" bIns="18288">
+            <a:spAutoFit/>
+          </a:bodyPr>
+          <a:lstStyle/>
+          <a:p>
+            <a:pPr algn="l">
+              <a:spcBef>
+                <a:spcPts val="0"/>
+              </a:spcBef>
+              <a:spcAft>
+                <a:spcPts val="200"/>
+              </a:spcAft>
+            </a:pPr>
+            <a:r>
+              <a:rPr sz="1450" b="1" i="0">
+                <a:solidFill>
+                  <a:srgbClr val="0A0A0A"/>
+                </a:solidFill>
+                <a:latin typeface="Arial"/>
+              </a:rPr>
+              <a:t>Validación realista</a:t>
+            </a:r>
+          </a:p>
+          <a:p>
+            <a:pPr algn="l">
+              <a:spcBef>
+                <a:spcPts val="0"/>
+              </a:spcBef>
+              <a:spcAft>
+                <a:spcPts val="600"/>
+              </a:spcAft>
+            </a:pPr>
+            <a:r>
+              <a:rPr sz="1250" b="0" i="0">
+                <a:solidFill>
+                  <a:srgbClr val="8C8C8C"/>
+                </a:solidFill>
+                <a:latin typeface="Calibri"/>
+              </a:rPr>
+              <a:t>split temporal (no aleatorio) para simular el uso real.</a:t>
+            </a:r>
+          </a:p>
+        </p:txBody>
+      </p:sp>
+      <p:sp>
+        <p:nvSpPr>
+          <p:cNvPr id="17" name="Rectangle 16"/>
+          <p:cNvSpPr/>
+          <p:nvPr/>
+        </p:nvSpPr>
+        <p:spPr>
+          <a:xfrm>
+            <a:off x="640080" y="5413248"/>
+            <a:ext cx="457200" cy="457200"/>
+          </a:xfrm>
+          <a:prstGeom prst="rect">
+            <a:avLst/>
+          </a:prstGeom>
+          <a:solidFill>
+            <a:srgbClr val="0A0A0A"/>
+          </a:solidFill>
+          <a:ln>
+            <a:noFill/>
+          </a:ln>
+          <a:effectLst/>
+        </p:spPr>
+        <p:style>
+          <a:lnRef idx="1">
+            <a:schemeClr val="accent1"/>
+          </a:lnRef>
+          <a:fillRef idx="3">
+            <a:schemeClr val="accent1"/>
+          </a:fillRef>
+          <a:effectRef idx="2">
+            <a:schemeClr val="accent1"/>
+          </a:effectRef>
+          <a:fontRef idx="minor">
+            <a:schemeClr val="lt1"/>
+          </a:fontRef>
+        </p:style>
+        <p:txBody>
+          <a:bodyPr rtlCol="0" anchor="ctr"/>
+          <a:lstStyle/>
+          <a:p>
+            <a:pPr algn="ctr"/>
+          </a:p>
+        </p:txBody>
+      </p:sp>
+      <p:sp>
+        <p:nvSpPr>
+          <p:cNvPr id="18" name="TextBox 17"/>
+          <p:cNvSpPr txBox="1"/>
+          <p:nvPr/>
+        </p:nvSpPr>
+        <p:spPr>
+          <a:xfrm>
+            <a:off x="640080" y="5449824"/>
+            <a:ext cx="457200" cy="411480"/>
+          </a:xfrm>
+          <a:prstGeom prst="rect">
+            <a:avLst/>
+          </a:prstGeom>
+          <a:noFill/>
+        </p:spPr>
+        <p:txBody>
+          <a:bodyPr wrap="square" lIns="45720" rIns="45720" tIns="18288" bIns="18288">
+            <a:spAutoFit/>
+          </a:bodyPr>
+          <a:lstStyle/>
+          <a:p>
+            <a:pPr algn="ctr">
+              <a:spcBef>
+                <a:spcPts val="0"/>
+              </a:spcBef>
+              <a:spcAft>
+                <a:spcPts val="0"/>
+              </a:spcAft>
+            </a:pPr>
+            <a:r>
+              <a:rPr sz="1800" b="1" i="0">
+                <a:solidFill>
+                  <a:srgbClr val="E6FF00"/>
+                </a:solidFill>
+                <a:latin typeface="Arial"/>
+              </a:rPr>
+              <a:t>!</a:t>
+            </a:r>
+          </a:p>
+        </p:txBody>
+      </p:sp>
+      <p:sp>
+        <p:nvSpPr>
+          <p:cNvPr id="19" name="TextBox 18"/>
+          <p:cNvSpPr txBox="1"/>
+          <p:nvPr/>
+        </p:nvSpPr>
+        <p:spPr>
+          <a:xfrm>
+            <a:off x="1280160" y="5385816"/>
+            <a:ext cx="10332720" cy="868680"/>
+          </a:xfrm>
+          <a:prstGeom prst="rect">
+            <a:avLst/>
+          </a:prstGeom>
+          <a:noFill/>
+        </p:spPr>
+        <p:txBody>
+          <a:bodyPr wrap="square" lIns="45720" rIns="45720" tIns="18288" bIns="18288">
+            <a:spAutoFit/>
+          </a:bodyPr>
+          <a:lstStyle/>
+          <a:p>
+            <a:pPr algn="l">
+              <a:spcBef>
+                <a:spcPts val="0"/>
+              </a:spcBef>
+              <a:spcAft>
+                <a:spcPts val="200"/>
+              </a:spcAft>
+            </a:pPr>
+            <a:r>
+              <a:rPr sz="1450" b="1" i="0">
+                <a:solidFill>
+                  <a:srgbClr val="0A0A0A"/>
+                </a:solidFill>
+                <a:latin typeface="Arial"/>
+              </a:rPr>
+              <a:t>Ruido de las tecnologías</a:t>
+            </a:r>
+          </a:p>
+          <a:p>
+            <a:pPr algn="l">
+              <a:spcBef>
+                <a:spcPts val="0"/>
+              </a:spcBef>
+              <a:spcAft>
+                <a:spcPts val="600"/>
+              </a:spcAft>
+            </a:pPr>
+            <a:r>
+              <a:rPr sz="1250" b="0" i="0">
+                <a:solidFill>
+                  <a:srgbClr val="8C8C8C"/>
+                </a:solidFill>
+                <a:latin typeface="Calibri"/>
+              </a:rPr>
+              <a:t>sacadas del modelo (su premium era proxy del contexto); roles agrupados en top-15.</a:t>
+            </a:r>
+          </a:p>
+        </p:txBody>
+      </p:sp>
+    </p:spTree>
+  </p:cSld>
+  <p:clrMapOvr>
+    <a:masterClrMapping/>
+  </p:clrMapOvr>
+</p:sld>
+</file>
+
+<file path=ppt/slides/slide22.xml><?xml version="1.0" encoding="utf-8"?>
+<p:sld xmlns:a="http://schemas.openxmlformats.org/drawingml/2006/main" xmlns:p="http://schemas.openxmlformats.org/presentationml/2006/main" xmlns:r="http://schemas.openxmlformats.org/officeDocument/2006/relationships">
+  <p:cSld>
+    <p:spTree>
+      <p:nvGrpSpPr>
+        <p:cNvPr id="1" name=""/>
+        <p:cNvGrpSpPr/>
+        <p:nvPr/>
+      </p:nvGrpSpPr>
+      <p:grpSpPr/>
+      <p:sp>
+        <p:nvSpPr>
+          <p:cNvPr id="2" name="Rectangle 1"/>
+          <p:cNvSpPr/>
+          <p:nvPr/>
+        </p:nvSpPr>
+        <p:spPr>
+          <a:xfrm>
+            <a:off x="0" y="0"/>
+            <a:ext cx="12191695" cy="6858000"/>
+          </a:xfrm>
+          <a:prstGeom prst="rect">
+            <a:avLst/>
+          </a:prstGeom>
+          <a:solidFill>
+            <a:srgbClr val="FFFFFF"/>
+          </a:solidFill>
+          <a:ln>
+            <a:noFill/>
+          </a:ln>
+          <a:effectLst/>
+        </p:spPr>
+        <p:style>
+          <a:lnRef idx="1">
+            <a:schemeClr val="accent1"/>
+          </a:lnRef>
+          <a:fillRef idx="3">
+            <a:schemeClr val="accent1"/>
+          </a:fillRef>
+          <a:effectRef idx="2">
+            <a:schemeClr val="accent1"/>
+          </a:effectRef>
+          <a:fontRef idx="minor">
+            <a:schemeClr val="lt1"/>
+          </a:fontRef>
+        </p:style>
+        <p:txBody>
+          <a:bodyPr rtlCol="0" anchor="ctr"/>
+          <a:lstStyle/>
+          <a:p>
+            <a:pPr algn="ctr"/>
+          </a:p>
+        </p:txBody>
+      </p:sp>
+      <p:sp>
+        <p:nvSpPr>
+          <p:cNvPr id="3" name="TextBox 2"/>
+          <p:cNvSpPr txBox="1"/>
+          <p:nvPr/>
+        </p:nvSpPr>
+        <p:spPr>
+          <a:xfrm>
+            <a:off x="548640" y="384048"/>
+            <a:ext cx="10058400" cy="457200"/>
+          </a:xfrm>
+          <a:prstGeom prst="rect">
+            <a:avLst/>
+          </a:prstGeom>
+          <a:noFill/>
+        </p:spPr>
+        <p:txBody>
+          <a:bodyPr wrap="square" lIns="45720" rIns="45720" tIns="18288" bIns="18288">
+            <a:spAutoFit/>
+          </a:bodyPr>
+          <a:lstStyle/>
+          <a:p>
+            <a:pPr>
+              <a:spcAft>
+                <a:spcPts val="0"/>
+              </a:spcAft>
+            </a:pPr>
+            <a:r>
+              <a:rPr sz="1300" b="1">
+                <a:solidFill>
+                  <a:srgbClr val="0A0A0A"/>
+                </a:solidFill>
+                <a:latin typeface="Arial"/>
+              </a:rPr>
+              <a:t>06  ·  </a:t>
+            </a:r>
+            <a:r>
+              <a:rPr sz="1300" b="1">
+                <a:solidFill>
+                  <a:srgbClr val="8C8C8C"/>
+                </a:solidFill>
+                <a:latin typeface="Arial"/>
+              </a:rPr>
+              <a:t>RESULTADOS Y STORYTELLING</a:t>
+            </a:r>
+          </a:p>
+        </p:txBody>
+      </p:sp>
+      <p:sp>
+        <p:nvSpPr>
+          <p:cNvPr id="4" name="TextBox 3"/>
+          <p:cNvSpPr txBox="1"/>
+          <p:nvPr/>
+        </p:nvSpPr>
+        <p:spPr>
+          <a:xfrm>
+            <a:off x="548640" y="868680"/>
+            <a:ext cx="11064240" cy="914400"/>
+          </a:xfrm>
+          <a:prstGeom prst="rect">
+            <a:avLst/>
+          </a:prstGeom>
+          <a:noFill/>
+        </p:spPr>
+        <p:txBody>
+          <a:bodyPr wrap="square" lIns="45720" rIns="45720" tIns="18288" bIns="18288">
+            <a:spAutoFit/>
+          </a:bodyPr>
+          <a:lstStyle/>
+          <a:p>
+            <a:pPr algn="l">
+              <a:spcBef>
+                <a:spcPts val="0"/>
+              </a:spcBef>
+              <a:spcAft>
+                <a:spcPts val="0"/>
+              </a:spcAft>
+            </a:pPr>
+            <a:r>
+              <a:rPr sz="3400" b="1" i="0">
+                <a:solidFill>
+                  <a:srgbClr val="0A0A0A"/>
+                </a:solidFill>
+                <a:latin typeface="Arial"/>
+              </a:rPr>
+              <a:t>Brechas salariales y región</a:t>
+            </a:r>
+          </a:p>
+        </p:txBody>
+      </p:sp>
+      <p:pic>
+        <p:nvPicPr>
+          <p:cNvPr id="5" name="Picture 4" descr="eda_05_geografia.png"/>
+          <p:cNvPicPr>
+            <a:picLocks noChangeAspect="1"/>
+          </p:cNvPicPr>
+          <p:nvPr/>
+        </p:nvPicPr>
+        <p:blipFill>
+          <a:blip r:embed="rId2"/>
+          <a:stretch>
+            <a:fillRect/>
+          </a:stretch>
+        </p:blipFill>
+        <p:spPr>
+          <a:xfrm>
+            <a:off x="1057444" y="1737360"/>
+            <a:ext cx="5566071" cy="4023360"/>
+          </a:xfrm>
+          <a:prstGeom prst="rect">
+            <a:avLst/>
+          </a:prstGeom>
+        </p:spPr>
+      </p:pic>
+      <p:sp>
+        <p:nvSpPr>
+          <p:cNvPr id="6" name="Rounded Rectangle 5"/>
+          <p:cNvSpPr/>
+          <p:nvPr/>
+        </p:nvSpPr>
+        <p:spPr>
+          <a:xfrm>
+            <a:off x="7406640" y="1783080"/>
+            <a:ext cx="4297680" cy="4206240"/>
+          </a:xfrm>
+          <a:prstGeom prst="roundRect">
+            <a:avLst/>
+          </a:prstGeom>
+          <a:solidFill>
+            <a:srgbClr val="0A0A0A"/>
+          </a:solidFill>
+          <a:ln>
+            <a:noFill/>
+          </a:ln>
+          <a:effectLst/>
+        </p:spPr>
+        <p:style>
+          <a:lnRef idx="1">
+            <a:schemeClr val="accent1"/>
+          </a:lnRef>
+          <a:fillRef idx="3">
+            <a:schemeClr val="accent1"/>
+          </a:fillRef>
+          <a:effectRef idx="2">
+            <a:schemeClr val="accent1"/>
+          </a:effectRef>
+          <a:fontRef idx="minor">
+            <a:schemeClr val="lt1"/>
+          </a:fontRef>
+        </p:style>
+        <p:txBody>
+          <a:bodyPr rtlCol="0" anchor="ctr"/>
+          <a:lstStyle/>
+          <a:p>
+            <a:pPr algn="ctr"/>
+          </a:p>
+        </p:txBody>
+      </p:sp>
+      <p:sp>
+        <p:nvSpPr>
+          <p:cNvPr id="7" name="TextBox 6"/>
+          <p:cNvSpPr txBox="1"/>
+          <p:nvPr/>
+        </p:nvSpPr>
+        <p:spPr>
+          <a:xfrm>
+            <a:off x="7680960" y="2011680"/>
+            <a:ext cx="3749039" cy="3840480"/>
+          </a:xfrm>
+          <a:prstGeom prst="rect">
+            <a:avLst/>
+          </a:prstGeom>
+          <a:noFill/>
+        </p:spPr>
+        <p:txBody>
+          <a:bodyPr wrap="square" lIns="45720" rIns="45720" tIns="18288" bIns="18288">
+            <a:spAutoFit/>
+          </a:bodyPr>
+          <a:lstStyle/>
+          <a:p>
+            <a:pPr algn="l">
+              <a:spcBef>
+                <a:spcPts val="0"/>
+              </a:spcBef>
+              <a:spcAft>
+                <a:spcPts val="200"/>
+              </a:spcAft>
+            </a:pPr>
+            <a:r>
+              <a:rPr sz="4400" b="1" i="0">
+                <a:solidFill>
+                  <a:srgbClr val="E6FF00"/>
+                </a:solidFill>
+                <a:latin typeface="Arial"/>
+              </a:rPr>
+              <a:t>3×</a:t>
+            </a:r>
+          </a:p>
+          <a:p>
+            <a:pPr algn="l">
+              <a:spcBef>
+                <a:spcPts val="0"/>
+              </a:spcBef>
+              <a:spcAft>
+                <a:spcPts val="1400"/>
+              </a:spcAft>
+            </a:pPr>
+            <a:r>
+              <a:rPr sz="1300" b="0" i="0">
+                <a:solidFill>
+                  <a:srgbClr val="FFFFFF"/>
+                </a:solidFill>
+                <a:latin typeface="Calibri"/>
+              </a:rPr>
+              <a:t>brecha junior → senior: la experiencia manda</a:t>
+            </a:r>
+          </a:p>
+          <a:p>
+            <a:pPr algn="l">
+              <a:spcBef>
+                <a:spcPts val="0"/>
+              </a:spcBef>
+              <a:spcAft>
+                <a:spcPts val="400"/>
+              </a:spcAft>
+            </a:pPr>
+            <a:r>
+              <a:rPr sz="1350" b="1" i="0">
+                <a:solidFill>
+                  <a:srgbClr val="E6FF00"/>
+                </a:solidFill>
+                <a:latin typeface="Arial"/>
+              </a:rPr>
+              <a:t>Brechas salariales:</a:t>
+            </a:r>
+          </a:p>
+          <a:p>
+            <a:pPr algn="l">
+              <a:spcBef>
+                <a:spcPts val="0"/>
+              </a:spcBef>
+              <a:spcAft>
+                <a:spcPts val="800"/>
+              </a:spcAft>
+            </a:pPr>
+            <a:r>
+              <a:rPr sz="1250" b="0" i="0">
+                <a:solidFill>
+                  <a:srgbClr val="FFFFFF"/>
+                </a:solidFill>
+                <a:latin typeface="Calibri"/>
+              </a:rPr>
+              <a:t>liderazgo +0,19 (la mayor)  ·  remoto +43% en USD</a:t>
+            </a:r>
+          </a:p>
+          <a:p>
+            <a:pPr algn="l">
+              <a:spcBef>
+                <a:spcPts val="0"/>
+              </a:spcBef>
+              <a:spcAft>
+                <a:spcPts val="400"/>
+              </a:spcAft>
+            </a:pPr>
+            <a:r>
+              <a:rPr sz="1350" b="1" i="0">
+                <a:solidFill>
+                  <a:srgbClr val="E6FF00"/>
+                </a:solidFill>
+                <a:latin typeface="Arial"/>
+              </a:rPr>
+              <a:t>Comparativa regional:</a:t>
+            </a:r>
+          </a:p>
+          <a:p>
+            <a:pPr algn="l">
+              <a:spcBef>
+                <a:spcPts val="0"/>
+              </a:spcBef>
+              <a:spcAft>
+                <a:spcPts val="800"/>
+              </a:spcAft>
+            </a:pPr>
+            <a:r>
+              <a:rPr sz="1250" b="0" i="0">
+                <a:solidFill>
+                  <a:srgbClr val="FFFFFF"/>
+                </a:solidFill>
+                <a:latin typeface="Calibri"/>
+              </a:rPr>
+              <a:t>CABA +24%  ·  Patagonia (energía) destaca</a:t>
+            </a:r>
+          </a:p>
+          <a:p>
+            <a:pPr algn="l">
+              <a:spcBef>
+                <a:spcPts val="0"/>
+              </a:spcBef>
+              <a:spcAft>
+                <a:spcPts val="600"/>
+              </a:spcAft>
+            </a:pPr>
+            <a:r>
+              <a:rPr sz="1250" b="0" i="1">
+                <a:solidFill>
+                  <a:srgbClr val="FFFFFF"/>
+                </a:solidFill>
+                <a:latin typeface="Calibri"/>
+              </a:rPr>
+              <a:t>Dolarización (H5): no dio más estabilidad.</a:t>
+            </a:r>
+          </a:p>
+        </p:txBody>
+      </p:sp>
+    </p:spTree>
+  </p:cSld>
+  <p:clrMapOvr>
+    <a:masterClrMapping/>
+  </p:clrMapOvr>
+</p:sld>
+</file>
+
+<file path=ppt/slides/slide23.xml><?xml version="1.0" encoding="utf-8"?>
+<p:sld xmlns:a="http://schemas.openxmlformats.org/drawingml/2006/main" xmlns:p="http://schemas.openxmlformats.org/presentationml/2006/main" xmlns:r="http://schemas.openxmlformats.org/officeDocument/2006/relationships">
+  <p:cSld>
+    <p:spTree>
+      <p:nvGrpSpPr>
+        <p:cNvPr id="1" name=""/>
+        <p:cNvGrpSpPr/>
+        <p:nvPr/>
+      </p:nvGrpSpPr>
+      <p:grpSpPr/>
+      <p:sp>
+        <p:nvSpPr>
+          <p:cNvPr id="2" name="Rectangle 1"/>
+          <p:cNvSpPr/>
+          <p:nvPr/>
+        </p:nvSpPr>
+        <p:spPr>
+          <a:xfrm>
+            <a:off x="0" y="0"/>
+            <a:ext cx="12191695" cy="6858000"/>
+          </a:xfrm>
+          <a:prstGeom prst="rect">
+            <a:avLst/>
+          </a:prstGeom>
+          <a:solidFill>
+            <a:srgbClr val="FFFFFF"/>
+          </a:solidFill>
+          <a:ln>
+            <a:noFill/>
+          </a:ln>
+          <a:effectLst/>
+        </p:spPr>
+        <p:style>
+          <a:lnRef idx="1">
+            <a:schemeClr val="accent1"/>
+          </a:lnRef>
+          <a:fillRef idx="3">
+            <a:schemeClr val="accent1"/>
+          </a:fillRef>
+          <a:effectRef idx="2">
+            <a:schemeClr val="accent1"/>
+          </a:effectRef>
+          <a:fontRef idx="minor">
+            <a:schemeClr val="lt1"/>
+          </a:fontRef>
+        </p:style>
+        <p:txBody>
+          <a:bodyPr rtlCol="0" anchor="ctr"/>
+          <a:lstStyle/>
+          <a:p>
+            <a:pPr algn="ctr"/>
+          </a:p>
+        </p:txBody>
+      </p:sp>
+      <p:sp>
+        <p:nvSpPr>
+          <p:cNvPr id="3" name="TextBox 2"/>
+          <p:cNvSpPr txBox="1"/>
+          <p:nvPr/>
+        </p:nvSpPr>
+        <p:spPr>
+          <a:xfrm>
+            <a:off x="548640" y="384048"/>
+            <a:ext cx="10058400" cy="457200"/>
+          </a:xfrm>
+          <a:prstGeom prst="rect">
+            <a:avLst/>
+          </a:prstGeom>
+          <a:noFill/>
+        </p:spPr>
+        <p:txBody>
+          <a:bodyPr wrap="square" lIns="45720" rIns="45720" tIns="18288" bIns="18288">
+            <a:spAutoFit/>
+          </a:bodyPr>
+          <a:lstStyle/>
+          <a:p>
+            <a:pPr>
+              <a:spcAft>
+                <a:spcPts val="0"/>
+              </a:spcAft>
+            </a:pPr>
+            <a:r>
+              <a:rPr sz="1300" b="1">
+                <a:solidFill>
+                  <a:srgbClr val="0A0A0A"/>
+                </a:solidFill>
+                <a:latin typeface="Arial"/>
+              </a:rPr>
+              <a:t>06  ·  </a:t>
+            </a:r>
+            <a:r>
+              <a:rPr sz="1300" b="1">
+                <a:solidFill>
+                  <a:srgbClr val="8C8C8C"/>
+                </a:solidFill>
+                <a:latin typeface="Arial"/>
+              </a:rPr>
+              <a:t>RESULTADOS · COMPARATIVA INTERNACIONAL</a:t>
+            </a:r>
+          </a:p>
+        </p:txBody>
+      </p:sp>
+      <p:sp>
+        <p:nvSpPr>
+          <p:cNvPr id="4" name="TextBox 3"/>
+          <p:cNvSpPr txBox="1"/>
+          <p:nvPr/>
+        </p:nvSpPr>
+        <p:spPr>
+          <a:xfrm>
+            <a:off x="548640" y="868680"/>
+            <a:ext cx="11064240" cy="914400"/>
+          </a:xfrm>
+          <a:prstGeom prst="rect">
+            <a:avLst/>
+          </a:prstGeom>
+          <a:noFill/>
+        </p:spPr>
+        <p:txBody>
+          <a:bodyPr wrap="square" lIns="45720" rIns="45720" tIns="18288" bIns="18288">
+            <a:spAutoFit/>
+          </a:bodyPr>
+          <a:lstStyle/>
+          <a:p>
+            <a:pPr algn="l">
+              <a:spcBef>
+                <a:spcPts val="0"/>
+              </a:spcBef>
+              <a:spcAft>
+                <a:spcPts val="0"/>
+              </a:spcAft>
+            </a:pPr>
+            <a:r>
+              <a:rPr sz="3400" b="1" i="0">
+                <a:solidFill>
+                  <a:srgbClr val="0A0A0A"/>
+                </a:solidFill>
+                <a:latin typeface="Arial"/>
+              </a:rPr>
+              <a:t>Argentina vs el mundo</a:t>
+            </a:r>
+          </a:p>
+        </p:txBody>
+      </p:sp>
+      <p:pic>
+        <p:nvPicPr>
+          <p:cNvPr id="5" name="Picture 4" descr="comparacion_mundo.png"/>
+          <p:cNvPicPr>
+            <a:picLocks noChangeAspect="1"/>
+          </p:cNvPicPr>
+          <p:nvPr/>
+        </p:nvPicPr>
+        <p:blipFill>
+          <a:blip r:embed="rId2"/>
+          <a:stretch>
+            <a:fillRect/>
+          </a:stretch>
+        </p:blipFill>
+        <p:spPr>
+          <a:xfrm>
+            <a:off x="365760" y="2007196"/>
+            <a:ext cx="7955279" cy="3849447"/>
+          </a:xfrm>
+          <a:prstGeom prst="rect">
+            <a:avLst/>
+          </a:prstGeom>
+        </p:spPr>
+      </p:pic>
+      <p:sp>
+        <p:nvSpPr>
+          <p:cNvPr id="6" name="Rounded Rectangle 5"/>
+          <p:cNvSpPr/>
+          <p:nvPr/>
+        </p:nvSpPr>
+        <p:spPr>
+          <a:xfrm>
+            <a:off x="8412480" y="1828800"/>
+            <a:ext cx="3291840" cy="4114800"/>
+          </a:xfrm>
+          <a:prstGeom prst="roundRect">
+            <a:avLst/>
+          </a:prstGeom>
+          <a:solidFill>
+            <a:srgbClr val="0A0A0A"/>
+          </a:solidFill>
+          <a:ln>
+            <a:noFill/>
+          </a:ln>
+          <a:effectLst/>
+        </p:spPr>
+        <p:style>
+          <a:lnRef idx="1">
+            <a:schemeClr val="accent1"/>
+          </a:lnRef>
+          <a:fillRef idx="3">
+            <a:schemeClr val="accent1"/>
+          </a:fillRef>
+          <a:effectRef idx="2">
+            <a:schemeClr val="accent1"/>
+          </a:effectRef>
+          <a:fontRef idx="minor">
+            <a:schemeClr val="lt1"/>
+          </a:fontRef>
+        </p:style>
+        <p:txBody>
+          <a:bodyPr rtlCol="0" anchor="ctr"/>
+          <a:lstStyle/>
+          <a:p>
+            <a:pPr algn="ctr"/>
+          </a:p>
+        </p:txBody>
+      </p:sp>
+      <p:sp>
+        <p:nvSpPr>
+          <p:cNvPr id="7" name="TextBox 6"/>
+          <p:cNvSpPr txBox="1"/>
+          <p:nvPr/>
+        </p:nvSpPr>
+        <p:spPr>
+          <a:xfrm>
+            <a:off x="8641080" y="2057400"/>
+            <a:ext cx="2880360" cy="3749039"/>
+          </a:xfrm>
+          <a:prstGeom prst="rect">
+            <a:avLst/>
+          </a:prstGeom>
+          <a:noFill/>
+        </p:spPr>
+        <p:txBody>
+          <a:bodyPr wrap="square" lIns="45720" rIns="45720" tIns="18288" bIns="18288">
+            <a:spAutoFit/>
+          </a:bodyPr>
+          <a:lstStyle/>
+          <a:p>
+            <a:pPr algn="l">
+              <a:spcBef>
+                <a:spcPts val="0"/>
+              </a:spcBef>
+              <a:spcAft>
+                <a:spcPts val="800"/>
+              </a:spcAft>
+            </a:pPr>
+            <a:r>
+              <a:rPr sz="1300" b="1" i="0">
+                <a:solidFill>
+                  <a:srgbClr val="E6FF00"/>
+                </a:solidFill>
+                <a:latin typeface="Arial"/>
+              </a:rPr>
+              <a:t>STACK OVERFLOW</a:t>
+            </a:r>
+          </a:p>
+          <a:p>
+            <a:pPr algn="l">
+              <a:spcBef>
+                <a:spcPts val="0"/>
+              </a:spcBef>
+              <a:spcAft>
+                <a:spcPts val="900"/>
+              </a:spcAft>
+            </a:pPr>
+            <a:r>
+              <a:rPr sz="1250" b="0" i="0">
+                <a:solidFill>
+                  <a:srgbClr val="FFFFFF"/>
+                </a:solidFill>
+                <a:latin typeface="Calibri"/>
+              </a:rPr>
+              <a:t>—  Argentina USD 3.333/mes</a:t>
+            </a:r>
+          </a:p>
+          <a:p>
+            <a:pPr algn="l">
+              <a:spcBef>
+                <a:spcPts val="0"/>
+              </a:spcBef>
+              <a:spcAft>
+                <a:spcPts val="900"/>
+              </a:spcAft>
+            </a:pPr>
+            <a:r>
+              <a:rPr sz="1250" b="0" i="0">
+                <a:solidFill>
+                  <a:srgbClr val="FFFFFF"/>
+                </a:solidFill>
+                <a:latin typeface="Calibri"/>
+              </a:rPr>
+              <a:t>—  Arriba de Brasil, Ucrania e India</a:t>
+            </a:r>
+          </a:p>
+          <a:p>
+            <a:pPr algn="l">
+              <a:spcBef>
+                <a:spcPts val="0"/>
+              </a:spcBef>
+              <a:spcAft>
+                <a:spcPts val="900"/>
+              </a:spcAft>
+            </a:pPr>
+            <a:r>
+              <a:rPr sz="1250" b="0" i="0">
+                <a:solidFill>
+                  <a:srgbClr val="FFFFFF"/>
+                </a:solidFill>
+                <a:latin typeface="Calibri"/>
+              </a:rPr>
+              <a:t>—  Abajo de Europa y EE.UU. (12.500)</a:t>
+            </a:r>
+          </a:p>
+          <a:p>
+            <a:pPr algn="l">
+              <a:spcBef>
+                <a:spcPts val="0"/>
+              </a:spcBef>
+              <a:spcAft>
+                <a:spcPts val="600"/>
+              </a:spcAft>
+            </a:pPr>
+            <a:r>
+              <a:rPr sz="1200" b="0" i="1">
+                <a:solidFill>
+                  <a:srgbClr val="E6FF00"/>
+                </a:solidFill>
+                <a:latin typeface="Calibri"/>
+              </a:rPr>
+              <a:t>Sysarmy mide USD 2.264: más conservador. Stack Overflow capta perfiles más internacionales / senior.</a:t>
+            </a:r>
+          </a:p>
+        </p:txBody>
+      </p:sp>
+    </p:spTree>
+  </p:cSld>
+  <p:clrMapOvr>
+    <a:masterClrMapping/>
+  </p:clrMapOvr>
+</p:sld>
+</file>
+
+<file path=ppt/slides/slide24.xml><?xml version="1.0" encoding="utf-8"?>
+<p:sld xmlns:a="http://schemas.openxmlformats.org/drawingml/2006/main" xmlns:p="http://schemas.openxmlformats.org/presentationml/2006/main" xmlns:r="http://schemas.openxmlformats.org/officeDocument/2006/relationships">
+  <p:cSld>
+    <p:spTree>
+      <p:nvGrpSpPr>
+        <p:cNvPr id="1" name=""/>
+        <p:cNvGrpSpPr/>
+        <p:nvPr/>
+      </p:nvGrpSpPr>
+      <p:grpSpPr/>
+      <p:sp>
+        <p:nvSpPr>
+          <p:cNvPr id="2" name="Rectangle 1"/>
+          <p:cNvSpPr/>
+          <p:nvPr/>
+        </p:nvSpPr>
+        <p:spPr>
+          <a:xfrm>
+            <a:off x="0" y="0"/>
+            <a:ext cx="12191695" cy="6858000"/>
+          </a:xfrm>
+          <a:prstGeom prst="rect">
+            <a:avLst/>
+          </a:prstGeom>
+          <a:solidFill>
             <a:srgbClr val="0A0A0A"/>
           </a:solidFill>
           <a:ln>
@@ -13847,6 +15346,164 @@
             <a:avLst/>
           </a:prstGeom>
           <a:solidFill>
+            <a:srgbClr val="FFFFFF"/>
+          </a:solidFill>
+          <a:ln>
+            <a:noFill/>
+          </a:ln>
+          <a:effectLst/>
+        </p:spPr>
+        <p:style>
+          <a:lnRef idx="1">
+            <a:schemeClr val="accent1"/>
+          </a:lnRef>
+          <a:fillRef idx="3">
+            <a:schemeClr val="accent1"/>
+          </a:fillRef>
+          <a:effectRef idx="2">
+            <a:schemeClr val="accent1"/>
+          </a:effectRef>
+          <a:fontRef idx="minor">
+            <a:schemeClr val="lt1"/>
+          </a:fontRef>
+        </p:style>
+        <p:txBody>
+          <a:bodyPr rtlCol="0" anchor="ctr"/>
+          <a:lstStyle/>
+          <a:p>
+            <a:pPr algn="ctr"/>
+          </a:p>
+        </p:txBody>
+      </p:sp>
+      <p:sp>
+        <p:nvSpPr>
+          <p:cNvPr id="3" name="TextBox 2"/>
+          <p:cNvSpPr txBox="1"/>
+          <p:nvPr/>
+        </p:nvSpPr>
+        <p:spPr>
+          <a:xfrm>
+            <a:off x="548640" y="384048"/>
+            <a:ext cx="10058400" cy="457200"/>
+          </a:xfrm>
+          <a:prstGeom prst="rect">
+            <a:avLst/>
+          </a:prstGeom>
+          <a:noFill/>
+        </p:spPr>
+        <p:txBody>
+          <a:bodyPr wrap="square" lIns="45720" rIns="45720" tIns="18288" bIns="18288">
+            <a:spAutoFit/>
+          </a:bodyPr>
+          <a:lstStyle/>
+          <a:p>
+            <a:pPr>
+              <a:spcAft>
+                <a:spcPts val="0"/>
+              </a:spcAft>
+            </a:pPr>
+            <a:r>
+              <a:rPr sz="1300" b="1">
+                <a:solidFill>
+                  <a:srgbClr val="0A0A0A"/>
+                </a:solidFill>
+                <a:latin typeface="Arial"/>
+              </a:rPr>
+              <a:t>03  ·  </a:t>
+            </a:r>
+            <a:r>
+              <a:rPr sz="1300" b="1">
+                <a:solidFill>
+                  <a:srgbClr val="8C8C8C"/>
+                </a:solidFill>
+                <a:latin typeface="Arial"/>
+              </a:rPr>
+              <a:t>FOCO: LIMPIEZA DE DATOS</a:t>
+            </a:r>
+          </a:p>
+        </p:txBody>
+      </p:sp>
+      <p:sp>
+        <p:nvSpPr>
+          <p:cNvPr id="4" name="TextBox 3"/>
+          <p:cNvSpPr txBox="1"/>
+          <p:nvPr/>
+        </p:nvSpPr>
+        <p:spPr>
+          <a:xfrm>
+            <a:off x="548640" y="868680"/>
+            <a:ext cx="11064240" cy="914400"/>
+          </a:xfrm>
+          <a:prstGeom prst="rect">
+            <a:avLst/>
+          </a:prstGeom>
+          <a:noFill/>
+        </p:spPr>
+        <p:txBody>
+          <a:bodyPr wrap="square" lIns="45720" rIns="45720" tIns="18288" bIns="18288">
+            <a:spAutoFit/>
+          </a:bodyPr>
+          <a:lstStyle/>
+          <a:p>
+            <a:pPr algn="l">
+              <a:spcBef>
+                <a:spcPts val="0"/>
+              </a:spcBef>
+              <a:spcAft>
+                <a:spcPts val="0"/>
+              </a:spcAft>
+            </a:pPr>
+            <a:r>
+              <a:rPr sz="3400" b="1" i="0">
+                <a:solidFill>
+                  <a:srgbClr val="0A0A0A"/>
+                </a:solidFill>
+                <a:latin typeface="Arial"/>
+              </a:rPr>
+              <a:t>La limpieza en números, edición por edición</a:t>
+            </a:r>
+          </a:p>
+        </p:txBody>
+      </p:sp>
+      <p:pic>
+        <p:nvPicPr>
+          <p:cNvPr id="5" name="Picture 4" descr="limpieza_filas_bn.png"/>
+          <p:cNvPicPr>
+            <a:picLocks noChangeAspect="1"/>
+          </p:cNvPicPr>
+          <p:nvPr/>
+        </p:nvPicPr>
+        <p:blipFill>
+          <a:blip r:embed="rId2"/>
+          <a:stretch>
+            <a:fillRect/>
+          </a:stretch>
+        </p:blipFill>
+        <p:spPr>
+          <a:xfrm>
+            <a:off x="365760" y="1922272"/>
+            <a:ext cx="7863840" cy="4019295"/>
+          </a:xfrm>
+          <a:prstGeom prst="rect">
+            <a:avLst/>
+          </a:prstGeom>
+        </p:spPr>
+      </p:pic>
+      <p:sp>
+        <p:nvSpPr>
+          <p:cNvPr id="6" name="Rounded Rectangle 5"/>
+          <p:cNvSpPr/>
+          <p:nvPr/>
+        </p:nvSpPr>
+        <p:spPr>
+          <a:xfrm>
+            <a:off x="8412480" y="1783080"/>
+            <a:ext cx="3291840" cy="4206240"/>
+          </a:xfrm>
+          <a:prstGeom prst="roundRect">
+            <a:avLst/>
+          </a:prstGeom>
+          <a:solidFill>
             <a:srgbClr val="0A0A0A"/>
           </a:solidFill>
           <a:ln>
@@ -13878,14 +15535,14 @@
       </p:sp>
       <p:sp>
         <p:nvSpPr>
-          <p:cNvPr id="3" name="TextBox 2"/>
+          <p:cNvPr id="7" name="TextBox 6"/>
           <p:cNvSpPr txBox="1"/>
           <p:nvPr/>
         </p:nvSpPr>
         <p:spPr>
           <a:xfrm>
-            <a:off x="548640" y="384048"/>
-            <a:ext cx="10058400" cy="457200"/>
+            <a:off x="8641080" y="2011680"/>
+            <a:ext cx="2880360" cy="3840480"/>
           </a:xfrm>
           <a:prstGeom prst="rect">
             <a:avLst/>
@@ -13898,700 +15555,117 @@
           </a:bodyPr>
           <a:lstStyle/>
           <a:p>
-            <a:pPr>
-              <a:spcAft>
-                <a:spcPts val="0"/>
-              </a:spcAft>
-            </a:pPr>
-            <a:r>
-              <a:rPr sz="1300" b="1">
+            <a:pPr algn="l">
+              <a:spcBef>
+                <a:spcPts val="0"/>
+              </a:spcBef>
+              <a:spcAft>
+                <a:spcPts val="800"/>
+              </a:spcAft>
+            </a:pPr>
+            <a:r>
+              <a:rPr sz="1300" b="1" i="0">
                 <a:solidFill>
                   <a:srgbClr val="E6FF00"/>
                 </a:solidFill>
                 <a:latin typeface="Arial"/>
               </a:rPr>
-              <a:t>03  ·  </a:t>
-            </a:r>
-            <a:r>
-              <a:rPr sz="1300" b="1">
-                <a:solidFill>
-                  <a:srgbClr val="8C8C8C"/>
-                </a:solidFill>
-                <a:latin typeface="Arial"/>
-              </a:rPr>
-              <a:t>FOCO: FEATURE ENGINEERING</a:t>
-            </a:r>
-          </a:p>
-        </p:txBody>
-      </p:sp>
-      <p:sp>
-        <p:nvSpPr>
-          <p:cNvPr id="4" name="TextBox 3"/>
-          <p:cNvSpPr txBox="1"/>
-          <p:nvPr/>
-        </p:nvSpPr>
-        <p:spPr>
-          <a:xfrm>
-            <a:off x="548640" y="868680"/>
-            <a:ext cx="11064240" cy="914400"/>
-          </a:xfrm>
-          <a:prstGeom prst="rect">
-            <a:avLst/>
-          </a:prstGeom>
-          <a:noFill/>
-        </p:spPr>
-        <p:txBody>
-          <a:bodyPr wrap="square" lIns="45720" rIns="45720" tIns="18288" bIns="18288">
-            <a:spAutoFit/>
-          </a:bodyPr>
-          <a:lstStyle/>
-          <a:p>
-            <a:pPr algn="l">
-              <a:spcBef>
-                <a:spcPts val="0"/>
-              </a:spcBef>
-              <a:spcAft>
-                <a:spcPts val="0"/>
-              </a:spcAft>
-            </a:pPr>
-            <a:r>
-              <a:rPr sz="3400" b="1" i="0">
+              <a:t>QUÉ MUESTRA</a:t>
+            </a:r>
+          </a:p>
+          <a:p>
+            <a:pPr algn="l">
+              <a:spcBef>
+                <a:spcPts val="0"/>
+              </a:spcBef>
+              <a:spcAft>
+                <a:spcPts val="900"/>
+              </a:spcAft>
+            </a:pPr>
+            <a:r>
+              <a:rPr sz="1200" b="0" i="0">
                 <a:solidFill>
                   <a:srgbClr val="FFFFFF"/>
                 </a:solidFill>
-                <a:latin typeface="Arial"/>
-              </a:rPr>
-              <a:t>Construcción de variables — y su justificación</a:t>
-            </a:r>
-          </a:p>
-        </p:txBody>
-      </p:sp>
-      <p:sp>
-        <p:nvSpPr>
-          <p:cNvPr id="5" name="Rounded Rectangle 4"/>
-          <p:cNvSpPr/>
-          <p:nvPr/>
-        </p:nvSpPr>
-        <p:spPr>
-          <a:xfrm>
-            <a:off x="548640" y="1828800"/>
-            <a:ext cx="5486400" cy="1280160"/>
-          </a:xfrm>
-          <a:prstGeom prst="roundRect">
-            <a:avLst/>
-          </a:prstGeom>
-          <a:solidFill>
-            <a:srgbClr val="1A1A1A"/>
-          </a:solidFill>
-          <a:ln>
-            <a:noFill/>
-          </a:ln>
-          <a:effectLst/>
-        </p:spPr>
-        <p:style>
-          <a:lnRef idx="1">
-            <a:schemeClr val="accent1"/>
-          </a:lnRef>
-          <a:fillRef idx="3">
-            <a:schemeClr val="accent1"/>
-          </a:fillRef>
-          <a:effectRef idx="2">
-            <a:schemeClr val="accent1"/>
-          </a:effectRef>
-          <a:fontRef idx="minor">
-            <a:schemeClr val="lt1"/>
-          </a:fontRef>
-        </p:style>
-        <p:txBody>
-          <a:bodyPr rtlCol="0" anchor="ctr"/>
-          <a:lstStyle/>
-          <a:p>
-            <a:pPr algn="ctr"/>
-          </a:p>
-        </p:txBody>
-      </p:sp>
-      <p:sp>
-        <p:nvSpPr>
-          <p:cNvPr id="6" name="TextBox 5"/>
-          <p:cNvSpPr txBox="1"/>
-          <p:nvPr/>
-        </p:nvSpPr>
-        <p:spPr>
-          <a:xfrm>
-            <a:off x="731520" y="1975104"/>
-            <a:ext cx="5166360" cy="1051560"/>
-          </a:xfrm>
-          <a:prstGeom prst="rect">
-            <a:avLst/>
-          </a:prstGeom>
-          <a:noFill/>
-        </p:spPr>
-        <p:txBody>
-          <a:bodyPr wrap="square" lIns="45720" rIns="45720" tIns="18288" bIns="18288">
-            <a:spAutoFit/>
-          </a:bodyPr>
-          <a:lstStyle/>
-          <a:p>
-            <a:pPr algn="l">
-              <a:spcBef>
-                <a:spcPts val="0"/>
-              </a:spcBef>
-              <a:spcAft>
-                <a:spcPts val="300"/>
-              </a:spcAft>
-            </a:pPr>
-            <a:r>
-              <a:rPr sz="1350" b="1" i="0">
+                <a:latin typeface="Calibri"/>
+              </a:rPr>
+              <a:t>—  Gris: lo que llegó crudo</a:t>
+            </a:r>
+          </a:p>
+          <a:p>
+            <a:pPr algn="l">
+              <a:spcBef>
+                <a:spcPts val="0"/>
+              </a:spcBef>
+              <a:spcAft>
+                <a:spcPts val="900"/>
+              </a:spcAft>
+            </a:pPr>
+            <a:r>
+              <a:rPr sz="1200" b="0" i="0">
+                <a:solidFill>
+                  <a:srgbClr val="FFFFFF"/>
+                </a:solidFill>
+                <a:latin typeface="Calibri"/>
+              </a:rPr>
+              <a:t>—  Negro: lo que quedó tras limpiar</a:t>
+            </a:r>
+          </a:p>
+          <a:p>
+            <a:pPr algn="l">
+              <a:spcBef>
+                <a:spcPts val="0"/>
+              </a:spcBef>
+              <a:spcAft>
+                <a:spcPts val="900"/>
+              </a:spcAft>
+            </a:pPr>
+            <a:r>
+              <a:rPr sz="1200" b="0" i="0">
+                <a:solidFill>
+                  <a:srgbClr val="FFFFFF"/>
+                </a:solidFill>
+                <a:latin typeface="Calibri"/>
+              </a:rPr>
+              <a:t>—  La brecha es mínima en todas las ediciones</a:t>
+            </a:r>
+          </a:p>
+          <a:p>
+            <a:pPr algn="l">
+              <a:spcBef>
+                <a:spcPts val="0"/>
+              </a:spcBef>
+              <a:spcAft>
+                <a:spcPts val="900"/>
+              </a:spcAft>
+            </a:pPr>
+            <a:r>
+              <a:rPr sz="1200" b="0" i="0">
+                <a:solidFill>
+                  <a:srgbClr val="FFFFFF"/>
+                </a:solidFill>
+                <a:latin typeface="Calibri"/>
+              </a:rPr>
+              <a:t>—  Se descarta sólo lo crítico irrecuperable (sin salario o provincia) y errores de carga</a:t>
+            </a:r>
+          </a:p>
+          <a:p>
+            <a:pPr algn="l">
+              <a:spcBef>
+                <a:spcPts val="0"/>
+              </a:spcBef>
+              <a:spcAft>
+                <a:spcPts val="600"/>
+              </a:spcAft>
+            </a:pPr>
+            <a:r>
+              <a:rPr sz="1200" b="0" i="1">
                 <a:solidFill>
                   <a:srgbClr val="E6FF00"/>
                 </a:solidFill>
-                <a:latin typeface="Arial"/>
-              </a:rPr>
-              <a:t>Tecnologías: FUERA del modelo</a:t>
-            </a:r>
-          </a:p>
-          <a:p>
-            <a:pPr algn="l">
-              <a:spcBef>
-                <a:spcPts val="0"/>
-              </a:spcBef>
-              <a:spcAft>
-                <a:spcPts val="600"/>
-              </a:spcAft>
-            </a:pPr>
-            <a:r>
-              <a:rPr sz="1200" b="0" i="0">
-                <a:solidFill>
-                  <a:srgbClr val="FFFFFF"/>
-                </a:solidFill>
                 <a:latin typeface="Calibri"/>
               </a:rPr>
-              <a:t>su premium era proxy del contexto (backend/dólar) y como feature generaban ruido; se analizan en el EDA.</a:t>
-            </a:r>
-          </a:p>
-        </p:txBody>
-      </p:sp>
-      <p:sp>
-        <p:nvSpPr>
-          <p:cNvPr id="7" name="Rounded Rectangle 6"/>
-          <p:cNvSpPr/>
-          <p:nvPr/>
-        </p:nvSpPr>
-        <p:spPr>
-          <a:xfrm>
-            <a:off x="548640" y="3246120"/>
-            <a:ext cx="5486400" cy="1280160"/>
-          </a:xfrm>
-          <a:prstGeom prst="roundRect">
-            <a:avLst/>
-          </a:prstGeom>
-          <a:solidFill>
-            <a:srgbClr val="1A1A1A"/>
-          </a:solidFill>
-          <a:ln>
-            <a:noFill/>
-          </a:ln>
-          <a:effectLst/>
-        </p:spPr>
-        <p:style>
-          <a:lnRef idx="1">
-            <a:schemeClr val="accent1"/>
-          </a:lnRef>
-          <a:fillRef idx="3">
-            <a:schemeClr val="accent1"/>
-          </a:fillRef>
-          <a:effectRef idx="2">
-            <a:schemeClr val="accent1"/>
-          </a:effectRef>
-          <a:fontRef idx="minor">
-            <a:schemeClr val="lt1"/>
-          </a:fontRef>
-        </p:style>
-        <p:txBody>
-          <a:bodyPr rtlCol="0" anchor="ctr"/>
-          <a:lstStyle/>
-          <a:p>
-            <a:pPr algn="ctr"/>
-          </a:p>
-        </p:txBody>
-      </p:sp>
-      <p:sp>
-        <p:nvSpPr>
-          <p:cNvPr id="8" name="TextBox 7"/>
-          <p:cNvSpPr txBox="1"/>
-          <p:nvPr/>
-        </p:nvSpPr>
-        <p:spPr>
-          <a:xfrm>
-            <a:off x="731520" y="3392424"/>
-            <a:ext cx="5166360" cy="1051560"/>
-          </a:xfrm>
-          <a:prstGeom prst="rect">
-            <a:avLst/>
-          </a:prstGeom>
-          <a:noFill/>
-        </p:spPr>
-        <p:txBody>
-          <a:bodyPr wrap="square" lIns="45720" rIns="45720" tIns="18288" bIns="18288">
-            <a:spAutoFit/>
-          </a:bodyPr>
-          <a:lstStyle/>
-          <a:p>
-            <a:pPr algn="l">
-              <a:spcBef>
-                <a:spcPts val="0"/>
-              </a:spcBef>
-              <a:spcAft>
-                <a:spcPts val="300"/>
-              </a:spcAft>
-            </a:pPr>
-            <a:r>
-              <a:rPr sz="1350" b="1" i="0">
-                <a:solidFill>
-                  <a:srgbClr val="E6FF00"/>
-                </a:solidFill>
-                <a:latin typeface="Arial"/>
-              </a:rPr>
-              <a:t>Agrupar roles (698 → top 15 + «Otro»)</a:t>
-            </a:r>
-          </a:p>
-          <a:p>
-            <a:pPr algn="l">
-              <a:spcBef>
-                <a:spcPts val="0"/>
-              </a:spcBef>
-              <a:spcAft>
-                <a:spcPts val="600"/>
-              </a:spcAft>
-            </a:pPr>
-            <a:r>
-              <a:rPr sz="1200" b="0" i="0">
-                <a:solidFill>
-                  <a:srgbClr val="FFFFFF"/>
-                </a:solidFill>
-                <a:latin typeface="Calibri"/>
-              </a:rPr>
-              <a:t>reduce cardinalidad y evita dummies ruidosas / overfitting.</a:t>
-            </a:r>
-          </a:p>
-        </p:txBody>
-      </p:sp>
-      <p:sp>
-        <p:nvSpPr>
-          <p:cNvPr id="9" name="Rounded Rectangle 8"/>
-          <p:cNvSpPr/>
-          <p:nvPr/>
-        </p:nvSpPr>
-        <p:spPr>
-          <a:xfrm>
-            <a:off x="548640" y="4663440"/>
-            <a:ext cx="5486400" cy="1280160"/>
-          </a:xfrm>
-          <a:prstGeom prst="roundRect">
-            <a:avLst/>
-          </a:prstGeom>
-          <a:solidFill>
-            <a:srgbClr val="1A1A1A"/>
-          </a:solidFill>
-          <a:ln>
-            <a:noFill/>
-          </a:ln>
-          <a:effectLst/>
-        </p:spPr>
-        <p:style>
-          <a:lnRef idx="1">
-            <a:schemeClr val="accent1"/>
-          </a:lnRef>
-          <a:fillRef idx="3">
-            <a:schemeClr val="accent1"/>
-          </a:fillRef>
-          <a:effectRef idx="2">
-            <a:schemeClr val="accent1"/>
-          </a:effectRef>
-          <a:fontRef idx="minor">
-            <a:schemeClr val="lt1"/>
-          </a:fontRef>
-        </p:style>
-        <p:txBody>
-          <a:bodyPr rtlCol="0" anchor="ctr"/>
-          <a:lstStyle/>
-          <a:p>
-            <a:pPr algn="ctr"/>
-          </a:p>
-        </p:txBody>
-      </p:sp>
-      <p:sp>
-        <p:nvSpPr>
-          <p:cNvPr id="10" name="TextBox 9"/>
-          <p:cNvSpPr txBox="1"/>
-          <p:nvPr/>
-        </p:nvSpPr>
-        <p:spPr>
-          <a:xfrm>
-            <a:off x="731520" y="4809744"/>
-            <a:ext cx="5166360" cy="1051560"/>
-          </a:xfrm>
-          <a:prstGeom prst="rect">
-            <a:avLst/>
-          </a:prstGeom>
-          <a:noFill/>
-        </p:spPr>
-        <p:txBody>
-          <a:bodyPr wrap="square" lIns="45720" rIns="45720" tIns="18288" bIns="18288">
-            <a:spAutoFit/>
-          </a:bodyPr>
-          <a:lstStyle/>
-          <a:p>
-            <a:pPr algn="l">
-              <a:spcBef>
-                <a:spcPts val="0"/>
-              </a:spcBef>
-              <a:spcAft>
-                <a:spcPts val="300"/>
-              </a:spcAft>
-            </a:pPr>
-            <a:r>
-              <a:rPr sz="1350" b="1" i="0">
-                <a:solidFill>
-                  <a:srgbClr val="E6FF00"/>
-                </a:solidFill>
-                <a:latin typeface="Arial"/>
-              </a:rPr>
-              <a:t>Agrupar provincias (&lt;100 → «Otra»)</a:t>
-            </a:r>
-          </a:p>
-          <a:p>
-            <a:pPr algn="l">
-              <a:spcBef>
-                <a:spcPts val="0"/>
-              </a:spcBef>
-              <a:spcAft>
-                <a:spcPts val="600"/>
-              </a:spcAft>
-            </a:pPr>
-            <a:r>
-              <a:rPr sz="1200" b="0" i="0">
-                <a:solidFill>
-                  <a:srgbClr val="FFFFFF"/>
-                </a:solidFill>
-                <a:latin typeface="Calibri"/>
-              </a:rPr>
-              <a:t>misma lógica: categorías raras no aportan señal estable.</a:t>
-            </a:r>
-          </a:p>
-        </p:txBody>
-      </p:sp>
-      <p:sp>
-        <p:nvSpPr>
-          <p:cNvPr id="11" name="Rounded Rectangle 10"/>
-          <p:cNvSpPr/>
-          <p:nvPr/>
-        </p:nvSpPr>
-        <p:spPr>
-          <a:xfrm>
-            <a:off x="6263640" y="1828800"/>
-            <a:ext cx="5486400" cy="1280160"/>
-          </a:xfrm>
-          <a:prstGeom prst="roundRect">
-            <a:avLst/>
-          </a:prstGeom>
-          <a:solidFill>
-            <a:srgbClr val="1A1A1A"/>
-          </a:solidFill>
-          <a:ln>
-            <a:noFill/>
-          </a:ln>
-          <a:effectLst/>
-        </p:spPr>
-        <p:style>
-          <a:lnRef idx="1">
-            <a:schemeClr val="accent1"/>
-          </a:lnRef>
-          <a:fillRef idx="3">
-            <a:schemeClr val="accent1"/>
-          </a:fillRef>
-          <a:effectRef idx="2">
-            <a:schemeClr val="accent1"/>
-          </a:effectRef>
-          <a:fontRef idx="minor">
-            <a:schemeClr val="lt1"/>
-          </a:fontRef>
-        </p:style>
-        <p:txBody>
-          <a:bodyPr rtlCol="0" anchor="ctr"/>
-          <a:lstStyle/>
-          <a:p>
-            <a:pPr algn="ctr"/>
-          </a:p>
-        </p:txBody>
-      </p:sp>
-      <p:sp>
-        <p:nvSpPr>
-          <p:cNvPr id="12" name="TextBox 11"/>
-          <p:cNvSpPr txBox="1"/>
-          <p:nvPr/>
-        </p:nvSpPr>
-        <p:spPr>
-          <a:xfrm>
-            <a:off x="6446520" y="1975104"/>
-            <a:ext cx="5166360" cy="1051560"/>
-          </a:xfrm>
-          <a:prstGeom prst="rect">
-            <a:avLst/>
-          </a:prstGeom>
-          <a:noFill/>
-        </p:spPr>
-        <p:txBody>
-          <a:bodyPr wrap="square" lIns="45720" rIns="45720" tIns="18288" bIns="18288">
-            <a:spAutoFit/>
-          </a:bodyPr>
-          <a:lstStyle/>
-          <a:p>
-            <a:pPr algn="l">
-              <a:spcBef>
-                <a:spcPts val="0"/>
-              </a:spcBef>
-              <a:spcAft>
-                <a:spcPts val="300"/>
-              </a:spcAft>
-            </a:pPr>
-            <a:r>
-              <a:rPr sz="1350" b="1" i="0">
-                <a:solidFill>
-                  <a:srgbClr val="E6FF00"/>
-                </a:solidFill>
-                <a:latin typeface="Arial"/>
-              </a:rPr>
-              <a:t>Target real (deflación IPC / US CPI)</a:t>
-            </a:r>
-          </a:p>
-          <a:p>
-            <a:pPr algn="l">
-              <a:spcBef>
-                <a:spcPts val="0"/>
-              </a:spcBef>
-              <a:spcAft>
-                <a:spcPts val="600"/>
-              </a:spcAft>
-            </a:pPr>
-            <a:r>
-              <a:rPr sz="1200" b="0" i="0">
-                <a:solidFill>
-                  <a:srgbClr val="FFFFFF"/>
-                </a:solidFill>
-                <a:latin typeface="Calibri"/>
-              </a:rPr>
-              <a:t>ingeniería del objetivo: hace los salarios comparables en el tiempo.</a:t>
-            </a:r>
-          </a:p>
-        </p:txBody>
-      </p:sp>
-      <p:sp>
-        <p:nvSpPr>
-          <p:cNvPr id="13" name="Rounded Rectangle 12"/>
-          <p:cNvSpPr/>
-          <p:nvPr/>
-        </p:nvSpPr>
-        <p:spPr>
-          <a:xfrm>
-            <a:off x="6263640" y="3246120"/>
-            <a:ext cx="5486400" cy="1280160"/>
-          </a:xfrm>
-          <a:prstGeom prst="roundRect">
-            <a:avLst/>
-          </a:prstGeom>
-          <a:solidFill>
-            <a:srgbClr val="1A1A1A"/>
-          </a:solidFill>
-          <a:ln>
-            <a:noFill/>
-          </a:ln>
-          <a:effectLst/>
-        </p:spPr>
-        <p:style>
-          <a:lnRef idx="1">
-            <a:schemeClr val="accent1"/>
-          </a:lnRef>
-          <a:fillRef idx="3">
-            <a:schemeClr val="accent1"/>
-          </a:fillRef>
-          <a:effectRef idx="2">
-            <a:schemeClr val="accent1"/>
-          </a:effectRef>
-          <a:fontRef idx="minor">
-            <a:schemeClr val="lt1"/>
-          </a:fontRef>
-        </p:style>
-        <p:txBody>
-          <a:bodyPr rtlCol="0" anchor="ctr"/>
-          <a:lstStyle/>
-          <a:p>
-            <a:pPr algn="ctr"/>
-          </a:p>
-        </p:txBody>
-      </p:sp>
-      <p:sp>
-        <p:nvSpPr>
-          <p:cNvPr id="14" name="TextBox 13"/>
-          <p:cNvSpPr txBox="1"/>
-          <p:nvPr/>
-        </p:nvSpPr>
-        <p:spPr>
-          <a:xfrm>
-            <a:off x="6446520" y="3392424"/>
-            <a:ext cx="5166360" cy="1051560"/>
-          </a:xfrm>
-          <a:prstGeom prst="rect">
-            <a:avLst/>
-          </a:prstGeom>
-          <a:noFill/>
-        </p:spPr>
-        <p:txBody>
-          <a:bodyPr wrap="square" lIns="45720" rIns="45720" tIns="18288" bIns="18288">
-            <a:spAutoFit/>
-          </a:bodyPr>
-          <a:lstStyle/>
-          <a:p>
-            <a:pPr algn="l">
-              <a:spcBef>
-                <a:spcPts val="0"/>
-              </a:spcBef>
-              <a:spcAft>
-                <a:spcPts val="300"/>
-              </a:spcAft>
-            </a:pPr>
-            <a:r>
-              <a:rPr sz="1350" b="1" i="0">
-                <a:solidFill>
-                  <a:srgbClr val="E6FF00"/>
-                </a:solidFill>
-                <a:latin typeface="Arial"/>
-              </a:rPr>
-              <a:t>Selección: se quita seniority</a:t>
-            </a:r>
-          </a:p>
-          <a:p>
-            <a:pPr algn="l">
-              <a:spcBef>
-                <a:spcPts val="0"/>
-              </a:spcBef>
-              <a:spcAft>
-                <a:spcPts val="600"/>
-              </a:spcAft>
-            </a:pPr>
-            <a:r>
-              <a:rPr sz="1200" b="0" i="0">
-                <a:solidFill>
-                  <a:srgbClr val="FFFFFF"/>
-                </a:solidFill>
-                <a:latin typeface="Calibri"/>
-              </a:rPr>
-              <a:t>redundante con experiencia (multicolinealidad) → mismo R² con menos ruido.</a:t>
-            </a:r>
-          </a:p>
-        </p:txBody>
-      </p:sp>
-      <p:sp>
-        <p:nvSpPr>
-          <p:cNvPr id="15" name="Rounded Rectangle 14"/>
-          <p:cNvSpPr/>
-          <p:nvPr/>
-        </p:nvSpPr>
-        <p:spPr>
-          <a:xfrm>
-            <a:off x="6263640" y="4663440"/>
-            <a:ext cx="5486400" cy="1280160"/>
-          </a:xfrm>
-          <a:prstGeom prst="roundRect">
-            <a:avLst/>
-          </a:prstGeom>
-          <a:solidFill>
-            <a:srgbClr val="1A1A1A"/>
-          </a:solidFill>
-          <a:ln>
-            <a:noFill/>
-          </a:ln>
-          <a:effectLst/>
-        </p:spPr>
-        <p:style>
-          <a:lnRef idx="1">
-            <a:schemeClr val="accent1"/>
-          </a:lnRef>
-          <a:fillRef idx="3">
-            <a:schemeClr val="accent1"/>
-          </a:fillRef>
-          <a:effectRef idx="2">
-            <a:schemeClr val="accent1"/>
-          </a:effectRef>
-          <a:fontRef idx="minor">
-            <a:schemeClr val="lt1"/>
-          </a:fontRef>
-        </p:style>
-        <p:txBody>
-          <a:bodyPr rtlCol="0" anchor="ctr"/>
-          <a:lstStyle/>
-          <a:p>
-            <a:pPr algn="ctr"/>
-          </a:p>
-        </p:txBody>
-      </p:sp>
-      <p:sp>
-        <p:nvSpPr>
-          <p:cNvPr id="16" name="TextBox 15"/>
-          <p:cNvSpPr txBox="1"/>
-          <p:nvPr/>
-        </p:nvSpPr>
-        <p:spPr>
-          <a:xfrm>
-            <a:off x="6446520" y="4809744"/>
-            <a:ext cx="5166360" cy="1051560"/>
-          </a:xfrm>
-          <a:prstGeom prst="rect">
-            <a:avLst/>
-          </a:prstGeom>
-          <a:noFill/>
-        </p:spPr>
-        <p:txBody>
-          <a:bodyPr wrap="square" lIns="45720" rIns="45720" tIns="18288" bIns="18288">
-            <a:spAutoFit/>
-          </a:bodyPr>
-          <a:lstStyle/>
-          <a:p>
-            <a:pPr algn="l">
-              <a:spcBef>
-                <a:spcPts val="0"/>
-              </a:spcBef>
-              <a:spcAft>
-                <a:spcPts val="300"/>
-              </a:spcAft>
-            </a:pPr>
-            <a:r>
-              <a:rPr sz="1350" b="1" i="0">
-                <a:solidFill>
-                  <a:srgbClr val="E6FF00"/>
-                </a:solidFill>
-                <a:latin typeface="Arial"/>
-              </a:rPr>
-              <a:t>Anti-leakage</a:t>
-            </a:r>
-          </a:p>
-          <a:p>
-            <a:pPr algn="l">
-              <a:spcBef>
-                <a:spcPts val="0"/>
-              </a:spcBef>
-              <a:spcAft>
-                <a:spcPts val="600"/>
-              </a:spcAft>
-            </a:pPr>
-            <a:r>
-              <a:rPr sz="1200" b="0" i="0">
-                <a:solidFill>
-                  <a:srgbClr val="FFFFFF"/>
-                </a:solidFill>
-                <a:latin typeface="Calibri"/>
-              </a:rPr>
-              <a:t>se excluyen variables derivadas del salario (USD, canastas).</a:t>
+              <a:t>Limpiar ≠ recortar: es conservar datos confiables.</a:t>
             </a:r>
           </a:p>
         </p:txBody>
